--- a/so-what/So-What-Team-Day-2.pptx
+++ b/so-what/So-What-Team-Day-2.pptx
@@ -23,6 +23,7 @@
     <p:sldId id="271" r:id="rId22"/>
     <p:sldId id="272" r:id="rId23"/>
     <p:sldId id="273" r:id="rId24"/>
+    <p:sldId id="274" r:id="rId25"/>
   </p:sldIdLst>
   <p:sldSz cx="12191695" cy="6858000" type="screen4x3"/>
   <p:notesSz cx="6858000" cy="9144000"/>
@@ -3430,7 +3431,7 @@
                 </a:solidFill>
                 <a:latin typeface="Calibri"/>
               </a:rPr>
-              <a:t>. You leave with </a:t>
+              <a:t>. Each person brings </a:t>
             </a:r>
             <a:r>
               <a:rPr sz="1600" b="1" i="0">
@@ -3439,7 +3440,7 @@
                 </a:solidFill>
                 <a:latin typeface="Calibri"/>
               </a:rPr>
-              <a:t>owned starts and stops</a:t>
+              <a:t>one Stop · one Start · one Continue</a:t>
             </a:r>
             <a:r>
               <a:rPr sz="1600" b="0" i="0">
@@ -3448,7 +3449,7 @@
                 </a:solidFill>
                 <a:latin typeface="Calibri"/>
               </a:rPr>
-              <a:t> — not a wall of sticky notes.</a:t>
+              <a:t> — you vote, and make one real.</a:t>
             </a:r>
           </a:p>
         </p:txBody>
@@ -3748,7 +3749,7 @@
         <p:spPr>
           <a:xfrm>
             <a:off x="548640" y="2697480"/>
-            <a:ext cx="10058400" cy="320040"/>
+            <a:ext cx="10789920" cy="320040"/>
           </a:xfrm>
           <a:prstGeom prst="rect">
             <a:avLst/>
@@ -3779,7 +3780,7 @@
                 </a:solidFill>
                 <a:latin typeface="Consolas"/>
               </a:rPr>
-              <a:t>QUESTIONS FOR YOUR TABLE</a:t>
+              <a:t>THOUGHT-STARTERS — YOUR OWN IDEAS ARE BETTER</a:t>
             </a:r>
           </a:p>
         </p:txBody>
@@ -4257,7 +4258,7 @@
         <p:spPr>
           <a:xfrm>
             <a:off x="548640" y="2697480"/>
-            <a:ext cx="10058400" cy="320040"/>
+            <a:ext cx="10789920" cy="320040"/>
           </a:xfrm>
           <a:prstGeom prst="rect">
             <a:avLst/>
@@ -4288,7 +4289,7 @@
                 </a:solidFill>
                 <a:latin typeface="Consolas"/>
               </a:rPr>
-              <a:t>QUESTIONS FOR YOUR TABLE</a:t>
+              <a:t>THOUGHT-STARTERS — YOUR OWN IDEAS ARE BETTER</a:t>
             </a:r>
           </a:p>
         </p:txBody>
@@ -4766,7 +4767,7 @@
         <p:spPr>
           <a:xfrm>
             <a:off x="548640" y="2697480"/>
-            <a:ext cx="10058400" cy="320040"/>
+            <a:ext cx="10789920" cy="320040"/>
           </a:xfrm>
           <a:prstGeom prst="rect">
             <a:avLst/>
@@ -4797,7 +4798,7 @@
                 </a:solidFill>
                 <a:latin typeface="Consolas"/>
               </a:rPr>
-              <a:t>QUESTIONS FOR YOUR TABLE</a:t>
+              <a:t>THOUGHT-STARTERS — YOUR OWN IDEAS ARE BETTER</a:t>
             </a:r>
           </a:p>
         </p:txBody>
@@ -5364,7 +5365,7 @@
         <p:spPr>
           <a:xfrm>
             <a:off x="548640" y="2697480"/>
-            <a:ext cx="10058400" cy="320040"/>
+            <a:ext cx="10789920" cy="320040"/>
           </a:xfrm>
           <a:prstGeom prst="rect">
             <a:avLst/>
@@ -5395,7 +5396,7 @@
                 </a:solidFill>
                 <a:latin typeface="Consolas"/>
               </a:rPr>
-              <a:t>QUESTIONS FOR YOUR TABLE</a:t>
+              <a:t>THOUGHT-STARTERS — YOUR OWN IDEAS ARE BETTER</a:t>
             </a:r>
           </a:p>
         </p:txBody>
@@ -5858,7 +5859,7 @@
                 </a:solidFill>
                 <a:latin typeface="Consolas"/>
               </a:rPr>
-              <a:t>BREAKTHROUGH TOOLS</a:t>
+              <a:t>MENTAL MODELS TO HELP SPOT OPPORTUNITY</a:t>
             </a:r>
           </a:p>
         </p:txBody>
@@ -5903,21 +5904,66 @@
                 </a:solidFill>
                 <a:latin typeface="Calibri"/>
               </a:rPr>
-              <a:t>Break out of “add more, defend everything”</a:t>
-            </a:r>
-          </a:p>
-        </p:txBody>
-      </p:sp>
-      <p:sp>
-        <p:nvSpPr>
-          <p:cNvPr id="6" name="Rectangle 5"/>
+              <a:t>Find one that fits how you think</a:t>
+            </a:r>
+          </a:p>
+        </p:txBody>
+      </p:sp>
+      <p:sp>
+        <p:nvSpPr>
+          <p:cNvPr id="6" name="TextBox 5"/>
+          <p:cNvSpPr txBox="1"/>
+          <p:nvPr/>
+        </p:nvSpPr>
+        <p:spPr>
+          <a:xfrm>
+            <a:off x="548640" y="1481328"/>
+            <a:ext cx="11064240" cy="457200"/>
+          </a:xfrm>
+          <a:prstGeom prst="rect">
+            <a:avLst/>
+          </a:prstGeom>
+          <a:noFill/>
+        </p:spPr>
+        <p:txBody>
+          <a:bodyPr wrap="square" anchor="t" lIns="0" rIns="0" tIns="0" bIns="0">
+            <a:spAutoFit/>
+          </a:bodyPr>
+          <a:lstStyle/>
+          <a:p>
+            <a:pPr algn="l">
+              <a:lnSpc>
+                <a:spcPct val="108000"/>
+              </a:lnSpc>
+              <a:spcBef>
+                <a:spcPts val="0"/>
+              </a:spcBef>
+              <a:spcAft>
+                <a:spcPts val="600"/>
+              </a:spcAft>
+            </a:pPr>
+            <a:r>
+              <a:rPr sz="1450" b="0" i="1">
+                <a:solidFill>
+                  <a:srgbClr val="66717F"/>
+                </a:solidFill>
+                <a:latin typeface="Calibri"/>
+              </a:rPr>
+              <a:t>Borrowed from the business community — pick one and let it prompt your Stop / Start / Continue.</a:t>
+            </a:r>
+          </a:p>
+        </p:txBody>
+      </p:sp>
+      <p:sp>
+        <p:nvSpPr>
+          <p:cNvPr id="7" name="Rectangle 6"/>
           <p:cNvSpPr/>
           <p:nvPr/>
         </p:nvSpPr>
         <p:spPr>
           <a:xfrm>
-            <a:off x="548640" y="1691640"/>
-            <a:ext cx="5468112" cy="1060704"/>
+            <a:off x="548640" y="2057400"/>
+            <a:ext cx="5468112" cy="1261872"/>
           </a:xfrm>
           <a:prstGeom prst="rect">
             <a:avLst/>
@@ -5956,14 +6002,58 @@
       </p:sp>
       <p:sp>
         <p:nvSpPr>
-          <p:cNvPr id="7" name="TextBox 6"/>
-          <p:cNvSpPr txBox="1"/>
-          <p:nvPr/>
-        </p:nvSpPr>
-        <p:spPr>
-          <a:xfrm>
-            <a:off x="777240" y="1819656"/>
-            <a:ext cx="5029200" cy="320040"/>
+          <p:cNvPr id="8" name="Rectangle 7"/>
+          <p:cNvSpPr/>
+          <p:nvPr/>
+        </p:nvSpPr>
+        <p:spPr>
+          <a:xfrm>
+            <a:off x="548640" y="2057400"/>
+            <a:ext cx="82296" cy="1261872"/>
+          </a:xfrm>
+          <a:prstGeom prst="rect">
+            <a:avLst/>
+          </a:prstGeom>
+          <a:solidFill>
+            <a:srgbClr val="4A4BD6"/>
+          </a:solidFill>
+          <a:ln>
+            <a:noFill/>
+          </a:ln>
+          <a:effectLst/>
+        </p:spPr>
+        <p:style>
+          <a:lnRef idx="1">
+            <a:schemeClr val="accent1"/>
+          </a:lnRef>
+          <a:fillRef idx="3">
+            <a:schemeClr val="accent1"/>
+          </a:fillRef>
+          <a:effectRef idx="2">
+            <a:schemeClr val="accent1"/>
+          </a:effectRef>
+          <a:fontRef idx="minor">
+            <a:schemeClr val="lt1"/>
+          </a:fontRef>
+        </p:style>
+        <p:txBody>
+          <a:bodyPr rtlCol="0" anchor="ctr"/>
+          <a:lstStyle/>
+          <a:p>
+            <a:pPr algn="ctr"/>
+          </a:p>
+        </p:txBody>
+      </p:sp>
+      <p:sp>
+        <p:nvSpPr>
+          <p:cNvPr id="9" name="TextBox 8"/>
+          <p:cNvSpPr txBox="1"/>
+          <p:nvPr/>
+        </p:nvSpPr>
+        <p:spPr>
+          <a:xfrm>
+            <a:off x="804672" y="2185416"/>
+            <a:ext cx="5029200" cy="274320"/>
           </a:xfrm>
           <a:prstGeom prst="rect">
             <a:avLst/>
@@ -5988,27 +6078,27 @@
               </a:spcAft>
             </a:pPr>
             <a:r>
-              <a:rPr sz="1400" b="1" i="0">
-                <a:solidFill>
-                  <a:srgbClr val="111820"/>
-                </a:solidFill>
-                <a:latin typeface="Calibri"/>
-              </a:rPr>
-              <a:t>Stop-first / subtraction</a:t>
-            </a:r>
-          </a:p>
-        </p:txBody>
-      </p:sp>
-      <p:sp>
-        <p:nvSpPr>
-          <p:cNvPr id="8" name="TextBox 7"/>
-          <p:cNvSpPr txBox="1"/>
-          <p:nvPr/>
-        </p:nvSpPr>
-        <p:spPr>
-          <a:xfrm>
-            <a:off x="777240" y="2148840"/>
-            <a:ext cx="5074920" cy="548640"/>
+              <a:rPr sz="950" b="1" i="0">
+                <a:solidFill>
+                  <a:srgbClr val="4A4BD6"/>
+                </a:solidFill>
+                <a:latin typeface="Consolas"/>
+              </a:rPr>
+              <a:t>JEFF BEZOS</a:t>
+            </a:r>
+          </a:p>
+        </p:txBody>
+      </p:sp>
+      <p:sp>
+        <p:nvSpPr>
+          <p:cNvPr id="10" name="TextBox 9"/>
+          <p:cNvSpPr txBox="1"/>
+          <p:nvPr/>
+        </p:nvSpPr>
+        <p:spPr>
+          <a:xfrm>
+            <a:off x="804672" y="2423160"/>
+            <a:ext cx="5029200" cy="320040"/>
           </a:xfrm>
           <a:prstGeom prst="rect">
             <a:avLst/>
@@ -6033,27 +6123,72 @@
               </a:spcAft>
             </a:pPr>
             <a:r>
-              <a:rPr sz="1250" b="0" i="0">
+              <a:rPr sz="1500" b="1" i="0">
+                <a:solidFill>
+                  <a:srgbClr val="111820"/>
+                </a:solidFill>
+                <a:latin typeface="Calibri"/>
+              </a:rPr>
+              <a:t>Type 1 vs Type 2 decisions</a:t>
+            </a:r>
+          </a:p>
+        </p:txBody>
+      </p:sp>
+      <p:sp>
+        <p:nvSpPr>
+          <p:cNvPr id="11" name="TextBox 10"/>
+          <p:cNvSpPr txBox="1"/>
+          <p:nvPr/>
+        </p:nvSpPr>
+        <p:spPr>
+          <a:xfrm>
+            <a:off x="804672" y="2752344"/>
+            <a:ext cx="5074920" cy="548640"/>
+          </a:xfrm>
+          <a:prstGeom prst="rect">
+            <a:avLst/>
+          </a:prstGeom>
+          <a:noFill/>
+        </p:spPr>
+        <p:txBody>
+          <a:bodyPr wrap="square" anchor="t" lIns="0" rIns="0" tIns="0" bIns="0">
+            <a:spAutoFit/>
+          </a:bodyPr>
+          <a:lstStyle/>
+          <a:p>
+            <a:pPr algn="l">
+              <a:lnSpc>
+                <a:spcPct val="108000"/>
+              </a:lnSpc>
+              <a:spcBef>
+                <a:spcPts val="0"/>
+              </a:spcBef>
+              <a:spcAft>
+                <a:spcPts val="600"/>
+              </a:spcAft>
+            </a:pPr>
+            <a:r>
+              <a:rPr sz="1200" b="0" i="0">
                 <a:solidFill>
                   <a:srgbClr val="37424F"/>
                 </a:solidFill>
                 <a:latin typeface="Calibri"/>
               </a:rPr>
-              <a:t>We reflexively add and miss subtractive fixes. Run it stop-heavy.</a:t>
-            </a:r>
-          </a:p>
-        </p:txBody>
-      </p:sp>
-      <p:sp>
-        <p:nvSpPr>
-          <p:cNvPr id="9" name="Rectangle 8"/>
+              <a:t>Reversible (Type 2)? Decide fast and low. One-way door (Type 1)? That's what the room is for — slow down.</a:t>
+            </a:r>
+          </a:p>
+        </p:txBody>
+      </p:sp>
+      <p:sp>
+        <p:nvSpPr>
+          <p:cNvPr id="12" name="Rectangle 11"/>
           <p:cNvSpPr/>
           <p:nvPr/>
         </p:nvSpPr>
         <p:spPr>
           <a:xfrm>
-            <a:off x="6172200" y="1691640"/>
-            <a:ext cx="5468112" cy="1060704"/>
+            <a:off x="6172200" y="2057400"/>
+            <a:ext cx="5468112" cy="1261872"/>
           </a:xfrm>
           <a:prstGeom prst="rect">
             <a:avLst/>
@@ -6092,14 +6227,58 @@
       </p:sp>
       <p:sp>
         <p:nvSpPr>
-          <p:cNvPr id="10" name="TextBox 9"/>
-          <p:cNvSpPr txBox="1"/>
-          <p:nvPr/>
-        </p:nvSpPr>
-        <p:spPr>
-          <a:xfrm>
-            <a:off x="6400800" y="1819656"/>
-            <a:ext cx="5029200" cy="320040"/>
+          <p:cNvPr id="13" name="Rectangle 12"/>
+          <p:cNvSpPr/>
+          <p:nvPr/>
+        </p:nvSpPr>
+        <p:spPr>
+          <a:xfrm>
+            <a:off x="6172200" y="2057400"/>
+            <a:ext cx="82296" cy="1261872"/>
+          </a:xfrm>
+          <a:prstGeom prst="rect">
+            <a:avLst/>
+          </a:prstGeom>
+          <a:solidFill>
+            <a:srgbClr val="4A4BD6"/>
+          </a:solidFill>
+          <a:ln>
+            <a:noFill/>
+          </a:ln>
+          <a:effectLst/>
+        </p:spPr>
+        <p:style>
+          <a:lnRef idx="1">
+            <a:schemeClr val="accent1"/>
+          </a:lnRef>
+          <a:fillRef idx="3">
+            <a:schemeClr val="accent1"/>
+          </a:fillRef>
+          <a:effectRef idx="2">
+            <a:schemeClr val="accent1"/>
+          </a:effectRef>
+          <a:fontRef idx="minor">
+            <a:schemeClr val="lt1"/>
+          </a:fontRef>
+        </p:style>
+        <p:txBody>
+          <a:bodyPr rtlCol="0" anchor="ctr"/>
+          <a:lstStyle/>
+          <a:p>
+            <a:pPr algn="ctr"/>
+          </a:p>
+        </p:txBody>
+      </p:sp>
+      <p:sp>
+        <p:nvSpPr>
+          <p:cNvPr id="14" name="TextBox 13"/>
+          <p:cNvSpPr txBox="1"/>
+          <p:nvPr/>
+        </p:nvSpPr>
+        <p:spPr>
+          <a:xfrm>
+            <a:off x="6428232" y="2185416"/>
+            <a:ext cx="5029200" cy="274320"/>
           </a:xfrm>
           <a:prstGeom prst="rect">
             <a:avLst/>
@@ -6124,27 +6303,27 @@
               </a:spcAft>
             </a:pPr>
             <a:r>
-              <a:rPr sz="1400" b="1" i="0">
-                <a:solidFill>
-                  <a:srgbClr val="111820"/>
-                </a:solidFill>
-                <a:latin typeface="Calibri"/>
-              </a:rPr>
-              <a:t>Inversion</a:t>
-            </a:r>
-          </a:p>
-        </p:txBody>
-      </p:sp>
-      <p:sp>
-        <p:nvSpPr>
-          <p:cNvPr id="11" name="TextBox 10"/>
-          <p:cNvSpPr txBox="1"/>
-          <p:nvPr/>
-        </p:nvSpPr>
-        <p:spPr>
-          <a:xfrm>
-            <a:off x="6400800" y="2148840"/>
-            <a:ext cx="5074920" cy="548640"/>
+              <a:rPr sz="950" b="1" i="0">
+                <a:solidFill>
+                  <a:srgbClr val="4A4BD6"/>
+                </a:solidFill>
+                <a:latin typeface="Consolas"/>
+              </a:rPr>
+              <a:t>DONALD RUMSFELD</a:t>
+            </a:r>
+          </a:p>
+        </p:txBody>
+      </p:sp>
+      <p:sp>
+        <p:nvSpPr>
+          <p:cNvPr id="15" name="TextBox 14"/>
+          <p:cNvSpPr txBox="1"/>
+          <p:nvPr/>
+        </p:nvSpPr>
+        <p:spPr>
+          <a:xfrm>
+            <a:off x="6428232" y="2423160"/>
+            <a:ext cx="5029200" cy="320040"/>
           </a:xfrm>
           <a:prstGeom prst="rect">
             <a:avLst/>
@@ -6169,27 +6348,72 @@
               </a:spcAft>
             </a:pPr>
             <a:r>
-              <a:rPr sz="1250" b="0" i="0">
+              <a:rPr sz="1500" b="1" i="0">
+                <a:solidFill>
+                  <a:srgbClr val="111820"/>
+                </a:solidFill>
+                <a:latin typeface="Calibri"/>
+              </a:rPr>
+              <a:t>Known &amp; unknown unknowns</a:t>
+            </a:r>
+          </a:p>
+        </p:txBody>
+      </p:sp>
+      <p:sp>
+        <p:nvSpPr>
+          <p:cNvPr id="16" name="TextBox 15"/>
+          <p:cNvSpPr txBox="1"/>
+          <p:nvPr/>
+        </p:nvSpPr>
+        <p:spPr>
+          <a:xfrm>
+            <a:off x="6428232" y="2752344"/>
+            <a:ext cx="5074920" cy="548640"/>
+          </a:xfrm>
+          <a:prstGeom prst="rect">
+            <a:avLst/>
+          </a:prstGeom>
+          <a:noFill/>
+        </p:spPr>
+        <p:txBody>
+          <a:bodyPr wrap="square" anchor="t" lIns="0" rIns="0" tIns="0" bIns="0">
+            <a:spAutoFit/>
+          </a:bodyPr>
+          <a:lstStyle/>
+          <a:p>
+            <a:pPr algn="l">
+              <a:lnSpc>
+                <a:spcPct val="108000"/>
+              </a:lnSpc>
+              <a:spcBef>
+                <a:spcPts val="0"/>
+              </a:spcBef>
+              <a:spcAft>
+                <a:spcPts val="600"/>
+              </a:spcAft>
+            </a:pPr>
+            <a:r>
+              <a:rPr sz="1200" b="0" i="0">
                 <a:solidFill>
                   <a:srgbClr val="37424F"/>
                 </a:solidFill>
                 <a:latin typeface="Calibri"/>
               </a:rPr>
-              <a:t>Don't ask how to be the best — ask what would guarantee we're not, then stop it.</a:t>
-            </a:r>
-          </a:p>
-        </p:txBody>
-      </p:sp>
-      <p:sp>
-        <p:nvSpPr>
-          <p:cNvPr id="12" name="Rectangle 11"/>
+              <a:t>List your projects' known-unknowns — that's where critical-path pain hides. Go convert them to knowns now.</a:t>
+            </a:r>
+          </a:p>
+        </p:txBody>
+      </p:sp>
+      <p:sp>
+        <p:nvSpPr>
+          <p:cNvPr id="17" name="Rectangle 16"/>
           <p:cNvSpPr/>
           <p:nvPr/>
         </p:nvSpPr>
         <p:spPr>
           <a:xfrm>
-            <a:off x="548640" y="2862072"/>
-            <a:ext cx="5468112" cy="1060704"/>
+            <a:off x="548640" y="3447288"/>
+            <a:ext cx="5468112" cy="1261872"/>
           </a:xfrm>
           <a:prstGeom prst="rect">
             <a:avLst/>
@@ -6228,14 +6452,58 @@
       </p:sp>
       <p:sp>
         <p:nvSpPr>
-          <p:cNvPr id="13" name="TextBox 12"/>
-          <p:cNvSpPr txBox="1"/>
-          <p:nvPr/>
-        </p:nvSpPr>
-        <p:spPr>
-          <a:xfrm>
-            <a:off x="777240" y="2990088"/>
-            <a:ext cx="5029200" cy="320040"/>
+          <p:cNvPr id="18" name="Rectangle 17"/>
+          <p:cNvSpPr/>
+          <p:nvPr/>
+        </p:nvSpPr>
+        <p:spPr>
+          <a:xfrm>
+            <a:off x="548640" y="3447288"/>
+            <a:ext cx="82296" cy="1261872"/>
+          </a:xfrm>
+          <a:prstGeom prst="rect">
+            <a:avLst/>
+          </a:prstGeom>
+          <a:solidFill>
+            <a:srgbClr val="4A4BD6"/>
+          </a:solidFill>
+          <a:ln>
+            <a:noFill/>
+          </a:ln>
+          <a:effectLst/>
+        </p:spPr>
+        <p:style>
+          <a:lnRef idx="1">
+            <a:schemeClr val="accent1"/>
+          </a:lnRef>
+          <a:fillRef idx="3">
+            <a:schemeClr val="accent1"/>
+          </a:fillRef>
+          <a:effectRef idx="2">
+            <a:schemeClr val="accent1"/>
+          </a:effectRef>
+          <a:fontRef idx="minor">
+            <a:schemeClr val="lt1"/>
+          </a:fontRef>
+        </p:style>
+        <p:txBody>
+          <a:bodyPr rtlCol="0" anchor="ctr"/>
+          <a:lstStyle/>
+          <a:p>
+            <a:pPr algn="ctr"/>
+          </a:p>
+        </p:txBody>
+      </p:sp>
+      <p:sp>
+        <p:nvSpPr>
+          <p:cNvPr id="19" name="TextBox 18"/>
+          <p:cNvSpPr txBox="1"/>
+          <p:nvPr/>
+        </p:nvSpPr>
+        <p:spPr>
+          <a:xfrm>
+            <a:off x="804672" y="3575304"/>
+            <a:ext cx="5029200" cy="274320"/>
           </a:xfrm>
           <a:prstGeom prst="rect">
             <a:avLst/>
@@ -6260,27 +6528,27 @@
               </a:spcAft>
             </a:pPr>
             <a:r>
-              <a:rPr sz="1400" b="1" i="0">
-                <a:solidFill>
-                  <a:srgbClr val="111820"/>
-                </a:solidFill>
-                <a:latin typeface="Calibri"/>
-              </a:rPr>
-              <a:t>Pre-mortem</a:t>
-            </a:r>
-          </a:p>
-        </p:txBody>
-      </p:sp>
-      <p:sp>
-        <p:nvSpPr>
-          <p:cNvPr id="14" name="TextBox 13"/>
-          <p:cNvSpPr txBox="1"/>
-          <p:nvPr/>
-        </p:nvSpPr>
-        <p:spPr>
-          <a:xfrm>
-            <a:off x="777240" y="3319272"/>
-            <a:ext cx="5074920" cy="548640"/>
+              <a:rPr sz="950" b="1" i="0">
+                <a:solidFill>
+                  <a:srgbClr val="4A4BD6"/>
+                </a:solidFill>
+                <a:latin typeface="Consolas"/>
+              </a:rPr>
+              <a:t>CHARLIE MUNGER</a:t>
+            </a:r>
+          </a:p>
+        </p:txBody>
+      </p:sp>
+      <p:sp>
+        <p:nvSpPr>
+          <p:cNvPr id="20" name="TextBox 19"/>
+          <p:cNvSpPr txBox="1"/>
+          <p:nvPr/>
+        </p:nvSpPr>
+        <p:spPr>
+          <a:xfrm>
+            <a:off x="804672" y="3813048"/>
+            <a:ext cx="5029200" cy="320040"/>
           </a:xfrm>
           <a:prstGeom prst="rect">
             <a:avLst/>
@@ -6305,27 +6573,72 @@
               </a:spcAft>
             </a:pPr>
             <a:r>
-              <a:rPr sz="1250" b="0" i="0">
+              <a:rPr sz="1500" b="1" i="0">
+                <a:solidFill>
+                  <a:srgbClr val="111820"/>
+                </a:solidFill>
+                <a:latin typeface="Calibri"/>
+              </a:rPr>
+              <a:t>Inversion</a:t>
+            </a:r>
+          </a:p>
+        </p:txBody>
+      </p:sp>
+      <p:sp>
+        <p:nvSpPr>
+          <p:cNvPr id="21" name="TextBox 20"/>
+          <p:cNvSpPr txBox="1"/>
+          <p:nvPr/>
+        </p:nvSpPr>
+        <p:spPr>
+          <a:xfrm>
+            <a:off x="804672" y="4142232"/>
+            <a:ext cx="5074920" cy="548640"/>
+          </a:xfrm>
+          <a:prstGeom prst="rect">
+            <a:avLst/>
+          </a:prstGeom>
+          <a:noFill/>
+        </p:spPr>
+        <p:txBody>
+          <a:bodyPr wrap="square" anchor="t" lIns="0" rIns="0" tIns="0" bIns="0">
+            <a:spAutoFit/>
+          </a:bodyPr>
+          <a:lstStyle/>
+          <a:p>
+            <a:pPr algn="l">
+              <a:lnSpc>
+                <a:spcPct val="108000"/>
+              </a:lnSpc>
+              <a:spcBef>
+                <a:spcPts val="0"/>
+              </a:spcBef>
+              <a:spcAft>
+                <a:spcPts val="600"/>
+              </a:spcAft>
+            </a:pPr>
+            <a:r>
+              <a:rPr sz="1200" b="0" i="0">
                 <a:solidFill>
                   <a:srgbClr val="37424F"/>
                 </a:solidFill>
                 <a:latin typeface="Calibri"/>
               </a:rPr>
-              <a:t>“It's 2028 and this failed — why?” Surfaces the risk optimism hides.</a:t>
-            </a:r>
-          </a:p>
-        </p:txBody>
-      </p:sp>
-      <p:sp>
-        <p:nvSpPr>
-          <p:cNvPr id="15" name="Rectangle 14"/>
+              <a:t>Don't ask how to be the best. Ask what would guarantee we're not — then stop doing exactly that.</a:t>
+            </a:r>
+          </a:p>
+        </p:txBody>
+      </p:sp>
+      <p:sp>
+        <p:nvSpPr>
+          <p:cNvPr id="22" name="Rectangle 21"/>
           <p:cNvSpPr/>
           <p:nvPr/>
         </p:nvSpPr>
         <p:spPr>
           <a:xfrm>
-            <a:off x="6172200" y="2862072"/>
-            <a:ext cx="5468112" cy="1060704"/>
+            <a:off x="6172200" y="3447288"/>
+            <a:ext cx="5468112" cy="1261872"/>
           </a:xfrm>
           <a:prstGeom prst="rect">
             <a:avLst/>
@@ -6364,14 +6677,58 @@
       </p:sp>
       <p:sp>
         <p:nvSpPr>
-          <p:cNvPr id="16" name="TextBox 15"/>
-          <p:cNvSpPr txBox="1"/>
-          <p:nvPr/>
-        </p:nvSpPr>
-        <p:spPr>
-          <a:xfrm>
-            <a:off x="6400800" y="2990088"/>
-            <a:ext cx="5029200" cy="320040"/>
+          <p:cNvPr id="23" name="Rectangle 22"/>
+          <p:cNvSpPr/>
+          <p:nvPr/>
+        </p:nvSpPr>
+        <p:spPr>
+          <a:xfrm>
+            <a:off x="6172200" y="3447288"/>
+            <a:ext cx="82296" cy="1261872"/>
+          </a:xfrm>
+          <a:prstGeom prst="rect">
+            <a:avLst/>
+          </a:prstGeom>
+          <a:solidFill>
+            <a:srgbClr val="4A4BD6"/>
+          </a:solidFill>
+          <a:ln>
+            <a:noFill/>
+          </a:ln>
+          <a:effectLst/>
+        </p:spPr>
+        <p:style>
+          <a:lnRef idx="1">
+            <a:schemeClr val="accent1"/>
+          </a:lnRef>
+          <a:fillRef idx="3">
+            <a:schemeClr val="accent1"/>
+          </a:fillRef>
+          <a:effectRef idx="2">
+            <a:schemeClr val="accent1"/>
+          </a:effectRef>
+          <a:fontRef idx="minor">
+            <a:schemeClr val="lt1"/>
+          </a:fontRef>
+        </p:style>
+        <p:txBody>
+          <a:bodyPr rtlCol="0" anchor="ctr"/>
+          <a:lstStyle/>
+          <a:p>
+            <a:pPr algn="ctr"/>
+          </a:p>
+        </p:txBody>
+      </p:sp>
+      <p:sp>
+        <p:nvSpPr>
+          <p:cNvPr id="24" name="TextBox 23"/>
+          <p:cNvSpPr txBox="1"/>
+          <p:nvPr/>
+        </p:nvSpPr>
+        <p:spPr>
+          <a:xfrm>
+            <a:off x="6428232" y="3575304"/>
+            <a:ext cx="5029200" cy="274320"/>
           </a:xfrm>
           <a:prstGeom prst="rect">
             <a:avLst/>
@@ -6396,27 +6753,27 @@
               </a:spcAft>
             </a:pPr>
             <a:r>
-              <a:rPr sz="1400" b="1" i="0">
-                <a:solidFill>
-                  <a:srgbClr val="111820"/>
-                </a:solidFill>
-                <a:latin typeface="Calibri"/>
-              </a:rPr>
-              <a:t>Competitor / acquirer</a:t>
-            </a:r>
-          </a:p>
-        </p:txBody>
-      </p:sp>
-      <p:sp>
-        <p:nvSpPr>
-          <p:cNvPr id="17" name="TextBox 16"/>
-          <p:cNvSpPr txBox="1"/>
-          <p:nvPr/>
-        </p:nvSpPr>
-        <p:spPr>
-          <a:xfrm>
-            <a:off x="6400800" y="3319272"/>
-            <a:ext cx="5074920" cy="548640"/>
+              <a:rPr sz="950" b="1" i="0">
+                <a:solidFill>
+                  <a:srgbClr val="4A4BD6"/>
+                </a:solidFill>
+                <a:latin typeface="Consolas"/>
+              </a:rPr>
+              <a:t>HOWARD MARKS</a:t>
+            </a:r>
+          </a:p>
+        </p:txBody>
+      </p:sp>
+      <p:sp>
+        <p:nvSpPr>
+          <p:cNvPr id="25" name="TextBox 24"/>
+          <p:cNvSpPr txBox="1"/>
+          <p:nvPr/>
+        </p:nvSpPr>
+        <p:spPr>
+          <a:xfrm>
+            <a:off x="6428232" y="3813048"/>
+            <a:ext cx="5029200" cy="320040"/>
           </a:xfrm>
           <a:prstGeom prst="rect">
             <a:avLst/>
@@ -6441,27 +6798,72 @@
               </a:spcAft>
             </a:pPr>
             <a:r>
-              <a:rPr sz="1250" b="0" i="0">
+              <a:rPr sz="1500" b="1" i="0">
+                <a:solidFill>
+                  <a:srgbClr val="111820"/>
+                </a:solidFill>
+                <a:latin typeface="Calibri"/>
+              </a:rPr>
+              <a:t>Second-order thinking</a:t>
+            </a:r>
+          </a:p>
+        </p:txBody>
+      </p:sp>
+      <p:sp>
+        <p:nvSpPr>
+          <p:cNvPr id="26" name="TextBox 25"/>
+          <p:cNvSpPr txBox="1"/>
+          <p:nvPr/>
+        </p:nvSpPr>
+        <p:spPr>
+          <a:xfrm>
+            <a:off x="6428232" y="4142232"/>
+            <a:ext cx="5074920" cy="548640"/>
+          </a:xfrm>
+          <a:prstGeom prst="rect">
+            <a:avLst/>
+          </a:prstGeom>
+          <a:noFill/>
+        </p:spPr>
+        <p:txBody>
+          <a:bodyPr wrap="square" anchor="t" lIns="0" rIns="0" tIns="0" bIns="0">
+            <a:spAutoFit/>
+          </a:bodyPr>
+          <a:lstStyle/>
+          <a:p>
+            <a:pPr algn="l">
+              <a:lnSpc>
+                <a:spcPct val="108000"/>
+              </a:lnSpc>
+              <a:spcBef>
+                <a:spcPts val="0"/>
+              </a:spcBef>
+              <a:spcAft>
+                <a:spcPts val="600"/>
+              </a:spcAft>
+            </a:pPr>
+            <a:r>
+              <a:rPr sz="1200" b="0" i="0">
                 <a:solidFill>
                   <a:srgbClr val="37424F"/>
                 </a:solidFill>
                 <a:latin typeface="Calibri"/>
               </a:rPr>
-              <a:t>If a sharp buyer looked at our portfolio — what would they cut, what would they buy?</a:t>
-            </a:r>
-          </a:p>
-        </p:txBody>
-      </p:sp>
-      <p:sp>
-        <p:nvSpPr>
-          <p:cNvPr id="18" name="Rectangle 17"/>
+              <a:t>“And then what?” Everyone sees the first move; the edge is in the consequence of the consequence.</a:t>
+            </a:r>
+          </a:p>
+        </p:txBody>
+      </p:sp>
+      <p:sp>
+        <p:nvSpPr>
+          <p:cNvPr id="27" name="Rectangle 26"/>
           <p:cNvSpPr/>
           <p:nvPr/>
         </p:nvSpPr>
         <p:spPr>
           <a:xfrm>
-            <a:off x="548640" y="4032504"/>
-            <a:ext cx="5468112" cy="1060704"/>
+            <a:off x="548640" y="4837176"/>
+            <a:ext cx="5468112" cy="1261872"/>
           </a:xfrm>
           <a:prstGeom prst="rect">
             <a:avLst/>
@@ -6500,115 +6902,23 @@
       </p:sp>
       <p:sp>
         <p:nvSpPr>
-          <p:cNvPr id="19" name="TextBox 18"/>
-          <p:cNvSpPr txBox="1"/>
-          <p:nvPr/>
-        </p:nvSpPr>
-        <p:spPr>
-          <a:xfrm>
-            <a:off x="777240" y="4160520"/>
-            <a:ext cx="5029200" cy="320040"/>
-          </a:xfrm>
-          <a:prstGeom prst="rect">
-            <a:avLst/>
-          </a:prstGeom>
-          <a:noFill/>
-        </p:spPr>
-        <p:txBody>
-          <a:bodyPr wrap="square" anchor="t" lIns="0" rIns="0" tIns="0" bIns="0">
-            <a:spAutoFit/>
-          </a:bodyPr>
-          <a:lstStyle/>
-          <a:p>
-            <a:pPr algn="l">
-              <a:lnSpc>
-                <a:spcPct val="108000"/>
-              </a:lnSpc>
-              <a:spcBef>
-                <a:spcPts val="0"/>
-              </a:spcBef>
-              <a:spcAft>
-                <a:spcPts val="600"/>
-              </a:spcAft>
-            </a:pPr>
-            <a:r>
-              <a:rPr sz="1400" b="1" i="0">
-                <a:solidFill>
-                  <a:srgbClr val="111820"/>
-                </a:solidFill>
-                <a:latin typeface="Calibri"/>
-              </a:rPr>
-              <a:t>The trade</a:t>
-            </a:r>
-          </a:p>
-        </p:txBody>
-      </p:sp>
-      <p:sp>
-        <p:nvSpPr>
-          <p:cNvPr id="20" name="TextBox 19"/>
-          <p:cNvSpPr txBox="1"/>
-          <p:nvPr/>
-        </p:nvSpPr>
-        <p:spPr>
-          <a:xfrm>
-            <a:off x="777240" y="4489704"/>
-            <a:ext cx="5074920" cy="548640"/>
-          </a:xfrm>
-          <a:prstGeom prst="rect">
-            <a:avLst/>
-          </a:prstGeom>
-          <a:noFill/>
-        </p:spPr>
-        <p:txBody>
-          <a:bodyPr wrap="square" anchor="t" lIns="0" rIns="0" tIns="0" bIns="0">
-            <a:spAutoFit/>
-          </a:bodyPr>
-          <a:lstStyle/>
-          <a:p>
-            <a:pPr algn="l">
-              <a:lnSpc>
-                <a:spcPct val="108000"/>
-              </a:lnSpc>
-              <a:spcBef>
-                <a:spcPts val="0"/>
-              </a:spcBef>
-              <a:spcAft>
-                <a:spcPts val="600"/>
-              </a:spcAft>
-            </a:pPr>
-            <a:r>
-              <a:rPr sz="1250" b="0" i="0">
-                <a:solidFill>
-                  <a:srgbClr val="37424F"/>
-                </a:solidFill>
-                <a:latin typeface="Calibri"/>
-              </a:rPr>
-              <a:t>For every start, name what it displaces. No trade = a wish, not a priority.</a:t>
-            </a:r>
-          </a:p>
-        </p:txBody>
-      </p:sp>
-      <p:sp>
-        <p:nvSpPr>
-          <p:cNvPr id="21" name="Rectangle 20"/>
+          <p:cNvPr id="28" name="Rectangle 27"/>
           <p:cNvSpPr/>
           <p:nvPr/>
         </p:nvSpPr>
         <p:spPr>
           <a:xfrm>
-            <a:off x="6172200" y="4032504"/>
-            <a:ext cx="5468112" cy="1060704"/>
+            <a:off x="548640" y="4837176"/>
+            <a:ext cx="82296" cy="1261872"/>
           </a:xfrm>
           <a:prstGeom prst="rect">
             <a:avLst/>
           </a:prstGeom>
           <a:solidFill>
-            <a:srgbClr val="F4F6F9"/>
+            <a:srgbClr val="4A4BD6"/>
           </a:solidFill>
-          <a:ln w="9525">
-            <a:solidFill>
-              <a:srgbClr val="D8DEE6"/>
-            </a:solidFill>
+          <a:ln>
+            <a:noFill/>
           </a:ln>
           <a:effectLst/>
         </p:spPr>
@@ -6636,14 +6946,14 @@
       </p:sp>
       <p:sp>
         <p:nvSpPr>
-          <p:cNvPr id="22" name="TextBox 21"/>
-          <p:cNvSpPr txBox="1"/>
-          <p:nvPr/>
-        </p:nvSpPr>
-        <p:spPr>
-          <a:xfrm>
-            <a:off x="6400800" y="4160520"/>
-            <a:ext cx="5029200" cy="320040"/>
+          <p:cNvPr id="29" name="TextBox 28"/>
+          <p:cNvSpPr txBox="1"/>
+          <p:nvPr/>
+        </p:nvSpPr>
+        <p:spPr>
+          <a:xfrm>
+            <a:off x="804672" y="4965192"/>
+            <a:ext cx="5029200" cy="274320"/>
           </a:xfrm>
           <a:prstGeom prst="rect">
             <a:avLst/>
@@ -6668,27 +6978,27 @@
               </a:spcAft>
             </a:pPr>
             <a:r>
-              <a:rPr sz="1400" b="1" i="0">
-                <a:solidFill>
-                  <a:srgbClr val="111820"/>
-                </a:solidFill>
-                <a:latin typeface="Calibri"/>
-              </a:rPr>
-              <a:t>Type 1 vs Type 2</a:t>
-            </a:r>
-          </a:p>
-        </p:txBody>
-      </p:sp>
-      <p:sp>
-        <p:nvSpPr>
-          <p:cNvPr id="23" name="TextBox 22"/>
-          <p:cNvSpPr txBox="1"/>
-          <p:nvPr/>
-        </p:nvSpPr>
-        <p:spPr>
-          <a:xfrm>
-            <a:off x="6400800" y="4489704"/>
-            <a:ext cx="5074920" cy="548640"/>
+              <a:rPr sz="950" b="1" i="0">
+                <a:solidFill>
+                  <a:srgbClr val="4A4BD6"/>
+                </a:solidFill>
+                <a:latin typeface="Consolas"/>
+              </a:rPr>
+              <a:t>MUSK / ARISTOTLE</a:t>
+            </a:r>
+          </a:p>
+        </p:txBody>
+      </p:sp>
+      <p:sp>
+        <p:nvSpPr>
+          <p:cNvPr id="30" name="TextBox 29"/>
+          <p:cNvSpPr txBox="1"/>
+          <p:nvPr/>
+        </p:nvSpPr>
+        <p:spPr>
+          <a:xfrm>
+            <a:off x="804672" y="5202936"/>
+            <a:ext cx="5029200" cy="320040"/>
           </a:xfrm>
           <a:prstGeom prst="rect">
             <a:avLst/>
@@ -6713,73 +7023,27 @@
               </a:spcAft>
             </a:pPr>
             <a:r>
-              <a:rPr sz="1250" b="0" i="0">
-                <a:solidFill>
-                  <a:srgbClr val="37424F"/>
+              <a:rPr sz="1500" b="1" i="0">
+                <a:solidFill>
+                  <a:srgbClr val="111820"/>
                 </a:solidFill>
                 <a:latin typeface="Calibri"/>
               </a:rPr>
-              <a:t>Reversible? Just try it. Irreversible? That's what the room is for.</a:t>
-            </a:r>
-          </a:p>
-        </p:txBody>
-      </p:sp>
-      <p:sp>
-        <p:nvSpPr>
-          <p:cNvPr id="24" name="Rectangle 23"/>
-          <p:cNvSpPr/>
-          <p:nvPr/>
-        </p:nvSpPr>
-        <p:spPr>
-          <a:xfrm>
-            <a:off x="548640" y="5202936"/>
-            <a:ext cx="5468112" cy="1060704"/>
-          </a:xfrm>
-          <a:prstGeom prst="rect">
-            <a:avLst/>
-          </a:prstGeom>
-          <a:solidFill>
-            <a:srgbClr val="F4F6F9"/>
-          </a:solidFill>
-          <a:ln w="9525">
-            <a:solidFill>
-              <a:srgbClr val="D8DEE6"/>
-            </a:solidFill>
-          </a:ln>
-          <a:effectLst/>
-        </p:spPr>
-        <p:style>
-          <a:lnRef idx="1">
-            <a:schemeClr val="accent1"/>
-          </a:lnRef>
-          <a:fillRef idx="3">
-            <a:schemeClr val="accent1"/>
-          </a:fillRef>
-          <a:effectRef idx="2">
-            <a:schemeClr val="accent1"/>
-          </a:effectRef>
-          <a:fontRef idx="minor">
-            <a:schemeClr val="lt1"/>
-          </a:fontRef>
-        </p:style>
-        <p:txBody>
-          <a:bodyPr rtlCol="0" anchor="ctr"/>
-          <a:lstStyle/>
-          <a:p>
-            <a:pPr algn="ctr"/>
-          </a:p>
-        </p:txBody>
-      </p:sp>
-      <p:sp>
-        <p:nvSpPr>
-          <p:cNvPr id="25" name="TextBox 24"/>
-          <p:cNvSpPr txBox="1"/>
-          <p:nvPr/>
-        </p:nvSpPr>
-        <p:spPr>
-          <a:xfrm>
-            <a:off x="777240" y="5330952"/>
-            <a:ext cx="5029200" cy="320040"/>
+              <a:t>First-principles thinking</a:t>
+            </a:r>
+          </a:p>
+        </p:txBody>
+      </p:sp>
+      <p:sp>
+        <p:nvSpPr>
+          <p:cNvPr id="31" name="TextBox 30"/>
+          <p:cNvSpPr txBox="1"/>
+          <p:nvPr/>
+        </p:nvSpPr>
+        <p:spPr>
+          <a:xfrm>
+            <a:off x="804672" y="5532120"/>
+            <a:ext cx="5074920" cy="548640"/>
           </a:xfrm>
           <a:prstGeom prst="rect">
             <a:avLst/>
@@ -6804,201 +7068,20 @@
               </a:spcAft>
             </a:pPr>
             <a:r>
-              <a:rPr sz="1400" b="1" i="0">
-                <a:solidFill>
-                  <a:srgbClr val="111820"/>
+              <a:rPr sz="1200" b="0" i="0">
+                <a:solidFill>
+                  <a:srgbClr val="37424F"/>
                 </a:solidFill>
                 <a:latin typeface="Calibri"/>
               </a:rPr>
-              <a:t>Knowns &amp; unknowns</a:t>
-            </a:r>
-          </a:p>
-        </p:txBody>
-      </p:sp>
-      <p:sp>
-        <p:nvSpPr>
-          <p:cNvPr id="26" name="TextBox 25"/>
-          <p:cNvSpPr txBox="1"/>
-          <p:nvPr/>
-        </p:nvSpPr>
-        <p:spPr>
-          <a:xfrm>
-            <a:off x="777240" y="5660136"/>
-            <a:ext cx="5074920" cy="548640"/>
-          </a:xfrm>
-          <a:prstGeom prst="rect">
-            <a:avLst/>
-          </a:prstGeom>
-          <a:noFill/>
-        </p:spPr>
-        <p:txBody>
-          <a:bodyPr wrap="square" anchor="t" lIns="0" rIns="0" tIns="0" bIns="0">
-            <a:spAutoFit/>
-          </a:bodyPr>
-          <a:lstStyle/>
-          <a:p>
-            <a:pPr algn="l">
-              <a:lnSpc>
-                <a:spcPct val="108000"/>
-              </a:lnSpc>
-              <a:spcBef>
-                <a:spcPts val="0"/>
-              </a:spcBef>
-              <a:spcAft>
-                <a:spcPts val="600"/>
-              </a:spcAft>
-            </a:pPr>
-            <a:r>
-              <a:rPr sz="1250" b="0" i="0">
-                <a:solidFill>
-                  <a:srgbClr val="37424F"/>
-                </a:solidFill>
-                <a:latin typeface="Calibri"/>
-              </a:rPr>
-              <a:t>Known-unknowns are where critical-path pain hides — investigate them now.</a:t>
-            </a:r>
-          </a:p>
-        </p:txBody>
-      </p:sp>
-      <p:sp>
-        <p:nvSpPr>
-          <p:cNvPr id="27" name="Rectangle 26"/>
-          <p:cNvSpPr/>
-          <p:nvPr/>
-        </p:nvSpPr>
-        <p:spPr>
-          <a:xfrm>
-            <a:off x="6172200" y="5202936"/>
-            <a:ext cx="5468112" cy="1060704"/>
-          </a:xfrm>
-          <a:prstGeom prst="rect">
-            <a:avLst/>
-          </a:prstGeom>
-          <a:solidFill>
-            <a:srgbClr val="F4F6F9"/>
-          </a:solidFill>
-          <a:ln w="9525">
-            <a:solidFill>
-              <a:srgbClr val="D8DEE6"/>
-            </a:solidFill>
-          </a:ln>
-          <a:effectLst/>
-        </p:spPr>
-        <p:style>
-          <a:lnRef idx="1">
-            <a:schemeClr val="accent1"/>
-          </a:lnRef>
-          <a:fillRef idx="3">
-            <a:schemeClr val="accent1"/>
-          </a:fillRef>
-          <a:effectRef idx="2">
-            <a:schemeClr val="accent1"/>
-          </a:effectRef>
-          <a:fontRef idx="minor">
-            <a:schemeClr val="lt1"/>
-          </a:fontRef>
-        </p:style>
-        <p:txBody>
-          <a:bodyPr rtlCol="0" anchor="ctr"/>
-          <a:lstStyle/>
-          <a:p>
-            <a:pPr algn="ctr"/>
-          </a:p>
-        </p:txBody>
-      </p:sp>
-      <p:sp>
-        <p:nvSpPr>
-          <p:cNvPr id="28" name="TextBox 27"/>
-          <p:cNvSpPr txBox="1"/>
-          <p:nvPr/>
-        </p:nvSpPr>
-        <p:spPr>
-          <a:xfrm>
-            <a:off x="6400800" y="5330952"/>
-            <a:ext cx="5029200" cy="320040"/>
-          </a:xfrm>
-          <a:prstGeom prst="rect">
-            <a:avLst/>
-          </a:prstGeom>
-          <a:noFill/>
-        </p:spPr>
-        <p:txBody>
-          <a:bodyPr wrap="square" anchor="t" lIns="0" rIns="0" tIns="0" bIns="0">
-            <a:spAutoFit/>
-          </a:bodyPr>
-          <a:lstStyle/>
-          <a:p>
-            <a:pPr algn="l">
-              <a:lnSpc>
-                <a:spcPct val="108000"/>
-              </a:lnSpc>
-              <a:spcBef>
-                <a:spcPts val="0"/>
-              </a:spcBef>
-              <a:spcAft>
-                <a:spcPts val="600"/>
-              </a:spcAft>
-            </a:pPr>
-            <a:r>
-              <a:rPr sz="1400" b="1" i="0">
-                <a:solidFill>
-                  <a:srgbClr val="111820"/>
-                </a:solidFill>
-                <a:latin typeface="Calibri"/>
-              </a:rPr>
-              <a:t>Work backwards from the market</a:t>
-            </a:r>
-          </a:p>
-        </p:txBody>
-      </p:sp>
-      <p:sp>
-        <p:nvSpPr>
-          <p:cNvPr id="29" name="TextBox 28"/>
-          <p:cNvSpPr txBox="1"/>
-          <p:nvPr/>
-        </p:nvSpPr>
-        <p:spPr>
-          <a:xfrm>
-            <a:off x="6400800" y="5660136"/>
-            <a:ext cx="5074920" cy="548640"/>
-          </a:xfrm>
-          <a:prstGeom prst="rect">
-            <a:avLst/>
-          </a:prstGeom>
-          <a:noFill/>
-        </p:spPr>
-        <p:txBody>
-          <a:bodyPr wrap="square" anchor="t" lIns="0" rIns="0" tIns="0" bIns="0">
-            <a:spAutoFit/>
-          </a:bodyPr>
-          <a:lstStyle/>
-          <a:p>
-            <a:pPr algn="l">
-              <a:lnSpc>
-                <a:spcPct val="108000"/>
-              </a:lnSpc>
-              <a:spcBef>
-                <a:spcPts val="0"/>
-              </a:spcBef>
-              <a:spcAft>
-                <a:spcPts val="600"/>
-              </a:spcAft>
-            </a:pPr>
-            <a:r>
-              <a:rPr sz="1250" b="0" i="0">
-                <a:solidFill>
-                  <a:srgbClr val="37424F"/>
-                </a:solidFill>
-                <a:latin typeface="Calibri"/>
-              </a:rPr>
-              <a:t>Start from what the market rewards — then ask if the project fits.</a:t>
-            </a:r>
-          </a:p>
-        </p:txBody>
-      </p:sp>
-      <p:sp>
-        <p:nvSpPr>
-          <p:cNvPr id="30" name="TextBox 29"/>
+              <a:t>Strip the problem to what's physically and commercially true, then rebuild — not “how it's always been done.”</a:t>
+            </a:r>
+          </a:p>
+        </p:txBody>
+      </p:sp>
+      <p:sp>
+        <p:nvSpPr>
+          <p:cNvPr id="32" name="TextBox 31"/>
           <p:cNvSpPr txBox="1"/>
           <p:nvPr/>
         </p:nvSpPr>
@@ -7187,7 +7270,7 @@
                 </a:solidFill>
                 <a:latin typeface="Consolas"/>
               </a:rPr>
-              <a:t>WAYS OF WORKING · A FEATURED CANDIDATE</a:t>
+              <a:t>A CROSS-CUTTING STRAND ANY GROUP CAN PICK UP</a:t>
             </a:r>
           </a:p>
         </p:txBody>
@@ -7232,7 +7315,7 @@
                 </a:solidFill>
                 <a:latin typeface="Calibri"/>
               </a:rPr>
-              <a:t>We share knowledge by talking at people — the record is thin</a:t>
+              <a:t>Capture, structure and clarity are near-free now</a:t>
             </a:r>
           </a:p>
         </p:txBody>
@@ -7245,8 +7328,8 @@
         </p:nvSpPr>
         <p:spPr>
           <a:xfrm>
-            <a:off x="548640" y="1645920"/>
-            <a:ext cx="10972800" cy="548640"/>
+            <a:off x="548640" y="1627632"/>
+            <a:ext cx="11064240" cy="822960"/>
           </a:xfrm>
           <a:prstGeom prst="rect">
             <a:avLst/>
@@ -7277,179 +7360,54 @@
                 </a:solidFill>
                 <a:latin typeface="Calibri"/>
               </a:rPr>
-              <a:t>Big meetings are low-bandwidth and leave almost no trace. And AI just made good documentation nearly free — so thin records are now a choice, not a constraint.</a:t>
-            </a:r>
-          </a:p>
-        </p:txBody>
-      </p:sp>
-      <p:sp>
-        <p:nvSpPr>
-          <p:cNvPr id="7" name="TextBox 6"/>
-          <p:cNvSpPr txBox="1"/>
-          <p:nvPr/>
-        </p:nvSpPr>
-        <p:spPr>
-          <a:xfrm>
-            <a:off x="548640" y="2651760"/>
-            <a:ext cx="11064240" cy="2743200"/>
-          </a:xfrm>
-          <a:prstGeom prst="rect">
-            <a:avLst/>
-          </a:prstGeom>
-          <a:noFill/>
-        </p:spPr>
-        <p:txBody>
-          <a:bodyPr wrap="square" lIns="0" rIns="0" tIns="0" bIns="0">
-            <a:spAutoFit/>
-          </a:bodyPr>
-          <a:lstStyle/>
-          <a:p>
-            <a:pPr>
-              <a:lnSpc>
-                <a:spcPct val="108000"/>
-              </a:lnSpc>
-              <a:spcAft>
-                <a:spcPts val="1400"/>
-              </a:spcAft>
-            </a:pPr>
-            <a:r>
-              <a:rPr sz="1650" b="1">
-                <a:solidFill>
-                  <a:srgbClr val="4A4BD6"/>
-                </a:solidFill>
-                <a:latin typeface="Calibri"/>
-              </a:rPr>
-              <a:t>›  </a:t>
-            </a:r>
-            <a:r>
-              <a:rPr sz="1650" b="1">
-                <a:solidFill>
-                  <a:srgbClr val="111820"/>
-                </a:solidFill>
-                <a:latin typeface="Calibri"/>
-              </a:rPr>
-              <a:t>Written-first, async by default</a:t>
-            </a:r>
-            <a:r>
-              <a:rPr sz="1650" b="0">
-                <a:solidFill>
-                  <a:srgbClr val="37424F"/>
-                </a:solidFill>
-                <a:latin typeface="Calibri"/>
-              </a:rPr>
-              <a:t> — a one-page brief and a running decision log beat a 40-person call.</a:t>
-            </a:r>
-          </a:p>
-          <a:p>
-            <a:pPr>
-              <a:lnSpc>
-                <a:spcPct val="108000"/>
-              </a:lnSpc>
-              <a:spcAft>
-                <a:spcPts val="1400"/>
-              </a:spcAft>
-            </a:pPr>
-            <a:r>
-              <a:rPr sz="1650" b="1">
-                <a:solidFill>
-                  <a:srgbClr val="4A4BD6"/>
-                </a:solidFill>
-                <a:latin typeface="Calibri"/>
-              </a:rPr>
-              <a:t>›  </a:t>
-            </a:r>
-            <a:r>
-              <a:rPr sz="1650" b="1">
-                <a:solidFill>
-                  <a:srgbClr val="111820"/>
-                </a:solidFill>
-                <a:latin typeface="Calibri"/>
-              </a:rPr>
-              <a:t>A living “project passport” per project</a:t>
-            </a:r>
-            <a:r>
-              <a:rPr sz="1650" b="0">
-                <a:solidFill>
-                  <a:srgbClr val="37424F"/>
-                </a:solidFill>
-                <a:latin typeface="Calibri"/>
-              </a:rPr>
-              <a:t> — the test: if the lead left tomorrow, could someone pick it up from the written record alone?</a:t>
-            </a:r>
-          </a:p>
-          <a:p>
-            <a:pPr>
-              <a:lnSpc>
-                <a:spcPct val="108000"/>
-              </a:lnSpc>
-              <a:spcAft>
-                <a:spcPts val="1400"/>
-              </a:spcAft>
-            </a:pPr>
-            <a:r>
-              <a:rPr sz="1650" b="1">
-                <a:solidFill>
-                  <a:srgbClr val="4A4BD6"/>
-                </a:solidFill>
-                <a:latin typeface="Calibri"/>
-              </a:rPr>
-              <a:t>›  </a:t>
-            </a:r>
-            <a:r>
-              <a:rPr sz="1650" b="1">
-                <a:solidFill>
-                  <a:srgbClr val="111820"/>
-                </a:solidFill>
-                <a:latin typeface="Calibri"/>
-              </a:rPr>
-              <a:t>AI removes the excuse</a:t>
-            </a:r>
-            <a:r>
-              <a:rPr sz="1650" b="0">
-                <a:solidFill>
-                  <a:srgbClr val="37424F"/>
-                </a:solidFill>
-                <a:latin typeface="Calibri"/>
-              </a:rPr>
-              <a:t> — capture, structure and clarity are near-free now.</a:t>
-            </a:r>
-          </a:p>
-          <a:p>
-            <a:pPr>
-              <a:lnSpc>
-                <a:spcPct val="108000"/>
-              </a:lnSpc>
-              <a:spcAft>
-                <a:spcPts val="1400"/>
-              </a:spcAft>
-            </a:pPr>
-            <a:r>
-              <a:rPr sz="1650" b="1">
-                <a:solidFill>
-                  <a:srgbClr val="4A4BD6"/>
-                </a:solidFill>
-                <a:latin typeface="Calibri"/>
-              </a:rPr>
-              <a:t>›  </a:t>
-            </a:r>
-            <a:r>
-              <a:rPr sz="1650" b="1">
-                <a:solidFill>
-                  <a:srgbClr val="111820"/>
-                </a:solidFill>
-                <a:latin typeface="Calibri"/>
-              </a:rPr>
-              <a:t>Effective communication = clear · captured · findable · reusable.</a:t>
-            </a:r>
-            <a:r>
-              <a:rPr sz="1650" b="0">
-                <a:solidFill>
-                  <a:srgbClr val="37424F"/>
-                </a:solidFill>
-                <a:latin typeface="Calibri"/>
-              </a:rPr>
-              <a:t> If it isn't all four, it's theatre.</a:t>
-            </a:r>
+              <a:t>What used to be expensive — writing something up clearly, structuring a decision, keeping a durable record — AI now does in seconds. We don't want to be swamped by AI text; we want to use it to improve our record-keeping and the rationale behind our decisions.</a:t>
+            </a:r>
+          </a:p>
+        </p:txBody>
+      </p:sp>
+      <p:sp>
+        <p:nvSpPr>
+          <p:cNvPr id="7" name="Rectangle 6"/>
+          <p:cNvSpPr/>
+          <p:nvPr/>
+        </p:nvSpPr>
+        <p:spPr>
+          <a:xfrm>
+            <a:off x="548640" y="2697480"/>
+            <a:ext cx="11091672" cy="685800"/>
+          </a:xfrm>
+          <a:prstGeom prst="rect">
+            <a:avLst/>
+          </a:prstGeom>
+          <a:solidFill>
+            <a:srgbClr val="E9E9FB"/>
+          </a:solidFill>
+          <a:ln w="9525">
+            <a:solidFill>
+              <a:srgbClr val="4A4BD6"/>
+            </a:solidFill>
+          </a:ln>
+          <a:effectLst/>
+        </p:spPr>
+        <p:style>
+          <a:lnRef idx="1">
+            <a:schemeClr val="accent1"/>
+          </a:lnRef>
+          <a:fillRef idx="3">
+            <a:schemeClr val="accent1"/>
+          </a:fillRef>
+          <a:effectRef idx="2">
+            <a:schemeClr val="accent1"/>
+          </a:effectRef>
+          <a:fontRef idx="minor">
+            <a:schemeClr val="lt1"/>
+          </a:fontRef>
+        </p:style>
+        <p:txBody>
+          <a:bodyPr rtlCol="0" anchor="ctr"/>
+          <a:lstStyle/>
+          <a:p>
+            <a:pPr algn="ctr"/>
           </a:p>
         </p:txBody>
       </p:sp>
@@ -7461,8 +7419,8 @@
         </p:nvSpPr>
         <p:spPr>
           <a:xfrm>
-            <a:off x="548640" y="5943600"/>
-            <a:ext cx="10972800" cy="365760"/>
+            <a:off x="749808" y="2816352"/>
+            <a:ext cx="10698480" cy="502920"/>
           </a:xfrm>
           <a:prstGeom prst="rect">
             <a:avLst/>
@@ -7487,20 +7445,245 @@
               </a:spcAft>
             </a:pPr>
             <a:r>
-              <a:rPr sz="1250" b="0" i="1">
+              <a:rPr sz="1500" b="1" i="0">
+                <a:solidFill>
+                  <a:srgbClr val="111820"/>
+                </a:solidFill>
+                <a:latin typeface="Calibri"/>
+              </a:rPr>
+              <a:t>So the question for your group:  </a:t>
+            </a:r>
+            <a:r>
+              <a:rPr sz="1500" b="1" i="0">
+                <a:solidFill>
+                  <a:srgbClr val="4A4BD6"/>
+                </a:solidFill>
+                <a:latin typeface="Calibri"/>
+              </a:rPr>
+              <a:t>what does that mean for what we should be doing?</a:t>
+            </a:r>
+          </a:p>
+        </p:txBody>
+      </p:sp>
+      <p:sp>
+        <p:nvSpPr>
+          <p:cNvPr id="9" name="TextBox 8"/>
+          <p:cNvSpPr txBox="1"/>
+          <p:nvPr/>
+        </p:nvSpPr>
+        <p:spPr>
+          <a:xfrm>
+            <a:off x="548640" y="3703320"/>
+            <a:ext cx="11064240" cy="2194560"/>
+          </a:xfrm>
+          <a:prstGeom prst="rect">
+            <a:avLst/>
+          </a:prstGeom>
+          <a:noFill/>
+        </p:spPr>
+        <p:txBody>
+          <a:bodyPr wrap="square" lIns="0" rIns="0" tIns="0" bIns="0">
+            <a:spAutoFit/>
+          </a:bodyPr>
+          <a:lstStyle/>
+          <a:p>
+            <a:pPr>
+              <a:lnSpc>
+                <a:spcPct val="108000"/>
+              </a:lnSpc>
+              <a:spcAft>
+                <a:spcPts val="1100"/>
+              </a:spcAft>
+            </a:pPr>
+            <a:r>
+              <a:rPr sz="1500" b="1">
+                <a:solidFill>
+                  <a:srgbClr val="4A4BD6"/>
+                </a:solidFill>
+                <a:latin typeface="Calibri"/>
+              </a:rPr>
+              <a:t>›  </a:t>
+            </a:r>
+            <a:r>
+              <a:rPr sz="1500" b="1">
+                <a:solidFill>
+                  <a:srgbClr val="111820"/>
+                </a:solidFill>
+                <a:latin typeface="Calibri"/>
+              </a:rPr>
+              <a:t>Written-first</a:t>
+            </a:r>
+            <a:r>
+              <a:rPr sz="1500" b="0">
+                <a:solidFill>
+                  <a:srgbClr val="37424F"/>
+                </a:solidFill>
+                <a:latin typeface="Calibri"/>
+              </a:rPr>
+              <a:t> — the crisp record used to cost real effort, so we defaulted to talking at people. Now it's cheap, and it's durable.</a:t>
+            </a:r>
+          </a:p>
+          <a:p>
+            <a:pPr>
+              <a:lnSpc>
+                <a:spcPct val="108000"/>
+              </a:lnSpc>
+              <a:spcAft>
+                <a:spcPts val="1100"/>
+              </a:spcAft>
+            </a:pPr>
+            <a:r>
+              <a:rPr sz="1500" b="1">
+                <a:solidFill>
+                  <a:srgbClr val="4A4BD6"/>
+                </a:solidFill>
+                <a:latin typeface="Calibri"/>
+              </a:rPr>
+              <a:t>›  </a:t>
+            </a:r>
+            <a:r>
+              <a:rPr sz="1500" b="1">
+                <a:solidFill>
+                  <a:srgbClr val="111820"/>
+                </a:solidFill>
+                <a:latin typeface="Calibri"/>
+              </a:rPr>
+              <a:t>A living “project passport” per project</a:t>
+            </a:r>
+            <a:r>
+              <a:rPr sz="1500" b="0">
+                <a:solidFill>
+                  <a:srgbClr val="37424F"/>
+                </a:solidFill>
+                <a:latin typeface="Calibri"/>
+              </a:rPr>
+              <a:t> — the test: if the lead left tomorrow, could someone run it from the written record alone?</a:t>
+            </a:r>
+          </a:p>
+          <a:p>
+            <a:pPr>
+              <a:lnSpc>
+                <a:spcPct val="108000"/>
+              </a:lnSpc>
+              <a:spcAft>
+                <a:spcPts val="1100"/>
+              </a:spcAft>
+            </a:pPr>
+            <a:r>
+              <a:rPr sz="1500" b="1">
+                <a:solidFill>
+                  <a:srgbClr val="4A4BD6"/>
+                </a:solidFill>
+                <a:latin typeface="Calibri"/>
+              </a:rPr>
+              <a:t>›  </a:t>
+            </a:r>
+            <a:r>
+              <a:rPr sz="1500" b="1">
+                <a:solidFill>
+                  <a:srgbClr val="111820"/>
+                </a:solidFill>
+                <a:latin typeface="Calibri"/>
+              </a:rPr>
+              <a:t>Capture the why, not just the what</a:t>
+            </a:r>
+            <a:r>
+              <a:rPr sz="1500" b="0">
+                <a:solidFill>
+                  <a:srgbClr val="37424F"/>
+                </a:solidFill>
+                <a:latin typeface="Calibri"/>
+              </a:rPr>
+              <a:t> — the decision and the reasoning, so future-us isn't reverse-engineering it.</a:t>
+            </a:r>
+          </a:p>
+          <a:p>
+            <a:pPr>
+              <a:lnSpc>
+                <a:spcPct val="108000"/>
+              </a:lnSpc>
+              <a:spcAft>
+                <a:spcPts val="1100"/>
+              </a:spcAft>
+            </a:pPr>
+            <a:r>
+              <a:rPr sz="1500" b="1">
+                <a:solidFill>
+                  <a:srgbClr val="4A4BD6"/>
+                </a:solidFill>
+                <a:latin typeface="Calibri"/>
+              </a:rPr>
+              <a:t>›  </a:t>
+            </a:r>
+            <a:r>
+              <a:rPr sz="1500" b="1">
+                <a:solidFill>
+                  <a:srgbClr val="111820"/>
+                </a:solidFill>
+                <a:latin typeface="Calibri"/>
+              </a:rPr>
+              <a:t>Effective comms = clear · captured · findable · reusable.</a:t>
+            </a:r>
+            <a:r>
+              <a:rPr sz="1500" b="0">
+                <a:solidFill>
+                  <a:srgbClr val="37424F"/>
+                </a:solidFill>
+                <a:latin typeface="Calibri"/>
+              </a:rPr>
+              <a:t> If it isn't all four, it's theatre.</a:t>
+            </a:r>
+          </a:p>
+        </p:txBody>
+      </p:sp>
+      <p:sp>
+        <p:nvSpPr>
+          <p:cNvPr id="10" name="TextBox 9"/>
+          <p:cNvSpPr txBox="1"/>
+          <p:nvPr/>
+        </p:nvSpPr>
+        <p:spPr>
+          <a:xfrm>
+            <a:off x="548640" y="6053328"/>
+            <a:ext cx="10972800" cy="365760"/>
+          </a:xfrm>
+          <a:prstGeom prst="rect">
+            <a:avLst/>
+          </a:prstGeom>
+          <a:noFill/>
+        </p:spPr>
+        <p:txBody>
+          <a:bodyPr wrap="square" anchor="t" lIns="0" rIns="0" tIns="0" bIns="0">
+            <a:spAutoFit/>
+          </a:bodyPr>
+          <a:lstStyle/>
+          <a:p>
+            <a:pPr algn="l">
+              <a:lnSpc>
+                <a:spcPct val="108000"/>
+              </a:lnSpc>
+              <a:spcBef>
+                <a:spcPts val="0"/>
+              </a:spcBef>
+              <a:spcAft>
+                <a:spcPts val="600"/>
+              </a:spcAft>
+            </a:pPr>
+            <a:r>
+              <a:rPr sz="1200" b="0" i="1">
                 <a:solidFill>
                   <a:srgbClr val="66717F"/>
                 </a:solidFill>
                 <a:latin typeface="Calibri"/>
               </a:rPr>
-              <a:t>Meta: this workshop's own output is a clean written decision log — not a photo of a whiteboard.</a:t>
-            </a:r>
-          </a:p>
-        </p:txBody>
-      </p:sp>
-      <p:sp>
-        <p:nvSpPr>
-          <p:cNvPr id="9" name="TextBox 8"/>
+              <a:t>Meta: this workshop's own output is a clean written log — built live and AI-assisted, not a photo of a whiteboard.</a:t>
+            </a:r>
+          </a:p>
+        </p:txBody>
+      </p:sp>
+      <p:sp>
+        <p:nvSpPr>
+          <p:cNvPr id="11" name="TextBox 10"/>
           <p:cNvSpPr txBox="1"/>
           <p:nvPr/>
         </p:nvSpPr>
@@ -7689,7 +7872,7 @@
                 </a:solidFill>
                 <a:latin typeface="Consolas"/>
               </a:rPr>
-              <a:t>DEEP-DIVE</a:t>
+              <a:t>AN EXAMPLE TO ADOPT</a:t>
             </a:r>
           </a:p>
         </p:txBody>
@@ -7734,21 +7917,66 @@
                 </a:solidFill>
                 <a:latin typeface="Calibri"/>
               </a:rPr>
-              <a:t>Take one change and make it real</a:t>
-            </a:r>
-          </a:p>
-        </p:txBody>
-      </p:sp>
-      <p:sp>
-        <p:nvSpPr>
-          <p:cNvPr id="6" name="Rectangle 5"/>
+              <a:t>The “project passport” — one place per project</a:t>
+            </a:r>
+          </a:p>
+        </p:txBody>
+      </p:sp>
+      <p:sp>
+        <p:nvSpPr>
+          <p:cNvPr id="6" name="TextBox 5"/>
+          <p:cNvSpPr txBox="1"/>
+          <p:nvPr/>
+        </p:nvSpPr>
+        <p:spPr>
+          <a:xfrm>
+            <a:off x="548640" y="1463040"/>
+            <a:ext cx="11064240" cy="457200"/>
+          </a:xfrm>
+          <a:prstGeom prst="rect">
+            <a:avLst/>
+          </a:prstGeom>
+          <a:noFill/>
+        </p:spPr>
+        <p:txBody>
+          <a:bodyPr wrap="square" anchor="t" lIns="0" rIns="0" tIns="0" bIns="0">
+            <a:spAutoFit/>
+          </a:bodyPr>
+          <a:lstStyle/>
+          <a:p>
+            <a:pPr algn="l">
+              <a:lnSpc>
+                <a:spcPct val="108000"/>
+              </a:lnSpc>
+              <a:spcBef>
+                <a:spcPts val="0"/>
+              </a:spcBef>
+              <a:spcAft>
+                <a:spcPts val="600"/>
+              </a:spcAft>
+            </a:pPr>
+            <a:r>
+              <a:rPr sz="1350" b="0" i="1">
+                <a:solidFill>
+                  <a:srgbClr val="66717F"/>
+                </a:solidFill>
+                <a:latin typeface="Calibri"/>
+              </a:rPr>
+              <a:t>A short summary + current approach from each function, plus the decisions and their why. AI keeps it current from meeting notes — a live record, not a chore.</a:t>
+            </a:r>
+          </a:p>
+        </p:txBody>
+      </p:sp>
+      <p:sp>
+        <p:nvSpPr>
+          <p:cNvPr id="7" name="Rectangle 6"/>
           <p:cNvSpPr/>
           <p:nvPr/>
         </p:nvSpPr>
         <p:spPr>
           <a:xfrm>
-            <a:off x="548640" y="1783080"/>
-            <a:ext cx="3291840" cy="1783080"/>
+            <a:off x="548640" y="2011680"/>
+            <a:ext cx="5468112" cy="969264"/>
           </a:xfrm>
           <a:prstGeom prst="rect">
             <a:avLst/>
@@ -7787,14 +8015,14 @@
       </p:sp>
       <p:sp>
         <p:nvSpPr>
-          <p:cNvPr id="7" name="Rectangle 6"/>
+          <p:cNvPr id="8" name="Rectangle 7"/>
           <p:cNvSpPr/>
           <p:nvPr/>
         </p:nvSpPr>
         <p:spPr>
           <a:xfrm>
-            <a:off x="548640" y="1783080"/>
-            <a:ext cx="3291840" cy="91440"/>
+            <a:off x="548640" y="2011680"/>
+            <a:ext cx="82296" cy="969264"/>
           </a:xfrm>
           <a:prstGeom prst="rect">
             <a:avLst/>
@@ -7831,14 +8059,14 @@
       </p:sp>
       <p:sp>
         <p:nvSpPr>
-          <p:cNvPr id="8" name="TextBox 7"/>
-          <p:cNvSpPr txBox="1"/>
-          <p:nvPr/>
-        </p:nvSpPr>
-        <p:spPr>
-          <a:xfrm>
-            <a:off x="749808" y="2039112"/>
-            <a:ext cx="2926080" cy="365760"/>
+          <p:cNvPr id="9" name="TextBox 8"/>
+          <p:cNvSpPr txBox="1"/>
+          <p:nvPr/>
+        </p:nvSpPr>
+        <p:spPr>
+          <a:xfrm>
+            <a:off x="786384" y="2121408"/>
+            <a:ext cx="5029200" cy="274320"/>
           </a:xfrm>
           <a:prstGeom prst="rect">
             <a:avLst/>
@@ -7863,27 +8091,27 @@
               </a:spcAft>
             </a:pPr>
             <a:r>
-              <a:rPr sz="1400" b="1" i="0">
-                <a:solidFill>
-                  <a:srgbClr val="111820"/>
+              <a:rPr sz="1250" b="1" i="0">
+                <a:solidFill>
+                  <a:srgbClr val="4A4BD6"/>
                 </a:solidFill>
                 <a:latin typeface="Calibri"/>
               </a:rPr>
-              <a:t>What exactly changes?</a:t>
-            </a:r>
-          </a:p>
-        </p:txBody>
-      </p:sp>
-      <p:sp>
-        <p:nvSpPr>
-          <p:cNvPr id="9" name="TextBox 8"/>
-          <p:cNvSpPr txBox="1"/>
-          <p:nvPr/>
-        </p:nvSpPr>
-        <p:spPr>
-          <a:xfrm>
-            <a:off x="749808" y="2441448"/>
-            <a:ext cx="2926080" cy="914400"/>
+              <a:t>Development</a:t>
+            </a:r>
+          </a:p>
+        </p:txBody>
+      </p:sp>
+      <p:sp>
+        <p:nvSpPr>
+          <p:cNvPr id="10" name="TextBox 9"/>
+          <p:cNvSpPr txBox="1"/>
+          <p:nvPr/>
+        </p:nvSpPr>
+        <p:spPr>
+          <a:xfrm>
+            <a:off x="786384" y="2414016"/>
+            <a:ext cx="5074920" cy="502920"/>
           </a:xfrm>
           <a:prstGeom prst="rect">
             <a:avLst/>
@@ -7908,27 +8136,27 @@
               </a:spcAft>
             </a:pPr>
             <a:r>
-              <a:rPr sz="1250" b="0" i="1">
-                <a:solidFill>
-                  <a:srgbClr val="66717F"/>
+              <a:rPr sz="1100" b="0" i="0">
+                <a:solidFill>
+                  <a:srgbClr val="37424F"/>
                 </a:solidFill>
                 <a:latin typeface="Calibri"/>
               </a:rPr>
-              <a:t>the specific new behaviour</a:t>
-            </a:r>
-          </a:p>
-        </p:txBody>
-      </p:sp>
-      <p:sp>
-        <p:nvSpPr>
-          <p:cNvPr id="10" name="Rectangle 9"/>
+              <a:t>Summary: what it is, where it's up to. Approach: tier, critical path, next gate, pace vs plan.</a:t>
+            </a:r>
+          </a:p>
+        </p:txBody>
+      </p:sp>
+      <p:sp>
+        <p:nvSpPr>
+          <p:cNvPr id="11" name="Rectangle 10"/>
           <p:cNvSpPr/>
           <p:nvPr/>
         </p:nvSpPr>
         <p:spPr>
           <a:xfrm>
-            <a:off x="4480560" y="1783080"/>
-            <a:ext cx="3291840" cy="1783080"/>
+            <a:off x="6172200" y="2011680"/>
+            <a:ext cx="5468112" cy="969264"/>
           </a:xfrm>
           <a:prstGeom prst="rect">
             <a:avLst/>
@@ -7967,20 +8195,20 @@
       </p:sp>
       <p:sp>
         <p:nvSpPr>
-          <p:cNvPr id="11" name="Rectangle 10"/>
+          <p:cNvPr id="12" name="Rectangle 11"/>
           <p:cNvSpPr/>
           <p:nvPr/>
         </p:nvSpPr>
         <p:spPr>
           <a:xfrm>
-            <a:off x="4480560" y="1783080"/>
-            <a:ext cx="3291840" cy="91440"/>
+            <a:off x="6172200" y="2011680"/>
+            <a:ext cx="82296" cy="969264"/>
           </a:xfrm>
           <a:prstGeom prst="rect">
             <a:avLst/>
           </a:prstGeom>
           <a:solidFill>
-            <a:srgbClr val="4A4BD6"/>
+            <a:srgbClr val="0D7D74"/>
           </a:solidFill>
           <a:ln>
             <a:noFill/>
@@ -8011,14 +8239,14 @@
       </p:sp>
       <p:sp>
         <p:nvSpPr>
-          <p:cNvPr id="12" name="TextBox 11"/>
-          <p:cNvSpPr txBox="1"/>
-          <p:nvPr/>
-        </p:nvSpPr>
-        <p:spPr>
-          <a:xfrm>
-            <a:off x="4681728" y="2039112"/>
-            <a:ext cx="2926080" cy="365760"/>
+          <p:cNvPr id="13" name="TextBox 12"/>
+          <p:cNvSpPr txBox="1"/>
+          <p:nvPr/>
+        </p:nvSpPr>
+        <p:spPr>
+          <a:xfrm>
+            <a:off x="6409944" y="2121408"/>
+            <a:ext cx="5029200" cy="274320"/>
           </a:xfrm>
           <a:prstGeom prst="rect">
             <a:avLst/>
@@ -8043,27 +8271,27 @@
               </a:spcAft>
             </a:pPr>
             <a:r>
-              <a:rPr sz="1400" b="1" i="0">
-                <a:solidFill>
-                  <a:srgbClr val="111820"/>
+              <a:rPr sz="1250" b="1" i="0">
+                <a:solidFill>
+                  <a:srgbClr val="0D7D74"/>
                 </a:solidFill>
                 <a:latin typeface="Calibri"/>
               </a:rPr>
-              <a:t>Who owns it?</a:t>
-            </a:r>
-          </a:p>
-        </p:txBody>
-      </p:sp>
-      <p:sp>
-        <p:nvSpPr>
-          <p:cNvPr id="13" name="TextBox 12"/>
-          <p:cNvSpPr txBox="1"/>
-          <p:nvPr/>
-        </p:nvSpPr>
-        <p:spPr>
-          <a:xfrm>
-            <a:off x="4681728" y="2441448"/>
-            <a:ext cx="2926080" cy="914400"/>
+              <a:t>Analysis</a:t>
+            </a:r>
+          </a:p>
+        </p:txBody>
+      </p:sp>
+      <p:sp>
+        <p:nvSpPr>
+          <p:cNvPr id="14" name="TextBox 13"/>
+          <p:cNvSpPr txBox="1"/>
+          <p:nvPr/>
+        </p:nvSpPr>
+        <p:spPr>
+          <a:xfrm>
+            <a:off x="6409944" y="2414016"/>
+            <a:ext cx="5074920" cy="502920"/>
           </a:xfrm>
           <a:prstGeom prst="rect">
             <a:avLst/>
@@ -8088,27 +8316,27 @@
               </a:spcAft>
             </a:pPr>
             <a:r>
-              <a:rPr sz="1250" b="0" i="1">
-                <a:solidFill>
-                  <a:srgbClr val="66717F"/>
+              <a:rPr sz="1100" b="0" i="0">
+                <a:solidFill>
+                  <a:srgbClr val="37424F"/>
                 </a:solidFill>
                 <a:latin typeface="Calibri"/>
               </a:rPr>
-              <a:t>a name, not a team</a:t>
-            </a:r>
-          </a:p>
-        </p:txBody>
-      </p:sp>
-      <p:sp>
-        <p:nvSpPr>
-          <p:cNvPr id="14" name="Rectangle 13"/>
+              <a:t>Summary: the fundamentals. Approach: the market read, revenue basis, benchmarked vs operating assets.</a:t>
+            </a:r>
+          </a:p>
+        </p:txBody>
+      </p:sp>
+      <p:sp>
+        <p:nvSpPr>
+          <p:cNvPr id="15" name="Rectangle 14"/>
           <p:cNvSpPr/>
           <p:nvPr/>
         </p:nvSpPr>
         <p:spPr>
           <a:xfrm>
-            <a:off x="8412480" y="1783080"/>
-            <a:ext cx="3291840" cy="1783080"/>
+            <a:off x="548640" y="3090672"/>
+            <a:ext cx="5468112" cy="969264"/>
           </a:xfrm>
           <a:prstGeom prst="rect">
             <a:avLst/>
@@ -8147,20 +8375,20 @@
       </p:sp>
       <p:sp>
         <p:nvSpPr>
-          <p:cNvPr id="15" name="Rectangle 14"/>
+          <p:cNvPr id="16" name="Rectangle 15"/>
           <p:cNvSpPr/>
           <p:nvPr/>
         </p:nvSpPr>
         <p:spPr>
           <a:xfrm>
-            <a:off x="8412480" y="1783080"/>
-            <a:ext cx="3291840" cy="91440"/>
+            <a:off x="548640" y="3090672"/>
+            <a:ext cx="82296" cy="969264"/>
           </a:xfrm>
           <a:prstGeom prst="rect">
             <a:avLst/>
           </a:prstGeom>
           <a:solidFill>
-            <a:srgbClr val="4A4BD6"/>
+            <a:srgbClr val="2F7D3A"/>
           </a:solidFill>
           <a:ln>
             <a:noFill/>
@@ -8191,14 +8419,14 @@
       </p:sp>
       <p:sp>
         <p:nvSpPr>
-          <p:cNvPr id="16" name="TextBox 15"/>
-          <p:cNvSpPr txBox="1"/>
-          <p:nvPr/>
-        </p:nvSpPr>
-        <p:spPr>
-          <a:xfrm>
-            <a:off x="8613648" y="2039112"/>
-            <a:ext cx="2926080" cy="365760"/>
+          <p:cNvPr id="17" name="TextBox 16"/>
+          <p:cNvSpPr txBox="1"/>
+          <p:nvPr/>
+        </p:nvSpPr>
+        <p:spPr>
+          <a:xfrm>
+            <a:off x="786384" y="3200400"/>
+            <a:ext cx="5029200" cy="274320"/>
           </a:xfrm>
           <a:prstGeom prst="rect">
             <a:avLst/>
@@ -8223,27 +8451,27 @@
               </a:spcAft>
             </a:pPr>
             <a:r>
-              <a:rPr sz="1400" b="1" i="0">
-                <a:solidFill>
-                  <a:srgbClr val="111820"/>
+              <a:rPr sz="1250" b="1" i="0">
+                <a:solidFill>
+                  <a:srgbClr val="2F7D3A"/>
                 </a:solidFill>
                 <a:latin typeface="Calibri"/>
               </a:rPr>
-              <a:t>First step (30 days)</a:t>
-            </a:r>
-          </a:p>
-        </p:txBody>
-      </p:sp>
-      <p:sp>
-        <p:nvSpPr>
-          <p:cNvPr id="17" name="TextBox 16"/>
-          <p:cNvSpPr txBox="1"/>
-          <p:nvPr/>
-        </p:nvSpPr>
-        <p:spPr>
-          <a:xfrm>
-            <a:off x="8613648" y="2441448"/>
-            <a:ext cx="2926080" cy="914400"/>
+              <a:t>Land &amp; Planning</a:t>
+            </a:r>
+          </a:p>
+        </p:txBody>
+      </p:sp>
+      <p:sp>
+        <p:nvSpPr>
+          <p:cNvPr id="18" name="TextBox 17"/>
+          <p:cNvSpPr txBox="1"/>
+          <p:nvPr/>
+        </p:nvSpPr>
+        <p:spPr>
+          <a:xfrm>
+            <a:off x="786384" y="3493008"/>
+            <a:ext cx="5074920" cy="502920"/>
           </a:xfrm>
           <a:prstGeom prst="rect">
             <a:avLst/>
@@ -8268,27 +8496,27 @@
               </a:spcAft>
             </a:pPr>
             <a:r>
-              <a:rPr sz="1250" b="0" i="1">
-                <a:solidFill>
-                  <a:srgbClr val="66717F"/>
+              <a:rPr sz="1100" b="0" i="0">
+                <a:solidFill>
+                  <a:srgbClr val="37424F"/>
                 </a:solidFill>
                 <a:latin typeface="Calibri"/>
               </a:rPr>
-              <a:t>the concrete next move</a:t>
-            </a:r>
-          </a:p>
-        </p:txBody>
-      </p:sp>
-      <p:sp>
-        <p:nvSpPr>
-          <p:cNvPr id="18" name="Rectangle 17"/>
+              <a:t>Summary: site &amp; land status. Approach: planning, connection &amp; system-strength position, key risks.</a:t>
+            </a:r>
+          </a:p>
+        </p:txBody>
+      </p:sp>
+      <p:sp>
+        <p:nvSpPr>
+          <p:cNvPr id="19" name="Rectangle 18"/>
           <p:cNvSpPr/>
           <p:nvPr/>
         </p:nvSpPr>
         <p:spPr>
           <a:xfrm>
-            <a:off x="548640" y="3794760"/>
-            <a:ext cx="3291840" cy="1783080"/>
+            <a:off x="6172200" y="3090672"/>
+            <a:ext cx="5468112" cy="969264"/>
           </a:xfrm>
           <a:prstGeom prst="rect">
             <a:avLst/>
@@ -8327,20 +8555,20 @@
       </p:sp>
       <p:sp>
         <p:nvSpPr>
-          <p:cNvPr id="19" name="Rectangle 18"/>
+          <p:cNvPr id="20" name="Rectangle 19"/>
           <p:cNvSpPr/>
           <p:nvPr/>
         </p:nvSpPr>
         <p:spPr>
           <a:xfrm>
-            <a:off x="548640" y="3794760"/>
-            <a:ext cx="3291840" cy="91440"/>
+            <a:off x="6172200" y="3090672"/>
+            <a:ext cx="82296" cy="969264"/>
           </a:xfrm>
           <a:prstGeom prst="rect">
             <a:avLst/>
           </a:prstGeom>
           <a:solidFill>
-            <a:srgbClr val="4A4BD6"/>
+            <a:srgbClr val="B4571F"/>
           </a:solidFill>
           <a:ln>
             <a:noFill/>
@@ -8371,14 +8599,14 @@
       </p:sp>
       <p:sp>
         <p:nvSpPr>
-          <p:cNvPr id="20" name="TextBox 19"/>
-          <p:cNvSpPr txBox="1"/>
-          <p:nvPr/>
-        </p:nvSpPr>
-        <p:spPr>
-          <a:xfrm>
-            <a:off x="749808" y="4050792"/>
-            <a:ext cx="2926080" cy="365760"/>
+          <p:cNvPr id="21" name="TextBox 20"/>
+          <p:cNvSpPr txBox="1"/>
+          <p:nvPr/>
+        </p:nvSpPr>
+        <p:spPr>
+          <a:xfrm>
+            <a:off x="6409944" y="3200400"/>
+            <a:ext cx="5029200" cy="274320"/>
           </a:xfrm>
           <a:prstGeom prst="rect">
             <a:avLst/>
@@ -8403,27 +8631,27 @@
               </a:spcAft>
             </a:pPr>
             <a:r>
-              <a:rPr sz="1400" b="1" i="0">
-                <a:solidFill>
-                  <a:srgbClr val="111820"/>
+              <a:rPr sz="1250" b="1" i="0">
+                <a:solidFill>
+                  <a:srgbClr val="B4571F"/>
                 </a:solidFill>
                 <a:latin typeface="Calibri"/>
               </a:rPr>
-              <a:t>Signal it worked</a:t>
-            </a:r>
-          </a:p>
-        </p:txBody>
-      </p:sp>
-      <p:sp>
-        <p:nvSpPr>
-          <p:cNvPr id="21" name="TextBox 20"/>
-          <p:cNvSpPr txBox="1"/>
-          <p:nvPr/>
-        </p:nvSpPr>
-        <p:spPr>
-          <a:xfrm>
-            <a:off x="749808" y="4453128"/>
-            <a:ext cx="2926080" cy="914400"/>
+              <a:t>Structured Bids</a:t>
+            </a:r>
+          </a:p>
+        </p:txBody>
+      </p:sp>
+      <p:sp>
+        <p:nvSpPr>
+          <p:cNvPr id="22" name="TextBox 21"/>
+          <p:cNvSpPr txBox="1"/>
+          <p:nvPr/>
+        </p:nvSpPr>
+        <p:spPr>
+          <a:xfrm>
+            <a:off x="6409944" y="3493008"/>
+            <a:ext cx="5074920" cy="502920"/>
           </a:xfrm>
           <a:prstGeom prst="rect">
             <a:avLst/>
@@ -8448,27 +8676,27 @@
               </a:spcAft>
             </a:pPr>
             <a:r>
-              <a:rPr sz="1250" b="0" i="1">
-                <a:solidFill>
-                  <a:srgbClr val="66717F"/>
+              <a:rPr sz="1100" b="0" i="0">
+                <a:solidFill>
+                  <a:srgbClr val="37424F"/>
                 </a:solidFill>
                 <a:latin typeface="Calibri"/>
               </a:rPr>
-              <a:t>how we'll know</a:t>
-            </a:r>
-          </a:p>
-        </p:txBody>
-      </p:sp>
-      <p:sp>
-        <p:nvSpPr>
-          <p:cNvPr id="22" name="Rectangle 21"/>
+              <a:t>Summary: scheme eligibility &amp; fit. Approach: bids submitted/planned, awards, next window.</a:t>
+            </a:r>
+          </a:p>
+        </p:txBody>
+      </p:sp>
+      <p:sp>
+        <p:nvSpPr>
+          <p:cNvPr id="23" name="Rectangle 22"/>
           <p:cNvSpPr/>
           <p:nvPr/>
         </p:nvSpPr>
         <p:spPr>
           <a:xfrm>
-            <a:off x="4480560" y="3794760"/>
-            <a:ext cx="3291840" cy="1783080"/>
+            <a:off x="548640" y="4169664"/>
+            <a:ext cx="5468112" cy="969264"/>
           </a:xfrm>
           <a:prstGeom prst="rect">
             <a:avLst/>
@@ -8507,20 +8735,20 @@
       </p:sp>
       <p:sp>
         <p:nvSpPr>
-          <p:cNvPr id="23" name="Rectangle 22"/>
+          <p:cNvPr id="24" name="Rectangle 23"/>
           <p:cNvSpPr/>
           <p:nvPr/>
         </p:nvSpPr>
         <p:spPr>
           <a:xfrm>
-            <a:off x="4480560" y="3794760"/>
-            <a:ext cx="3291840" cy="91440"/>
+            <a:off x="548640" y="4169664"/>
+            <a:ext cx="82296" cy="969264"/>
           </a:xfrm>
           <a:prstGeom prst="rect">
             <a:avLst/>
           </a:prstGeom>
           <a:solidFill>
-            <a:srgbClr val="4A4BD6"/>
+            <a:srgbClr val="B21E46"/>
           </a:solidFill>
           <a:ln>
             <a:noFill/>
@@ -8551,14 +8779,14 @@
       </p:sp>
       <p:sp>
         <p:nvSpPr>
-          <p:cNvPr id="24" name="TextBox 23"/>
-          <p:cNvSpPr txBox="1"/>
-          <p:nvPr/>
-        </p:nvSpPr>
-        <p:spPr>
-          <a:xfrm>
-            <a:off x="4681728" y="4050792"/>
-            <a:ext cx="2926080" cy="365760"/>
+          <p:cNvPr id="25" name="TextBox 24"/>
+          <p:cNvSpPr txBox="1"/>
+          <p:nvPr/>
+        </p:nvSpPr>
+        <p:spPr>
+          <a:xfrm>
+            <a:off x="786384" y="4279392"/>
+            <a:ext cx="5029200" cy="274320"/>
           </a:xfrm>
           <a:prstGeom prst="rect">
             <a:avLst/>
@@ -8583,27 +8811,27 @@
               </a:spcAft>
             </a:pPr>
             <a:r>
-              <a:rPr sz="1400" b="1" i="0">
-                <a:solidFill>
-                  <a:srgbClr val="111820"/>
+              <a:rPr sz="1250" b="1" i="0">
+                <a:solidFill>
+                  <a:srgbClr val="B21E46"/>
                 </a:solidFill>
                 <a:latin typeface="Calibri"/>
               </a:rPr>
-              <a:t>What it displaces</a:t>
-            </a:r>
-          </a:p>
-        </p:txBody>
-      </p:sp>
-      <p:sp>
-        <p:nvSpPr>
-          <p:cNvPr id="25" name="TextBox 24"/>
-          <p:cNvSpPr txBox="1"/>
-          <p:nvPr/>
-        </p:nvSpPr>
-        <p:spPr>
-          <a:xfrm>
-            <a:off x="4681728" y="4453128"/>
-            <a:ext cx="2926080" cy="914400"/>
+              <a:t>Commercial</a:t>
+            </a:r>
+          </a:p>
+        </p:txBody>
+      </p:sp>
+      <p:sp>
+        <p:nvSpPr>
+          <p:cNvPr id="26" name="TextBox 25"/>
+          <p:cNvSpPr txBox="1"/>
+          <p:nvPr/>
+        </p:nvSpPr>
+        <p:spPr>
+          <a:xfrm>
+            <a:off x="786384" y="4572000"/>
+            <a:ext cx="5074920" cy="502920"/>
           </a:xfrm>
           <a:prstGeom prst="rect">
             <a:avLst/>
@@ -8628,27 +8856,27 @@
               </a:spcAft>
             </a:pPr>
             <a:r>
-              <a:rPr sz="1250" b="0" i="1">
-                <a:solidFill>
-                  <a:srgbClr val="66717F"/>
+              <a:rPr sz="1100" b="0" i="0">
+                <a:solidFill>
+                  <a:srgbClr val="37424F"/>
                 </a:solidFill>
                 <a:latin typeface="Calibri"/>
               </a:rPr>
-              <a:t>the trade — attention is scarce</a:t>
-            </a:r>
-          </a:p>
-        </p:txBody>
-      </p:sp>
-      <p:sp>
-        <p:nvSpPr>
-          <p:cNvPr id="26" name="Rectangle 25"/>
+              <a:t>Summary: the commercial pathway. Approach: offtake/PPA position, basis of decisions, live options.</a:t>
+            </a:r>
+          </a:p>
+        </p:txBody>
+      </p:sp>
+      <p:sp>
+        <p:nvSpPr>
+          <p:cNvPr id="27" name="Rectangle 26"/>
           <p:cNvSpPr/>
           <p:nvPr/>
         </p:nvSpPr>
         <p:spPr>
           <a:xfrm>
-            <a:off x="8412480" y="3794760"/>
-            <a:ext cx="3291840" cy="1783080"/>
+            <a:off x="6172200" y="4169664"/>
+            <a:ext cx="5468112" cy="969264"/>
           </a:xfrm>
           <a:prstGeom prst="rect">
             <a:avLst/>
@@ -8687,14 +8915,14 @@
       </p:sp>
       <p:sp>
         <p:nvSpPr>
-          <p:cNvPr id="27" name="Rectangle 26"/>
+          <p:cNvPr id="28" name="Rectangle 27"/>
           <p:cNvSpPr/>
           <p:nvPr/>
         </p:nvSpPr>
         <p:spPr>
           <a:xfrm>
-            <a:off x="8412480" y="3794760"/>
-            <a:ext cx="3291840" cy="91440"/>
+            <a:off x="6172200" y="4169664"/>
+            <a:ext cx="82296" cy="969264"/>
           </a:xfrm>
           <a:prstGeom prst="rect">
             <a:avLst/>
@@ -8731,14 +8959,14 @@
       </p:sp>
       <p:sp>
         <p:nvSpPr>
-          <p:cNvPr id="28" name="TextBox 27"/>
-          <p:cNvSpPr txBox="1"/>
-          <p:nvPr/>
-        </p:nvSpPr>
-        <p:spPr>
-          <a:xfrm>
-            <a:off x="8613648" y="4050792"/>
-            <a:ext cx="2926080" cy="365760"/>
+          <p:cNvPr id="29" name="TextBox 28"/>
+          <p:cNvSpPr txBox="1"/>
+          <p:nvPr/>
+        </p:nvSpPr>
+        <p:spPr>
+          <a:xfrm>
+            <a:off x="6409944" y="4279392"/>
+            <a:ext cx="5029200" cy="274320"/>
           </a:xfrm>
           <a:prstGeom prst="rect">
             <a:avLst/>
@@ -8763,27 +8991,27 @@
               </a:spcAft>
             </a:pPr>
             <a:r>
-              <a:rPr sz="1400" b="1" i="0">
-                <a:solidFill>
-                  <a:srgbClr val="111820"/>
+              <a:rPr sz="1250" b="1" i="0">
+                <a:solidFill>
+                  <a:srgbClr val="4A4BD6"/>
                 </a:solidFill>
                 <a:latin typeface="Calibri"/>
               </a:rPr>
-              <a:t>Pre-mortem</a:t>
-            </a:r>
-          </a:p>
-        </p:txBody>
-      </p:sp>
-      <p:sp>
-        <p:nvSpPr>
-          <p:cNvPr id="29" name="TextBox 28"/>
-          <p:cNvSpPr txBox="1"/>
-          <p:nvPr/>
-        </p:nvSpPr>
-        <p:spPr>
-          <a:xfrm>
-            <a:off x="8613648" y="4453128"/>
-            <a:ext cx="2926080" cy="914400"/>
+              <a:t>Technical (Eng.)</a:t>
+            </a:r>
+          </a:p>
+        </p:txBody>
+      </p:sp>
+      <p:sp>
+        <p:nvSpPr>
+          <p:cNvPr id="30" name="TextBox 29"/>
+          <p:cNvSpPr txBox="1"/>
+          <p:nvPr/>
+        </p:nvSpPr>
+        <p:spPr>
+          <a:xfrm>
+            <a:off x="6409944" y="4572000"/>
+            <a:ext cx="5074920" cy="502920"/>
           </a:xfrm>
           <a:prstGeom prst="rect">
             <a:avLst/>
@@ -8808,20 +9036,380 @@
               </a:spcAft>
             </a:pPr>
             <a:r>
-              <a:rPr sz="1250" b="0" i="1">
-                <a:solidFill>
-                  <a:srgbClr val="66717F"/>
+              <a:rPr sz="1100" b="0" i="0">
+                <a:solidFill>
+                  <a:srgbClr val="37424F"/>
                 </a:solidFill>
                 <a:latin typeface="Calibri"/>
               </a:rPr>
-              <a:t>it's 2028 and it failed — why?</a:t>
-            </a:r>
-          </a:p>
-        </p:txBody>
-      </p:sp>
-      <p:sp>
-        <p:nvSpPr>
-          <p:cNvPr id="30" name="TextBox 29"/>
+              <a:t>Summary: technology &amp; design choices. Approach: technical risks, resourcing needs &amp; timing.</a:t>
+            </a:r>
+          </a:p>
+        </p:txBody>
+      </p:sp>
+      <p:sp>
+        <p:nvSpPr>
+          <p:cNvPr id="31" name="Rectangle 30"/>
+          <p:cNvSpPr/>
+          <p:nvPr/>
+        </p:nvSpPr>
+        <p:spPr>
+          <a:xfrm>
+            <a:off x="548640" y="5248656"/>
+            <a:ext cx="5468112" cy="969264"/>
+          </a:xfrm>
+          <a:prstGeom prst="rect">
+            <a:avLst/>
+          </a:prstGeom>
+          <a:solidFill>
+            <a:srgbClr val="F4F6F9"/>
+          </a:solidFill>
+          <a:ln w="9525">
+            <a:solidFill>
+              <a:srgbClr val="D8DEE6"/>
+            </a:solidFill>
+          </a:ln>
+          <a:effectLst/>
+        </p:spPr>
+        <p:style>
+          <a:lnRef idx="1">
+            <a:schemeClr val="accent1"/>
+          </a:lnRef>
+          <a:fillRef idx="3">
+            <a:schemeClr val="accent1"/>
+          </a:fillRef>
+          <a:effectRef idx="2">
+            <a:schemeClr val="accent1"/>
+          </a:effectRef>
+          <a:fontRef idx="minor">
+            <a:schemeClr val="lt1"/>
+          </a:fontRef>
+        </p:style>
+        <p:txBody>
+          <a:bodyPr rtlCol="0" anchor="ctr"/>
+          <a:lstStyle/>
+          <a:p>
+            <a:pPr algn="ctr"/>
+          </a:p>
+        </p:txBody>
+      </p:sp>
+      <p:sp>
+        <p:nvSpPr>
+          <p:cNvPr id="32" name="Rectangle 31"/>
+          <p:cNvSpPr/>
+          <p:nvPr/>
+        </p:nvSpPr>
+        <p:spPr>
+          <a:xfrm>
+            <a:off x="548640" y="5248656"/>
+            <a:ext cx="82296" cy="969264"/>
+          </a:xfrm>
+          <a:prstGeom prst="rect">
+            <a:avLst/>
+          </a:prstGeom>
+          <a:solidFill>
+            <a:srgbClr val="4A4BD6"/>
+          </a:solidFill>
+          <a:ln>
+            <a:noFill/>
+          </a:ln>
+          <a:effectLst/>
+        </p:spPr>
+        <p:style>
+          <a:lnRef idx="1">
+            <a:schemeClr val="accent1"/>
+          </a:lnRef>
+          <a:fillRef idx="3">
+            <a:schemeClr val="accent1"/>
+          </a:fillRef>
+          <a:effectRef idx="2">
+            <a:schemeClr val="accent1"/>
+          </a:effectRef>
+          <a:fontRef idx="minor">
+            <a:schemeClr val="lt1"/>
+          </a:fontRef>
+        </p:style>
+        <p:txBody>
+          <a:bodyPr rtlCol="0" anchor="ctr"/>
+          <a:lstStyle/>
+          <a:p>
+            <a:pPr algn="ctr"/>
+          </a:p>
+        </p:txBody>
+      </p:sp>
+      <p:sp>
+        <p:nvSpPr>
+          <p:cNvPr id="33" name="TextBox 32"/>
+          <p:cNvSpPr txBox="1"/>
+          <p:nvPr/>
+        </p:nvSpPr>
+        <p:spPr>
+          <a:xfrm>
+            <a:off x="786384" y="5358384"/>
+            <a:ext cx="5029200" cy="274320"/>
+          </a:xfrm>
+          <a:prstGeom prst="rect">
+            <a:avLst/>
+          </a:prstGeom>
+          <a:noFill/>
+        </p:spPr>
+        <p:txBody>
+          <a:bodyPr wrap="square" anchor="t" lIns="0" rIns="0" tIns="0" bIns="0">
+            <a:spAutoFit/>
+          </a:bodyPr>
+          <a:lstStyle/>
+          <a:p>
+            <a:pPr algn="l">
+              <a:lnSpc>
+                <a:spcPct val="108000"/>
+              </a:lnSpc>
+              <a:spcBef>
+                <a:spcPts val="0"/>
+              </a:spcBef>
+              <a:spcAft>
+                <a:spcPts val="600"/>
+              </a:spcAft>
+            </a:pPr>
+            <a:r>
+              <a:rPr sz="1250" b="1" i="0">
+                <a:solidFill>
+                  <a:srgbClr val="4A4BD6"/>
+                </a:solidFill>
+                <a:latin typeface="Calibri"/>
+              </a:rPr>
+              <a:t>Decisions log</a:t>
+            </a:r>
+          </a:p>
+        </p:txBody>
+      </p:sp>
+      <p:sp>
+        <p:nvSpPr>
+          <p:cNvPr id="34" name="TextBox 33"/>
+          <p:cNvSpPr txBox="1"/>
+          <p:nvPr/>
+        </p:nvSpPr>
+        <p:spPr>
+          <a:xfrm>
+            <a:off x="786384" y="5650992"/>
+            <a:ext cx="5074920" cy="502920"/>
+          </a:xfrm>
+          <a:prstGeom prst="rect">
+            <a:avLst/>
+          </a:prstGeom>
+          <a:noFill/>
+        </p:spPr>
+        <p:txBody>
+          <a:bodyPr wrap="square" anchor="t" lIns="0" rIns="0" tIns="0" bIns="0">
+            <a:spAutoFit/>
+          </a:bodyPr>
+          <a:lstStyle/>
+          <a:p>
+            <a:pPr algn="l">
+              <a:lnSpc>
+                <a:spcPct val="108000"/>
+              </a:lnSpc>
+              <a:spcBef>
+                <a:spcPts val="0"/>
+              </a:spcBef>
+              <a:spcAft>
+                <a:spcPts val="600"/>
+              </a:spcAft>
+            </a:pPr>
+            <a:r>
+              <a:rPr sz="1100" b="0" i="0">
+                <a:solidFill>
+                  <a:srgbClr val="37424F"/>
+                </a:solidFill>
+                <a:latin typeface="Calibri"/>
+              </a:rPr>
+              <a:t>Decision · date · rationale (the why) · who. The context a newcomer can't get anywhere else.</a:t>
+            </a:r>
+          </a:p>
+        </p:txBody>
+      </p:sp>
+      <p:sp>
+        <p:nvSpPr>
+          <p:cNvPr id="35" name="Rectangle 34"/>
+          <p:cNvSpPr/>
+          <p:nvPr/>
+        </p:nvSpPr>
+        <p:spPr>
+          <a:xfrm>
+            <a:off x="6172200" y="5248656"/>
+            <a:ext cx="5468112" cy="969264"/>
+          </a:xfrm>
+          <a:prstGeom prst="rect">
+            <a:avLst/>
+          </a:prstGeom>
+          <a:solidFill>
+            <a:srgbClr val="F4F6F9"/>
+          </a:solidFill>
+          <a:ln w="9525">
+            <a:solidFill>
+              <a:srgbClr val="D8DEE6"/>
+            </a:solidFill>
+          </a:ln>
+          <a:effectLst/>
+        </p:spPr>
+        <p:style>
+          <a:lnRef idx="1">
+            <a:schemeClr val="accent1"/>
+          </a:lnRef>
+          <a:fillRef idx="3">
+            <a:schemeClr val="accent1"/>
+          </a:fillRef>
+          <a:effectRef idx="2">
+            <a:schemeClr val="accent1"/>
+          </a:effectRef>
+          <a:fontRef idx="minor">
+            <a:schemeClr val="lt1"/>
+          </a:fontRef>
+        </p:style>
+        <p:txBody>
+          <a:bodyPr rtlCol="0" anchor="ctr"/>
+          <a:lstStyle/>
+          <a:p>
+            <a:pPr algn="ctr"/>
+          </a:p>
+        </p:txBody>
+      </p:sp>
+      <p:sp>
+        <p:nvSpPr>
+          <p:cNvPr id="36" name="Rectangle 35"/>
+          <p:cNvSpPr/>
+          <p:nvPr/>
+        </p:nvSpPr>
+        <p:spPr>
+          <a:xfrm>
+            <a:off x="6172200" y="5248656"/>
+            <a:ext cx="82296" cy="969264"/>
+          </a:xfrm>
+          <a:prstGeom prst="rect">
+            <a:avLst/>
+          </a:prstGeom>
+          <a:solidFill>
+            <a:srgbClr val="4A4BD6"/>
+          </a:solidFill>
+          <a:ln>
+            <a:noFill/>
+          </a:ln>
+          <a:effectLst/>
+        </p:spPr>
+        <p:style>
+          <a:lnRef idx="1">
+            <a:schemeClr val="accent1"/>
+          </a:lnRef>
+          <a:fillRef idx="3">
+            <a:schemeClr val="accent1"/>
+          </a:fillRef>
+          <a:effectRef idx="2">
+            <a:schemeClr val="accent1"/>
+          </a:effectRef>
+          <a:fontRef idx="minor">
+            <a:schemeClr val="lt1"/>
+          </a:fontRef>
+        </p:style>
+        <p:txBody>
+          <a:bodyPr rtlCol="0" anchor="ctr"/>
+          <a:lstStyle/>
+          <a:p>
+            <a:pPr algn="ctr"/>
+          </a:p>
+        </p:txBody>
+      </p:sp>
+      <p:sp>
+        <p:nvSpPr>
+          <p:cNvPr id="37" name="TextBox 36"/>
+          <p:cNvSpPr txBox="1"/>
+          <p:nvPr/>
+        </p:nvSpPr>
+        <p:spPr>
+          <a:xfrm>
+            <a:off x="6409944" y="5358384"/>
+            <a:ext cx="5029200" cy="274320"/>
+          </a:xfrm>
+          <a:prstGeom prst="rect">
+            <a:avLst/>
+          </a:prstGeom>
+          <a:noFill/>
+        </p:spPr>
+        <p:txBody>
+          <a:bodyPr wrap="square" anchor="t" lIns="0" rIns="0" tIns="0" bIns="0">
+            <a:spAutoFit/>
+          </a:bodyPr>
+          <a:lstStyle/>
+          <a:p>
+            <a:pPr algn="l">
+              <a:lnSpc>
+                <a:spcPct val="108000"/>
+              </a:lnSpc>
+              <a:spcBef>
+                <a:spcPts val="0"/>
+              </a:spcBef>
+              <a:spcAft>
+                <a:spcPts val="600"/>
+              </a:spcAft>
+            </a:pPr>
+            <a:r>
+              <a:rPr sz="1250" b="1" i="0">
+                <a:solidFill>
+                  <a:srgbClr val="4A4BD6"/>
+                </a:solidFill>
+                <a:latin typeface="Calibri"/>
+              </a:rPr>
+              <a:t>Open questions</a:t>
+            </a:r>
+          </a:p>
+        </p:txBody>
+      </p:sp>
+      <p:sp>
+        <p:nvSpPr>
+          <p:cNvPr id="38" name="TextBox 37"/>
+          <p:cNvSpPr txBox="1"/>
+          <p:nvPr/>
+        </p:nvSpPr>
+        <p:spPr>
+          <a:xfrm>
+            <a:off x="6409944" y="5650992"/>
+            <a:ext cx="5074920" cy="502920"/>
+          </a:xfrm>
+          <a:prstGeom prst="rect">
+            <a:avLst/>
+          </a:prstGeom>
+          <a:noFill/>
+        </p:spPr>
+        <p:txBody>
+          <a:bodyPr wrap="square" anchor="t" lIns="0" rIns="0" tIns="0" bIns="0">
+            <a:spAutoFit/>
+          </a:bodyPr>
+          <a:lstStyle/>
+          <a:p>
+            <a:pPr algn="l">
+              <a:lnSpc>
+                <a:spcPct val="108000"/>
+              </a:lnSpc>
+              <a:spcBef>
+                <a:spcPts val="0"/>
+              </a:spcBef>
+              <a:spcAft>
+                <a:spcPts val="600"/>
+              </a:spcAft>
+            </a:pPr>
+            <a:r>
+              <a:rPr sz="1100" b="0" i="0">
+                <a:solidFill>
+                  <a:srgbClr val="37424F"/>
+                </a:solidFill>
+                <a:latin typeface="Calibri"/>
+              </a:rPr>
+              <a:t>The known-unknowns — what we know we don't know, and who's chasing each.</a:t>
+            </a:r>
+          </a:p>
+        </p:txBody>
+      </p:sp>
+      <p:sp>
+        <p:nvSpPr>
+          <p:cNvPr id="39" name="TextBox 38"/>
           <p:cNvSpPr txBox="1"/>
           <p:nvPr/>
         </p:nvSpPr>
@@ -9010,7 +9598,7 @@
                 </a:solidFill>
                 <a:latin typeface="Consolas"/>
               </a:rPr>
-              <a:t>CAPTURE &amp; COMMIT</a:t>
+              <a:t>CAPTURE · TWO LEVELS</a:t>
             </a:r>
           </a:p>
         </p:txBody>
@@ -9055,520 +9643,111 @@
                 </a:solidFill>
                 <a:latin typeface="Calibri"/>
               </a:rPr>
-              <a:t>One row per change — each function owns one</a:t>
-            </a:r>
-          </a:p>
-        </p:txBody>
-      </p:sp>
-      <p:graphicFrame>
-        <p:nvGraphicFramePr>
-          <p:cNvPr id="6" name="Table 5"/>
-          <p:cNvGraphicFramePr>
-            <a:graphicFrameLocks noGrp="1"/>
-          </p:cNvGraphicFramePr>
-          <p:nvPr/>
-        </p:nvGraphicFramePr>
-        <p:xfrm>
-          <a:off x="548640" y="1737360"/>
-          <a:ext cx="11091672" cy="1920240"/>
-        </p:xfrm>
-        <a:graphic>
-          <a:graphicData uri="http://schemas.openxmlformats.org/drawingml/2006/table">
-            <a:tbl>
-              <a:tblPr>
-                <a:tableStyleId>{5C22544A-7EE6-4342-B048-85BDC9FD1C3A}</a:tableStyleId>
-              </a:tblPr>
-              <a:tblGrid>
-                <a:gridCol w="2377440"/>
-                <a:gridCol w="1452372"/>
-                <a:gridCol w="1452372"/>
-                <a:gridCol w="1452372"/>
-                <a:gridCol w="1452372"/>
-                <a:gridCol w="1452372"/>
-                <a:gridCol w="1452372"/>
-              </a:tblGrid>
-              <a:tr h="457200">
-                <a:tc>
-                  <a:txBody>
-                    <a:bodyPr wrap="square"/>
-                    <a:lstStyle/>
-                    <a:p>
-                      <a:r>
-                        <a:rPr sz="1050" b="1">
-                          <a:solidFill>
-                            <a:srgbClr val="FFFFFF"/>
-                          </a:solidFill>
-                          <a:latin typeface="Calibri"/>
-                        </a:rPr>
-                        <a:t>Change (Start / Stop)</a:t>
-                      </a:r>
-                    </a:p>
-                  </a:txBody>
-                  <a:tcPr marL="73152" marT="27432" marB="27432" anchor="ctr">
-                    <a:solidFill>
-                      <a:srgbClr val="4A4BD6"/>
-                    </a:solidFill>
-                  </a:tcPr>
-                </a:tc>
-                <a:tc>
-                  <a:txBody>
-                    <a:bodyPr wrap="square"/>
-                    <a:lstStyle/>
-                    <a:p>
-                      <a:r>
-                        <a:rPr sz="1050" b="1">
-                          <a:solidFill>
-                            <a:srgbClr val="FFFFFF"/>
-                          </a:solidFill>
-                          <a:latin typeface="Calibri"/>
-                        </a:rPr>
-                        <a:t>Function</a:t>
-                      </a:r>
-                    </a:p>
-                  </a:txBody>
-                  <a:tcPr marL="73152" marT="27432" marB="27432" anchor="ctr">
-                    <a:solidFill>
-                      <a:srgbClr val="4A4BD6"/>
-                    </a:solidFill>
-                  </a:tcPr>
-                </a:tc>
-                <a:tc>
-                  <a:txBody>
-                    <a:bodyPr wrap="square"/>
-                    <a:lstStyle/>
-                    <a:p>
-                      <a:r>
-                        <a:rPr sz="1050" b="1">
-                          <a:solidFill>
-                            <a:srgbClr val="FFFFFF"/>
-                          </a:solidFill>
-                          <a:latin typeface="Calibri"/>
-                        </a:rPr>
-                        <a:t>Why (optional)</a:t>
-                      </a:r>
-                    </a:p>
-                  </a:txBody>
-                  <a:tcPr marL="73152" marT="27432" marB="27432" anchor="ctr">
-                    <a:solidFill>
-                      <a:srgbClr val="4A4BD6"/>
-                    </a:solidFill>
-                  </a:tcPr>
-                </a:tc>
-                <a:tc>
-                  <a:txBody>
-                    <a:bodyPr wrap="square"/>
-                    <a:lstStyle/>
-                    <a:p>
-                      <a:r>
-                        <a:rPr sz="1050" b="1">
-                          <a:solidFill>
-                            <a:srgbClr val="FFFFFF"/>
-                          </a:solidFill>
-                          <a:latin typeface="Calibri"/>
-                        </a:rPr>
-                        <a:t>What it displaces</a:t>
-                      </a:r>
-                    </a:p>
-                  </a:txBody>
-                  <a:tcPr marL="73152" marT="27432" marB="27432" anchor="ctr">
-                    <a:solidFill>
-                      <a:srgbClr val="4A4BD6"/>
-                    </a:solidFill>
-                  </a:tcPr>
-                </a:tc>
-                <a:tc>
-                  <a:txBody>
-                    <a:bodyPr wrap="square"/>
-                    <a:lstStyle/>
-                    <a:p>
-                      <a:r>
-                        <a:rPr sz="1050" b="1">
-                          <a:solidFill>
-                            <a:srgbClr val="FFFFFF"/>
-                          </a:solidFill>
-                          <a:latin typeface="Calibri"/>
-                        </a:rPr>
-                        <a:t>Owner</a:t>
-                      </a:r>
-                    </a:p>
-                  </a:txBody>
-                  <a:tcPr marL="73152" marT="27432" marB="27432" anchor="ctr">
-                    <a:solidFill>
-                      <a:srgbClr val="4A4BD6"/>
-                    </a:solidFill>
-                  </a:tcPr>
-                </a:tc>
-                <a:tc>
-                  <a:txBody>
-                    <a:bodyPr wrap="square"/>
-                    <a:lstStyle/>
-                    <a:p>
-                      <a:r>
-                        <a:rPr sz="1050" b="1">
-                          <a:solidFill>
-                            <a:srgbClr val="FFFFFF"/>
-                          </a:solidFill>
-                          <a:latin typeface="Calibri"/>
-                        </a:rPr>
-                        <a:t>First step (30 days)</a:t>
-                      </a:r>
-                    </a:p>
-                  </a:txBody>
-                  <a:tcPr marL="73152" marT="27432" marB="27432" anchor="ctr">
-                    <a:solidFill>
-                      <a:srgbClr val="4A4BD6"/>
-                    </a:solidFill>
-                  </a:tcPr>
-                </a:tc>
-                <a:tc>
-                  <a:txBody>
-                    <a:bodyPr wrap="square"/>
-                    <a:lstStyle/>
-                    <a:p>
-                      <a:r>
-                        <a:rPr sz="1050" b="1">
-                          <a:solidFill>
-                            <a:srgbClr val="FFFFFF"/>
-                          </a:solidFill>
-                          <a:latin typeface="Calibri"/>
-                        </a:rPr>
-                        <a:t>Signal it worked</a:t>
-                      </a:r>
-                    </a:p>
-                  </a:txBody>
-                  <a:tcPr marL="73152" marT="27432" marB="27432" anchor="ctr">
-                    <a:solidFill>
-                      <a:srgbClr val="4A4BD6"/>
-                    </a:solidFill>
-                  </a:tcPr>
-                </a:tc>
-              </a:tr>
-              <a:tr h="731520">
-                <a:tc>
-                  <a:txBody>
-                    <a:bodyPr wrap="square"/>
-                    <a:lstStyle/>
-                    <a:p>
-                      <a:r>
-                        <a:rPr sz="1050" b="0">
-                          <a:solidFill>
-                            <a:srgbClr val="111820"/>
-                          </a:solidFill>
-                          <a:latin typeface="Calibri"/>
-                        </a:rPr>
-                        <a:t>Start a written “project passport” per active project</a:t>
-                      </a:r>
-                    </a:p>
-                  </a:txBody>
-                  <a:tcPr marL="73152" marT="27432" marB="27432" anchor="ctr">
-                    <a:solidFill>
-                      <a:srgbClr val="FFFFFF"/>
-                    </a:solidFill>
-                  </a:tcPr>
-                </a:tc>
-                <a:tc>
-                  <a:txBody>
-                    <a:bodyPr wrap="square"/>
-                    <a:lstStyle/>
-                    <a:p>
-                      <a:r>
-                        <a:rPr sz="1050" b="0">
-                          <a:solidFill>
-                            <a:srgbClr val="111820"/>
-                          </a:solidFill>
-                          <a:latin typeface="Calibri"/>
-                        </a:rPr>
-                        <a:t>Development</a:t>
-                      </a:r>
-                    </a:p>
-                  </a:txBody>
-                  <a:tcPr marL="73152" marT="27432" marB="27432" anchor="ctr">
-                    <a:solidFill>
-                      <a:srgbClr val="FFFFFF"/>
-                    </a:solidFill>
-                  </a:tcPr>
-                </a:tc>
-                <a:tc>
-                  <a:txBody>
-                    <a:bodyPr wrap="square"/>
-                    <a:lstStyle/>
-                    <a:p>
-                      <a:r>
-                        <a:rPr sz="1050" b="0">
-                          <a:solidFill>
-                            <a:srgbClr val="111820"/>
-                          </a:solidFill>
-                          <a:latin typeface="Calibri"/>
-                        </a:rPr>
-                        <a:t>Knowledge is thin</a:t>
-                      </a:r>
-                    </a:p>
-                  </a:txBody>
-                  <a:tcPr marL="73152" marT="27432" marB="27432" anchor="ctr">
-                    <a:solidFill>
-                      <a:srgbClr val="FFFFFF"/>
-                    </a:solidFill>
-                  </a:tcPr>
-                </a:tc>
-                <a:tc>
-                  <a:txBody>
-                    <a:bodyPr wrap="square"/>
-                    <a:lstStyle/>
-                    <a:p>
-                      <a:r>
-                        <a:rPr sz="1050" b="0">
-                          <a:solidFill>
-                            <a:srgbClr val="111820"/>
-                          </a:solidFill>
-                          <a:latin typeface="Calibri"/>
-                        </a:rPr>
-                        <a:t>Cut one recurring all-hands</a:t>
-                      </a:r>
-                    </a:p>
-                  </a:txBody>
-                  <a:tcPr marL="73152" marT="27432" marB="27432" anchor="ctr">
-                    <a:solidFill>
-                      <a:srgbClr val="FFFFFF"/>
-                    </a:solidFill>
-                  </a:tcPr>
-                </a:tc>
-                <a:tc>
-                  <a:txBody>
-                    <a:bodyPr wrap="square"/>
-                    <a:lstStyle/>
-                    <a:p>
-                      <a:r>
-                        <a:rPr sz="1050" b="0">
-                          <a:solidFill>
-                            <a:srgbClr val="111820"/>
-                          </a:solidFill>
-                          <a:latin typeface="Calibri"/>
-                        </a:rPr>
-                        <a:t>[name]</a:t>
-                      </a:r>
-                    </a:p>
-                  </a:txBody>
-                  <a:tcPr marL="73152" marT="27432" marB="27432" anchor="ctr">
-                    <a:solidFill>
-                      <a:srgbClr val="FFFFFF"/>
-                    </a:solidFill>
-                  </a:tcPr>
-                </a:tc>
-                <a:tc>
-                  <a:txBody>
-                    <a:bodyPr wrap="square"/>
-                    <a:lstStyle/>
-                    <a:p>
-                      <a:r>
-                        <a:rPr sz="1050" b="0">
-                          <a:solidFill>
-                            <a:srgbClr val="111820"/>
-                          </a:solidFill>
-                          <a:latin typeface="Calibri"/>
-                        </a:rPr>
-                        <a:t>Template + 2 pilots</a:t>
-                      </a:r>
-                    </a:p>
-                  </a:txBody>
-                  <a:tcPr marL="73152" marT="27432" marB="27432" anchor="ctr">
-                    <a:solidFill>
-                      <a:srgbClr val="FFFFFF"/>
-                    </a:solidFill>
-                  </a:tcPr>
-                </a:tc>
-                <a:tc>
-                  <a:txBody>
-                    <a:bodyPr wrap="square"/>
-                    <a:lstStyle/>
-                    <a:p>
-                      <a:r>
-                        <a:rPr sz="1050" b="0">
-                          <a:solidFill>
-                            <a:srgbClr val="111820"/>
-                          </a:solidFill>
-                          <a:latin typeface="Calibri"/>
-                        </a:rPr>
-                        <a:t>A stranger can brief it</a:t>
-                      </a:r>
-                    </a:p>
-                  </a:txBody>
-                  <a:tcPr marL="73152" marT="27432" marB="27432" anchor="ctr">
-                    <a:solidFill>
-                      <a:srgbClr val="FFFFFF"/>
-                    </a:solidFill>
-                  </a:tcPr>
-                </a:tc>
-              </a:tr>
-              <a:tr h="731520">
-                <a:tc>
-                  <a:txBody>
-                    <a:bodyPr wrap="square"/>
-                    <a:lstStyle/>
-                    <a:p>
-                      <a:r>
-                        <a:rPr sz="1050" b="0">
-                          <a:solidFill>
-                            <a:srgbClr val="66717F"/>
-                          </a:solidFill>
-                          <a:latin typeface="Calibri"/>
-                        </a:rPr>
-                        <a:t>…</a:t>
-                      </a:r>
-                    </a:p>
-                  </a:txBody>
-                  <a:tcPr marL="73152" marT="27432" marB="27432" anchor="ctr">
-                    <a:solidFill>
-                      <a:srgbClr val="F4F6F9"/>
-                    </a:solidFill>
-                  </a:tcPr>
-                </a:tc>
-                <a:tc>
-                  <a:txBody>
-                    <a:bodyPr wrap="square"/>
-                    <a:lstStyle/>
-                    <a:p>
-                      <a:r>
-                        <a:rPr sz="1050" b="0">
-                          <a:solidFill>
-                            <a:srgbClr val="66717F"/>
-                          </a:solidFill>
-                          <a:latin typeface="Calibri"/>
-                        </a:rPr>
-                        <a:t>…</a:t>
-                      </a:r>
-                    </a:p>
-                  </a:txBody>
-                  <a:tcPr marL="73152" marT="27432" marB="27432" anchor="ctr">
-                    <a:solidFill>
-                      <a:srgbClr val="F4F6F9"/>
-                    </a:solidFill>
-                  </a:tcPr>
-                </a:tc>
-                <a:tc>
-                  <a:txBody>
-                    <a:bodyPr wrap="square"/>
-                    <a:lstStyle/>
-                    <a:p>
-                      <a:r>
-                        <a:rPr sz="1050" b="0">
-                          <a:solidFill>
-                            <a:srgbClr val="66717F"/>
-                          </a:solidFill>
-                          <a:latin typeface="Calibri"/>
-                        </a:rPr>
-                        <a:t>…</a:t>
-                      </a:r>
-                    </a:p>
-                  </a:txBody>
-                  <a:tcPr marL="73152" marT="27432" marB="27432" anchor="ctr">
-                    <a:solidFill>
-                      <a:srgbClr val="F4F6F9"/>
-                    </a:solidFill>
-                  </a:tcPr>
-                </a:tc>
-                <a:tc>
-                  <a:txBody>
-                    <a:bodyPr wrap="square"/>
-                    <a:lstStyle/>
-                    <a:p>
-                      <a:r>
-                        <a:rPr sz="1050" b="0">
-                          <a:solidFill>
-                            <a:srgbClr val="66717F"/>
-                          </a:solidFill>
-                          <a:latin typeface="Calibri"/>
-                        </a:rPr>
-                        <a:t>…</a:t>
-                      </a:r>
-                    </a:p>
-                  </a:txBody>
-                  <a:tcPr marL="73152" marT="27432" marB="27432" anchor="ctr">
-                    <a:solidFill>
-                      <a:srgbClr val="F4F6F9"/>
-                    </a:solidFill>
-                  </a:tcPr>
-                </a:tc>
-                <a:tc>
-                  <a:txBody>
-                    <a:bodyPr wrap="square"/>
-                    <a:lstStyle/>
-                    <a:p>
-                      <a:r>
-                        <a:rPr sz="1050" b="0">
-                          <a:solidFill>
-                            <a:srgbClr val="66717F"/>
-                          </a:solidFill>
-                          <a:latin typeface="Calibri"/>
-                        </a:rPr>
-                        <a:t>…</a:t>
-                      </a:r>
-                    </a:p>
-                  </a:txBody>
-                  <a:tcPr marL="73152" marT="27432" marB="27432" anchor="ctr">
-                    <a:solidFill>
-                      <a:srgbClr val="F4F6F9"/>
-                    </a:solidFill>
-                  </a:tcPr>
-                </a:tc>
-                <a:tc>
-                  <a:txBody>
-                    <a:bodyPr wrap="square"/>
-                    <a:lstStyle/>
-                    <a:p>
-                      <a:r>
-                        <a:rPr sz="1050" b="0">
-                          <a:solidFill>
-                            <a:srgbClr val="66717F"/>
-                          </a:solidFill>
-                          <a:latin typeface="Calibri"/>
-                        </a:rPr>
-                        <a:t>…</a:t>
-                      </a:r>
-                    </a:p>
-                  </a:txBody>
-                  <a:tcPr marL="73152" marT="27432" marB="27432" anchor="ctr">
-                    <a:solidFill>
-                      <a:srgbClr val="F4F6F9"/>
-                    </a:solidFill>
-                  </a:tcPr>
-                </a:tc>
-                <a:tc>
-                  <a:txBody>
-                    <a:bodyPr wrap="square"/>
-                    <a:lstStyle/>
-                    <a:p>
-                      <a:r>
-                        <a:rPr sz="1050" b="0">
-                          <a:solidFill>
-                            <a:srgbClr val="66717F"/>
-                          </a:solidFill>
-                          <a:latin typeface="Calibri"/>
-                        </a:rPr>
-                        <a:t>…</a:t>
-                      </a:r>
-                    </a:p>
-                  </a:txBody>
-                  <a:tcPr marL="73152" marT="27432" marB="27432" anchor="ctr">
-                    <a:solidFill>
-                      <a:srgbClr val="F4F6F9"/>
-                    </a:solidFill>
-                  </a:tcPr>
-                </a:tc>
-              </a:tr>
-            </a:tbl>
-          </a:graphicData>
-        </a:graphic>
-      </p:graphicFrame>
-      <p:sp>
-        <p:nvSpPr>
-          <p:cNvPr id="7" name="Rectangle 6"/>
+              <a:t>Your own three → the group's voted best two</a:t>
+            </a:r>
+          </a:p>
+        </p:txBody>
+      </p:sp>
+      <p:sp>
+        <p:nvSpPr>
+          <p:cNvPr id="6" name="TextBox 5"/>
+          <p:cNvSpPr txBox="1"/>
+          <p:nvPr/>
+        </p:nvSpPr>
+        <p:spPr>
+          <a:xfrm>
+            <a:off x="548640" y="1481328"/>
+            <a:ext cx="11064240" cy="365760"/>
+          </a:xfrm>
+          <a:prstGeom prst="rect">
+            <a:avLst/>
+          </a:prstGeom>
+          <a:noFill/>
+        </p:spPr>
+        <p:txBody>
+          <a:bodyPr wrap="square" anchor="t" lIns="0" rIns="0" tIns="0" bIns="0">
+            <a:spAutoFit/>
+          </a:bodyPr>
+          <a:lstStyle/>
+          <a:p>
+            <a:pPr algn="l">
+              <a:lnSpc>
+                <a:spcPct val="108000"/>
+              </a:lnSpc>
+              <a:spcBef>
+                <a:spcPts val="0"/>
+              </a:spcBef>
+              <a:spcAft>
+                <a:spcPts val="600"/>
+              </a:spcAft>
+            </a:pPr>
+            <a:r>
+              <a:rPr sz="1300" b="0" i="1">
+                <a:solidFill>
+                  <a:srgbClr val="66717F"/>
+                </a:solidFill>
+                <a:latin typeface="Calibri"/>
+              </a:rPr>
+              <a:t>Guide each individual's output, but the priority is a clean team record. A discipline may run several groups — each fills its own.</a:t>
+            </a:r>
+          </a:p>
+        </p:txBody>
+      </p:sp>
+      <p:sp>
+        <p:nvSpPr>
+          <p:cNvPr id="7" name="TextBox 6"/>
+          <p:cNvSpPr txBox="1"/>
+          <p:nvPr/>
+        </p:nvSpPr>
+        <p:spPr>
+          <a:xfrm>
+            <a:off x="548640" y="2011680"/>
+            <a:ext cx="10972800" cy="320040"/>
+          </a:xfrm>
+          <a:prstGeom prst="rect">
+            <a:avLst/>
+          </a:prstGeom>
+          <a:noFill/>
+        </p:spPr>
+        <p:txBody>
+          <a:bodyPr wrap="square" anchor="t" lIns="0" rIns="0" tIns="0" bIns="0">
+            <a:spAutoFit/>
+          </a:bodyPr>
+          <a:lstStyle/>
+          <a:p>
+            <a:pPr algn="l">
+              <a:lnSpc>
+                <a:spcPct val="108000"/>
+              </a:lnSpc>
+              <a:spcBef>
+                <a:spcPts val="0"/>
+              </a:spcBef>
+              <a:spcAft>
+                <a:spcPts val="600"/>
+              </a:spcAft>
+            </a:pPr>
+            <a:r>
+              <a:rPr sz="1100" b="1" i="0">
+                <a:solidFill>
+                  <a:srgbClr val="4A4BD6"/>
+                </a:solidFill>
+                <a:latin typeface="Consolas"/>
+              </a:rPr>
+              <a:t>1 · INDIVIDUAL — YOUR THREE (ONE OF EACH)</a:t>
+            </a:r>
+          </a:p>
+        </p:txBody>
+      </p:sp>
+      <p:sp>
+        <p:nvSpPr>
+          <p:cNvPr id="8" name="Rectangle 7"/>
           <p:cNvSpPr/>
           <p:nvPr/>
         </p:nvSpPr>
         <p:spPr>
           <a:xfrm>
-            <a:off x="548640" y="4297680"/>
-            <a:ext cx="11091672" cy="1371600"/>
+            <a:off x="548640" y="2377440"/>
+            <a:ext cx="3566160" cy="1371600"/>
           </a:xfrm>
           <a:prstGeom prst="rect">
             <a:avLst/>
@@ -9578,7 +9757,7 @@
           </a:solidFill>
           <a:ln w="9525">
             <a:solidFill>
-              <a:srgbClr val="4A4BD6"/>
+              <a:srgbClr val="D8DEE6"/>
             </a:solidFill>
           </a:ln>
           <a:effectLst/>
@@ -9607,14 +9786,58 @@
       </p:sp>
       <p:sp>
         <p:nvSpPr>
-          <p:cNvPr id="8" name="TextBox 7"/>
-          <p:cNvSpPr txBox="1"/>
-          <p:nvPr/>
-        </p:nvSpPr>
-        <p:spPr>
-          <a:xfrm>
-            <a:off x="749808" y="4434840"/>
-            <a:ext cx="10698480" cy="320040"/>
+          <p:cNvPr id="9" name="Rectangle 8"/>
+          <p:cNvSpPr/>
+          <p:nvPr/>
+        </p:nvSpPr>
+        <p:spPr>
+          <a:xfrm>
+            <a:off x="548640" y="2377440"/>
+            <a:ext cx="3566160" cy="64008"/>
+          </a:xfrm>
+          <a:prstGeom prst="rect">
+            <a:avLst/>
+          </a:prstGeom>
+          <a:solidFill>
+            <a:srgbClr val="B21E46"/>
+          </a:solidFill>
+          <a:ln>
+            <a:noFill/>
+          </a:ln>
+          <a:effectLst/>
+        </p:spPr>
+        <p:style>
+          <a:lnRef idx="1">
+            <a:schemeClr val="accent1"/>
+          </a:lnRef>
+          <a:fillRef idx="3">
+            <a:schemeClr val="accent1"/>
+          </a:fillRef>
+          <a:effectRef idx="2">
+            <a:schemeClr val="accent1"/>
+          </a:effectRef>
+          <a:fontRef idx="minor">
+            <a:schemeClr val="lt1"/>
+          </a:fontRef>
+        </p:style>
+        <p:txBody>
+          <a:bodyPr rtlCol="0" anchor="ctr"/>
+          <a:lstStyle/>
+          <a:p>
+            <a:pPr algn="ctr"/>
+          </a:p>
+        </p:txBody>
+      </p:sp>
+      <p:sp>
+        <p:nvSpPr>
+          <p:cNvPr id="10" name="TextBox 9"/>
+          <p:cNvSpPr txBox="1"/>
+          <p:nvPr/>
+        </p:nvSpPr>
+        <p:spPr>
+          <a:xfrm>
+            <a:off x="749808" y="2505456"/>
+            <a:ext cx="3200400" cy="274320"/>
           </a:xfrm>
           <a:prstGeom prst="rect">
             <a:avLst/>
@@ -9639,27 +9862,27 @@
               </a:spcAft>
             </a:pPr>
             <a:r>
-              <a:rPr sz="1100" b="1" i="0">
-                <a:solidFill>
-                  <a:srgbClr val="4A4BD6"/>
+              <a:rPr sz="1200" b="1" i="0">
+                <a:solidFill>
+                  <a:srgbClr val="B21E46"/>
                 </a:solidFill>
                 <a:latin typeface="Consolas"/>
               </a:rPr>
-              <a:t>THE 90-DAY SCOREBOARD</a:t>
-            </a:r>
-          </a:p>
-        </p:txBody>
-      </p:sp>
-      <p:sp>
-        <p:nvSpPr>
-          <p:cNvPr id="9" name="TextBox 8"/>
-          <p:cNvSpPr txBox="1"/>
-          <p:nvPr/>
-        </p:nvSpPr>
-        <p:spPr>
-          <a:xfrm>
-            <a:off x="749808" y="4736592"/>
-            <a:ext cx="10698480" cy="822960"/>
+              <a:t>STOP</a:t>
+            </a:r>
+          </a:p>
+        </p:txBody>
+      </p:sp>
+      <p:sp>
+        <p:nvSpPr>
+          <p:cNvPr id="11" name="TextBox 10"/>
+          <p:cNvSpPr txBox="1"/>
+          <p:nvPr/>
+        </p:nvSpPr>
+        <p:spPr>
+          <a:xfrm>
+            <a:off x="749808" y="2779776"/>
+            <a:ext cx="3200400" cy="274320"/>
           </a:xfrm>
           <a:prstGeom prst="rect">
             <a:avLst/>
@@ -9684,29 +9907,1361 @@
               </a:spcAft>
             </a:pPr>
             <a:r>
-              <a:rPr sz="1500" b="0" i="0">
-                <a:solidFill>
-                  <a:srgbClr val="37424F"/>
+              <a:rPr sz="1050" b="0" i="1">
+                <a:solidFill>
+                  <a:srgbClr val="66717F"/>
                 </a:solidFill>
                 <a:latin typeface="Calibri"/>
               </a:rPr>
-              <a:t>Put a review date on it now. In 90 days: which commitments happened, what changed — and, against the standard, are we closer to the best development team in the country? </a:t>
-            </a:r>
-            <a:r>
-              <a:rPr sz="1500" b="1" i="0">
-                <a:solidFill>
-                  <a:srgbClr val="111820"/>
+              <a:t>one thing we should stop</a:t>
+            </a:r>
+          </a:p>
+        </p:txBody>
+      </p:sp>
+      <p:sp>
+        <p:nvSpPr>
+          <p:cNvPr id="12" name="Rectangle 11"/>
+          <p:cNvSpPr/>
+          <p:nvPr/>
+        </p:nvSpPr>
+        <p:spPr>
+          <a:xfrm>
+            <a:off x="749808" y="3182112"/>
+            <a:ext cx="3163824" cy="10972"/>
+          </a:xfrm>
+          <a:prstGeom prst="rect">
+            <a:avLst/>
+          </a:prstGeom>
+          <a:solidFill>
+            <a:srgbClr val="D8DEE6"/>
+          </a:solidFill>
+          <a:ln>
+            <a:noFill/>
+          </a:ln>
+          <a:effectLst/>
+        </p:spPr>
+        <p:style>
+          <a:lnRef idx="1">
+            <a:schemeClr val="accent1"/>
+          </a:lnRef>
+          <a:fillRef idx="3">
+            <a:schemeClr val="accent1"/>
+          </a:fillRef>
+          <a:effectRef idx="2">
+            <a:schemeClr val="accent1"/>
+          </a:effectRef>
+          <a:fontRef idx="minor">
+            <a:schemeClr val="lt1"/>
+          </a:fontRef>
+        </p:style>
+        <p:txBody>
+          <a:bodyPr rtlCol="0" anchor="ctr"/>
+          <a:lstStyle/>
+          <a:p>
+            <a:pPr algn="ctr"/>
+          </a:p>
+        </p:txBody>
+      </p:sp>
+      <p:sp>
+        <p:nvSpPr>
+          <p:cNvPr id="13" name="Rectangle 12"/>
+          <p:cNvSpPr/>
+          <p:nvPr/>
+        </p:nvSpPr>
+        <p:spPr>
+          <a:xfrm>
+            <a:off x="4306824" y="2377440"/>
+            <a:ext cx="3566160" cy="1371600"/>
+          </a:xfrm>
+          <a:prstGeom prst="rect">
+            <a:avLst/>
+          </a:prstGeom>
+          <a:solidFill>
+            <a:srgbClr val="F4F6F9"/>
+          </a:solidFill>
+          <a:ln w="9525">
+            <a:solidFill>
+              <a:srgbClr val="D8DEE6"/>
+            </a:solidFill>
+          </a:ln>
+          <a:effectLst/>
+        </p:spPr>
+        <p:style>
+          <a:lnRef idx="1">
+            <a:schemeClr val="accent1"/>
+          </a:lnRef>
+          <a:fillRef idx="3">
+            <a:schemeClr val="accent1"/>
+          </a:fillRef>
+          <a:effectRef idx="2">
+            <a:schemeClr val="accent1"/>
+          </a:effectRef>
+          <a:fontRef idx="minor">
+            <a:schemeClr val="lt1"/>
+          </a:fontRef>
+        </p:style>
+        <p:txBody>
+          <a:bodyPr rtlCol="0" anchor="ctr"/>
+          <a:lstStyle/>
+          <a:p>
+            <a:pPr algn="ctr"/>
+          </a:p>
+        </p:txBody>
+      </p:sp>
+      <p:sp>
+        <p:nvSpPr>
+          <p:cNvPr id="14" name="Rectangle 13"/>
+          <p:cNvSpPr/>
+          <p:nvPr/>
+        </p:nvSpPr>
+        <p:spPr>
+          <a:xfrm>
+            <a:off x="4306824" y="2377440"/>
+            <a:ext cx="3566160" cy="64008"/>
+          </a:xfrm>
+          <a:prstGeom prst="rect">
+            <a:avLst/>
+          </a:prstGeom>
+          <a:solidFill>
+            <a:srgbClr val="2F7D3A"/>
+          </a:solidFill>
+          <a:ln>
+            <a:noFill/>
+          </a:ln>
+          <a:effectLst/>
+        </p:spPr>
+        <p:style>
+          <a:lnRef idx="1">
+            <a:schemeClr val="accent1"/>
+          </a:lnRef>
+          <a:fillRef idx="3">
+            <a:schemeClr val="accent1"/>
+          </a:fillRef>
+          <a:effectRef idx="2">
+            <a:schemeClr val="accent1"/>
+          </a:effectRef>
+          <a:fontRef idx="minor">
+            <a:schemeClr val="lt1"/>
+          </a:fontRef>
+        </p:style>
+        <p:txBody>
+          <a:bodyPr rtlCol="0" anchor="ctr"/>
+          <a:lstStyle/>
+          <a:p>
+            <a:pPr algn="ctr"/>
+          </a:p>
+        </p:txBody>
+      </p:sp>
+      <p:sp>
+        <p:nvSpPr>
+          <p:cNvPr id="15" name="TextBox 14"/>
+          <p:cNvSpPr txBox="1"/>
+          <p:nvPr/>
+        </p:nvSpPr>
+        <p:spPr>
+          <a:xfrm>
+            <a:off x="4507992" y="2505456"/>
+            <a:ext cx="3200400" cy="274320"/>
+          </a:xfrm>
+          <a:prstGeom prst="rect">
+            <a:avLst/>
+          </a:prstGeom>
+          <a:noFill/>
+        </p:spPr>
+        <p:txBody>
+          <a:bodyPr wrap="square" anchor="t" lIns="0" rIns="0" tIns="0" bIns="0">
+            <a:spAutoFit/>
+          </a:bodyPr>
+          <a:lstStyle/>
+          <a:p>
+            <a:pPr algn="l">
+              <a:lnSpc>
+                <a:spcPct val="108000"/>
+              </a:lnSpc>
+              <a:spcBef>
+                <a:spcPts val="0"/>
+              </a:spcBef>
+              <a:spcAft>
+                <a:spcPts val="600"/>
+              </a:spcAft>
+            </a:pPr>
+            <a:r>
+              <a:rPr sz="1200" b="1" i="0">
+                <a:solidFill>
+                  <a:srgbClr val="2F7D3A"/>
+                </a:solidFill>
+                <a:latin typeface="Consolas"/>
+              </a:rPr>
+              <a:t>START</a:t>
+            </a:r>
+          </a:p>
+        </p:txBody>
+      </p:sp>
+      <p:sp>
+        <p:nvSpPr>
+          <p:cNvPr id="16" name="TextBox 15"/>
+          <p:cNvSpPr txBox="1"/>
+          <p:nvPr/>
+        </p:nvSpPr>
+        <p:spPr>
+          <a:xfrm>
+            <a:off x="4507992" y="2779776"/>
+            <a:ext cx="3200400" cy="274320"/>
+          </a:xfrm>
+          <a:prstGeom prst="rect">
+            <a:avLst/>
+          </a:prstGeom>
+          <a:noFill/>
+        </p:spPr>
+        <p:txBody>
+          <a:bodyPr wrap="square" anchor="t" lIns="0" rIns="0" tIns="0" bIns="0">
+            <a:spAutoFit/>
+          </a:bodyPr>
+          <a:lstStyle/>
+          <a:p>
+            <a:pPr algn="l">
+              <a:lnSpc>
+                <a:spcPct val="108000"/>
+              </a:lnSpc>
+              <a:spcBef>
+                <a:spcPts val="0"/>
+              </a:spcBef>
+              <a:spcAft>
+                <a:spcPts val="600"/>
+              </a:spcAft>
+            </a:pPr>
+            <a:r>
+              <a:rPr sz="1050" b="0" i="1">
+                <a:solidFill>
+                  <a:srgbClr val="66717F"/>
                 </a:solidFill>
                 <a:latin typeface="Calibri"/>
               </a:rPr>
-              <a:t>A workshop with no review is a workshop that didn't happen.</a:t>
-            </a:r>
-          </a:p>
-        </p:txBody>
-      </p:sp>
-      <p:sp>
-        <p:nvSpPr>
-          <p:cNvPr id="10" name="TextBox 9"/>
+              <a:t>one new thing we should do</a:t>
+            </a:r>
+          </a:p>
+        </p:txBody>
+      </p:sp>
+      <p:sp>
+        <p:nvSpPr>
+          <p:cNvPr id="17" name="Rectangle 16"/>
+          <p:cNvSpPr/>
+          <p:nvPr/>
+        </p:nvSpPr>
+        <p:spPr>
+          <a:xfrm>
+            <a:off x="4507992" y="3182112"/>
+            <a:ext cx="3163824" cy="10972"/>
+          </a:xfrm>
+          <a:prstGeom prst="rect">
+            <a:avLst/>
+          </a:prstGeom>
+          <a:solidFill>
+            <a:srgbClr val="D8DEE6"/>
+          </a:solidFill>
+          <a:ln>
+            <a:noFill/>
+          </a:ln>
+          <a:effectLst/>
+        </p:spPr>
+        <p:style>
+          <a:lnRef idx="1">
+            <a:schemeClr val="accent1"/>
+          </a:lnRef>
+          <a:fillRef idx="3">
+            <a:schemeClr val="accent1"/>
+          </a:fillRef>
+          <a:effectRef idx="2">
+            <a:schemeClr val="accent1"/>
+          </a:effectRef>
+          <a:fontRef idx="minor">
+            <a:schemeClr val="lt1"/>
+          </a:fontRef>
+        </p:style>
+        <p:txBody>
+          <a:bodyPr rtlCol="0" anchor="ctr"/>
+          <a:lstStyle/>
+          <a:p>
+            <a:pPr algn="ctr"/>
+          </a:p>
+        </p:txBody>
+      </p:sp>
+      <p:sp>
+        <p:nvSpPr>
+          <p:cNvPr id="18" name="Rectangle 17"/>
+          <p:cNvSpPr/>
+          <p:nvPr/>
+        </p:nvSpPr>
+        <p:spPr>
+          <a:xfrm>
+            <a:off x="8065008" y="2377440"/>
+            <a:ext cx="3566160" cy="1371600"/>
+          </a:xfrm>
+          <a:prstGeom prst="rect">
+            <a:avLst/>
+          </a:prstGeom>
+          <a:solidFill>
+            <a:srgbClr val="F4F6F9"/>
+          </a:solidFill>
+          <a:ln w="9525">
+            <a:solidFill>
+              <a:srgbClr val="D8DEE6"/>
+            </a:solidFill>
+          </a:ln>
+          <a:effectLst/>
+        </p:spPr>
+        <p:style>
+          <a:lnRef idx="1">
+            <a:schemeClr val="accent1"/>
+          </a:lnRef>
+          <a:fillRef idx="3">
+            <a:schemeClr val="accent1"/>
+          </a:fillRef>
+          <a:effectRef idx="2">
+            <a:schemeClr val="accent1"/>
+          </a:effectRef>
+          <a:fontRef idx="minor">
+            <a:schemeClr val="lt1"/>
+          </a:fontRef>
+        </p:style>
+        <p:txBody>
+          <a:bodyPr rtlCol="0" anchor="ctr"/>
+          <a:lstStyle/>
+          <a:p>
+            <a:pPr algn="ctr"/>
+          </a:p>
+        </p:txBody>
+      </p:sp>
+      <p:sp>
+        <p:nvSpPr>
+          <p:cNvPr id="19" name="Rectangle 18"/>
+          <p:cNvSpPr/>
+          <p:nvPr/>
+        </p:nvSpPr>
+        <p:spPr>
+          <a:xfrm>
+            <a:off x="8065008" y="2377440"/>
+            <a:ext cx="3566160" cy="64008"/>
+          </a:xfrm>
+          <a:prstGeom prst="rect">
+            <a:avLst/>
+          </a:prstGeom>
+          <a:solidFill>
+            <a:srgbClr val="0D7D74"/>
+          </a:solidFill>
+          <a:ln>
+            <a:noFill/>
+          </a:ln>
+          <a:effectLst/>
+        </p:spPr>
+        <p:style>
+          <a:lnRef idx="1">
+            <a:schemeClr val="accent1"/>
+          </a:lnRef>
+          <a:fillRef idx="3">
+            <a:schemeClr val="accent1"/>
+          </a:fillRef>
+          <a:effectRef idx="2">
+            <a:schemeClr val="accent1"/>
+          </a:effectRef>
+          <a:fontRef idx="minor">
+            <a:schemeClr val="lt1"/>
+          </a:fontRef>
+        </p:style>
+        <p:txBody>
+          <a:bodyPr rtlCol="0" anchor="ctr"/>
+          <a:lstStyle/>
+          <a:p>
+            <a:pPr algn="ctr"/>
+          </a:p>
+        </p:txBody>
+      </p:sp>
+      <p:sp>
+        <p:nvSpPr>
+          <p:cNvPr id="20" name="TextBox 19"/>
+          <p:cNvSpPr txBox="1"/>
+          <p:nvPr/>
+        </p:nvSpPr>
+        <p:spPr>
+          <a:xfrm>
+            <a:off x="8266176" y="2505456"/>
+            <a:ext cx="3200400" cy="274320"/>
+          </a:xfrm>
+          <a:prstGeom prst="rect">
+            <a:avLst/>
+          </a:prstGeom>
+          <a:noFill/>
+        </p:spPr>
+        <p:txBody>
+          <a:bodyPr wrap="square" anchor="t" lIns="0" rIns="0" tIns="0" bIns="0">
+            <a:spAutoFit/>
+          </a:bodyPr>
+          <a:lstStyle/>
+          <a:p>
+            <a:pPr algn="l">
+              <a:lnSpc>
+                <a:spcPct val="108000"/>
+              </a:lnSpc>
+              <a:spcBef>
+                <a:spcPts val="0"/>
+              </a:spcBef>
+              <a:spcAft>
+                <a:spcPts val="600"/>
+              </a:spcAft>
+            </a:pPr>
+            <a:r>
+              <a:rPr sz="1200" b="1" i="0">
+                <a:solidFill>
+                  <a:srgbClr val="0D7D74"/>
+                </a:solidFill>
+                <a:latin typeface="Consolas"/>
+              </a:rPr>
+              <a:t>CONTINUE</a:t>
+            </a:r>
+          </a:p>
+        </p:txBody>
+      </p:sp>
+      <p:sp>
+        <p:nvSpPr>
+          <p:cNvPr id="21" name="TextBox 20"/>
+          <p:cNvSpPr txBox="1"/>
+          <p:nvPr/>
+        </p:nvSpPr>
+        <p:spPr>
+          <a:xfrm>
+            <a:off x="8266176" y="2779776"/>
+            <a:ext cx="3200400" cy="274320"/>
+          </a:xfrm>
+          <a:prstGeom prst="rect">
+            <a:avLst/>
+          </a:prstGeom>
+          <a:noFill/>
+        </p:spPr>
+        <p:txBody>
+          <a:bodyPr wrap="square" anchor="t" lIns="0" rIns="0" tIns="0" bIns="0">
+            <a:spAutoFit/>
+          </a:bodyPr>
+          <a:lstStyle/>
+          <a:p>
+            <a:pPr algn="l">
+              <a:lnSpc>
+                <a:spcPct val="108000"/>
+              </a:lnSpc>
+              <a:spcBef>
+                <a:spcPts val="0"/>
+              </a:spcBef>
+              <a:spcAft>
+                <a:spcPts val="600"/>
+              </a:spcAft>
+            </a:pPr>
+            <a:r>
+              <a:rPr sz="1050" b="0" i="1">
+                <a:solidFill>
+                  <a:srgbClr val="66717F"/>
+                </a:solidFill>
+                <a:latin typeface="Calibri"/>
+              </a:rPr>
+              <a:t>one working thing we protect</a:t>
+            </a:r>
+          </a:p>
+        </p:txBody>
+      </p:sp>
+      <p:sp>
+        <p:nvSpPr>
+          <p:cNvPr id="22" name="Rectangle 21"/>
+          <p:cNvSpPr/>
+          <p:nvPr/>
+        </p:nvSpPr>
+        <p:spPr>
+          <a:xfrm>
+            <a:off x="8266176" y="3182112"/>
+            <a:ext cx="3163824" cy="10972"/>
+          </a:xfrm>
+          <a:prstGeom prst="rect">
+            <a:avLst/>
+          </a:prstGeom>
+          <a:solidFill>
+            <a:srgbClr val="D8DEE6"/>
+          </a:solidFill>
+          <a:ln>
+            <a:noFill/>
+          </a:ln>
+          <a:effectLst/>
+        </p:spPr>
+        <p:style>
+          <a:lnRef idx="1">
+            <a:schemeClr val="accent1"/>
+          </a:lnRef>
+          <a:fillRef idx="3">
+            <a:schemeClr val="accent1"/>
+          </a:fillRef>
+          <a:effectRef idx="2">
+            <a:schemeClr val="accent1"/>
+          </a:effectRef>
+          <a:fontRef idx="minor">
+            <a:schemeClr val="lt1"/>
+          </a:fontRef>
+        </p:style>
+        <p:txBody>
+          <a:bodyPr rtlCol="0" anchor="ctr"/>
+          <a:lstStyle/>
+          <a:p>
+            <a:pPr algn="ctr"/>
+          </a:p>
+        </p:txBody>
+      </p:sp>
+      <p:sp>
+        <p:nvSpPr>
+          <p:cNvPr id="23" name="TextBox 22"/>
+          <p:cNvSpPr txBox="1"/>
+          <p:nvPr/>
+        </p:nvSpPr>
+        <p:spPr>
+          <a:xfrm>
+            <a:off x="548640" y="4160520"/>
+            <a:ext cx="10972800" cy="320040"/>
+          </a:xfrm>
+          <a:prstGeom prst="rect">
+            <a:avLst/>
+          </a:prstGeom>
+          <a:noFill/>
+        </p:spPr>
+        <p:txBody>
+          <a:bodyPr wrap="square" anchor="t" lIns="0" rIns="0" tIns="0" bIns="0">
+            <a:spAutoFit/>
+          </a:bodyPr>
+          <a:lstStyle/>
+          <a:p>
+            <a:pPr algn="l">
+              <a:lnSpc>
+                <a:spcPct val="108000"/>
+              </a:lnSpc>
+              <a:spcBef>
+                <a:spcPts val="0"/>
+              </a:spcBef>
+              <a:spcAft>
+                <a:spcPts val="600"/>
+              </a:spcAft>
+            </a:pPr>
+            <a:r>
+              <a:rPr sz="1100" b="1" i="0">
+                <a:solidFill>
+                  <a:srgbClr val="4A4BD6"/>
+                </a:solidFill>
+                <a:latin typeface="Consolas"/>
+              </a:rPr>
+              <a:t>2 · GROUP — VOTED BEST TWO IN EACH (WHAT YOU REPORT BACK)</a:t>
+            </a:r>
+          </a:p>
+        </p:txBody>
+      </p:sp>
+      <p:sp>
+        <p:nvSpPr>
+          <p:cNvPr id="24" name="Rectangle 23"/>
+          <p:cNvSpPr/>
+          <p:nvPr/>
+        </p:nvSpPr>
+        <p:spPr>
+          <a:xfrm>
+            <a:off x="548640" y="4526280"/>
+            <a:ext cx="3566160" cy="1371600"/>
+          </a:xfrm>
+          <a:prstGeom prst="rect">
+            <a:avLst/>
+          </a:prstGeom>
+          <a:solidFill>
+            <a:srgbClr val="F4F6F9"/>
+          </a:solidFill>
+          <a:ln w="9525">
+            <a:solidFill>
+              <a:srgbClr val="D8DEE6"/>
+            </a:solidFill>
+          </a:ln>
+          <a:effectLst/>
+        </p:spPr>
+        <p:style>
+          <a:lnRef idx="1">
+            <a:schemeClr val="accent1"/>
+          </a:lnRef>
+          <a:fillRef idx="3">
+            <a:schemeClr val="accent1"/>
+          </a:fillRef>
+          <a:effectRef idx="2">
+            <a:schemeClr val="accent1"/>
+          </a:effectRef>
+          <a:fontRef idx="minor">
+            <a:schemeClr val="lt1"/>
+          </a:fontRef>
+        </p:style>
+        <p:txBody>
+          <a:bodyPr rtlCol="0" anchor="ctr"/>
+          <a:lstStyle/>
+          <a:p>
+            <a:pPr algn="ctr"/>
+          </a:p>
+        </p:txBody>
+      </p:sp>
+      <p:sp>
+        <p:nvSpPr>
+          <p:cNvPr id="25" name="Rectangle 24"/>
+          <p:cNvSpPr/>
+          <p:nvPr/>
+        </p:nvSpPr>
+        <p:spPr>
+          <a:xfrm>
+            <a:off x="548640" y="4526280"/>
+            <a:ext cx="3566160" cy="64008"/>
+          </a:xfrm>
+          <a:prstGeom prst="rect">
+            <a:avLst/>
+          </a:prstGeom>
+          <a:solidFill>
+            <a:srgbClr val="B21E46"/>
+          </a:solidFill>
+          <a:ln>
+            <a:noFill/>
+          </a:ln>
+          <a:effectLst/>
+        </p:spPr>
+        <p:style>
+          <a:lnRef idx="1">
+            <a:schemeClr val="accent1"/>
+          </a:lnRef>
+          <a:fillRef idx="3">
+            <a:schemeClr val="accent1"/>
+          </a:fillRef>
+          <a:effectRef idx="2">
+            <a:schemeClr val="accent1"/>
+          </a:effectRef>
+          <a:fontRef idx="minor">
+            <a:schemeClr val="lt1"/>
+          </a:fontRef>
+        </p:style>
+        <p:txBody>
+          <a:bodyPr rtlCol="0" anchor="ctr"/>
+          <a:lstStyle/>
+          <a:p>
+            <a:pPr algn="ctr"/>
+          </a:p>
+        </p:txBody>
+      </p:sp>
+      <p:sp>
+        <p:nvSpPr>
+          <p:cNvPr id="26" name="TextBox 25"/>
+          <p:cNvSpPr txBox="1"/>
+          <p:nvPr/>
+        </p:nvSpPr>
+        <p:spPr>
+          <a:xfrm>
+            <a:off x="749808" y="4654296"/>
+            <a:ext cx="3200400" cy="274320"/>
+          </a:xfrm>
+          <a:prstGeom prst="rect">
+            <a:avLst/>
+          </a:prstGeom>
+          <a:noFill/>
+        </p:spPr>
+        <p:txBody>
+          <a:bodyPr wrap="square" anchor="t" lIns="0" rIns="0" tIns="0" bIns="0">
+            <a:spAutoFit/>
+          </a:bodyPr>
+          <a:lstStyle/>
+          <a:p>
+            <a:pPr algn="l">
+              <a:lnSpc>
+                <a:spcPct val="108000"/>
+              </a:lnSpc>
+              <a:spcBef>
+                <a:spcPts val="0"/>
+              </a:spcBef>
+              <a:spcAft>
+                <a:spcPts val="600"/>
+              </a:spcAft>
+            </a:pPr>
+            <a:r>
+              <a:rPr sz="1200" b="1" i="0">
+                <a:solidFill>
+                  <a:srgbClr val="B21E46"/>
+                </a:solidFill>
+                <a:latin typeface="Consolas"/>
+              </a:rPr>
+              <a:t>STOP</a:t>
+            </a:r>
+          </a:p>
+        </p:txBody>
+      </p:sp>
+      <p:sp>
+        <p:nvSpPr>
+          <p:cNvPr id="27" name="TextBox 26"/>
+          <p:cNvSpPr txBox="1"/>
+          <p:nvPr/>
+        </p:nvSpPr>
+        <p:spPr>
+          <a:xfrm>
+            <a:off x="749808" y="4928616"/>
+            <a:ext cx="3200400" cy="274320"/>
+          </a:xfrm>
+          <a:prstGeom prst="rect">
+            <a:avLst/>
+          </a:prstGeom>
+          <a:noFill/>
+        </p:spPr>
+        <p:txBody>
+          <a:bodyPr wrap="square" anchor="t" lIns="0" rIns="0" tIns="0" bIns="0">
+            <a:spAutoFit/>
+          </a:bodyPr>
+          <a:lstStyle/>
+          <a:p>
+            <a:pPr algn="l">
+              <a:lnSpc>
+                <a:spcPct val="108000"/>
+              </a:lnSpc>
+              <a:spcBef>
+                <a:spcPts val="0"/>
+              </a:spcBef>
+              <a:spcAft>
+                <a:spcPts val="600"/>
+              </a:spcAft>
+            </a:pPr>
+            <a:r>
+              <a:rPr sz="1050" b="0" i="1">
+                <a:solidFill>
+                  <a:srgbClr val="66717F"/>
+                </a:solidFill>
+                <a:latin typeface="Calibri"/>
+              </a:rPr>
+              <a:t>one thing we should stop</a:t>
+            </a:r>
+          </a:p>
+        </p:txBody>
+      </p:sp>
+      <p:sp>
+        <p:nvSpPr>
+          <p:cNvPr id="28" name="Rectangle 27"/>
+          <p:cNvSpPr/>
+          <p:nvPr/>
+        </p:nvSpPr>
+        <p:spPr>
+          <a:xfrm>
+            <a:off x="749808" y="5330952"/>
+            <a:ext cx="3163824" cy="10972"/>
+          </a:xfrm>
+          <a:prstGeom prst="rect">
+            <a:avLst/>
+          </a:prstGeom>
+          <a:solidFill>
+            <a:srgbClr val="D8DEE6"/>
+          </a:solidFill>
+          <a:ln>
+            <a:noFill/>
+          </a:ln>
+          <a:effectLst/>
+        </p:spPr>
+        <p:style>
+          <a:lnRef idx="1">
+            <a:schemeClr val="accent1"/>
+          </a:lnRef>
+          <a:fillRef idx="3">
+            <a:schemeClr val="accent1"/>
+          </a:fillRef>
+          <a:effectRef idx="2">
+            <a:schemeClr val="accent1"/>
+          </a:effectRef>
+          <a:fontRef idx="minor">
+            <a:schemeClr val="lt1"/>
+          </a:fontRef>
+        </p:style>
+        <p:txBody>
+          <a:bodyPr rtlCol="0" anchor="ctr"/>
+          <a:lstStyle/>
+          <a:p>
+            <a:pPr algn="ctr"/>
+          </a:p>
+        </p:txBody>
+      </p:sp>
+      <p:sp>
+        <p:nvSpPr>
+          <p:cNvPr id="29" name="Rectangle 28"/>
+          <p:cNvSpPr/>
+          <p:nvPr/>
+        </p:nvSpPr>
+        <p:spPr>
+          <a:xfrm>
+            <a:off x="749808" y="5586984"/>
+            <a:ext cx="3163824" cy="10972"/>
+          </a:xfrm>
+          <a:prstGeom prst="rect">
+            <a:avLst/>
+          </a:prstGeom>
+          <a:solidFill>
+            <a:srgbClr val="D8DEE6"/>
+          </a:solidFill>
+          <a:ln>
+            <a:noFill/>
+          </a:ln>
+          <a:effectLst/>
+        </p:spPr>
+        <p:style>
+          <a:lnRef idx="1">
+            <a:schemeClr val="accent1"/>
+          </a:lnRef>
+          <a:fillRef idx="3">
+            <a:schemeClr val="accent1"/>
+          </a:fillRef>
+          <a:effectRef idx="2">
+            <a:schemeClr val="accent1"/>
+          </a:effectRef>
+          <a:fontRef idx="minor">
+            <a:schemeClr val="lt1"/>
+          </a:fontRef>
+        </p:style>
+        <p:txBody>
+          <a:bodyPr rtlCol="0" anchor="ctr"/>
+          <a:lstStyle/>
+          <a:p>
+            <a:pPr algn="ctr"/>
+          </a:p>
+        </p:txBody>
+      </p:sp>
+      <p:sp>
+        <p:nvSpPr>
+          <p:cNvPr id="30" name="Rectangle 29"/>
+          <p:cNvSpPr/>
+          <p:nvPr/>
+        </p:nvSpPr>
+        <p:spPr>
+          <a:xfrm>
+            <a:off x="4306824" y="4526280"/>
+            <a:ext cx="3566160" cy="1371600"/>
+          </a:xfrm>
+          <a:prstGeom prst="rect">
+            <a:avLst/>
+          </a:prstGeom>
+          <a:solidFill>
+            <a:srgbClr val="F4F6F9"/>
+          </a:solidFill>
+          <a:ln w="9525">
+            <a:solidFill>
+              <a:srgbClr val="D8DEE6"/>
+            </a:solidFill>
+          </a:ln>
+          <a:effectLst/>
+        </p:spPr>
+        <p:style>
+          <a:lnRef idx="1">
+            <a:schemeClr val="accent1"/>
+          </a:lnRef>
+          <a:fillRef idx="3">
+            <a:schemeClr val="accent1"/>
+          </a:fillRef>
+          <a:effectRef idx="2">
+            <a:schemeClr val="accent1"/>
+          </a:effectRef>
+          <a:fontRef idx="minor">
+            <a:schemeClr val="lt1"/>
+          </a:fontRef>
+        </p:style>
+        <p:txBody>
+          <a:bodyPr rtlCol="0" anchor="ctr"/>
+          <a:lstStyle/>
+          <a:p>
+            <a:pPr algn="ctr"/>
+          </a:p>
+        </p:txBody>
+      </p:sp>
+      <p:sp>
+        <p:nvSpPr>
+          <p:cNvPr id="31" name="Rectangle 30"/>
+          <p:cNvSpPr/>
+          <p:nvPr/>
+        </p:nvSpPr>
+        <p:spPr>
+          <a:xfrm>
+            <a:off x="4306824" y="4526280"/>
+            <a:ext cx="3566160" cy="64008"/>
+          </a:xfrm>
+          <a:prstGeom prst="rect">
+            <a:avLst/>
+          </a:prstGeom>
+          <a:solidFill>
+            <a:srgbClr val="2F7D3A"/>
+          </a:solidFill>
+          <a:ln>
+            <a:noFill/>
+          </a:ln>
+          <a:effectLst/>
+        </p:spPr>
+        <p:style>
+          <a:lnRef idx="1">
+            <a:schemeClr val="accent1"/>
+          </a:lnRef>
+          <a:fillRef idx="3">
+            <a:schemeClr val="accent1"/>
+          </a:fillRef>
+          <a:effectRef idx="2">
+            <a:schemeClr val="accent1"/>
+          </a:effectRef>
+          <a:fontRef idx="minor">
+            <a:schemeClr val="lt1"/>
+          </a:fontRef>
+        </p:style>
+        <p:txBody>
+          <a:bodyPr rtlCol="0" anchor="ctr"/>
+          <a:lstStyle/>
+          <a:p>
+            <a:pPr algn="ctr"/>
+          </a:p>
+        </p:txBody>
+      </p:sp>
+      <p:sp>
+        <p:nvSpPr>
+          <p:cNvPr id="32" name="TextBox 31"/>
+          <p:cNvSpPr txBox="1"/>
+          <p:nvPr/>
+        </p:nvSpPr>
+        <p:spPr>
+          <a:xfrm>
+            <a:off x="4507992" y="4654296"/>
+            <a:ext cx="3200400" cy="274320"/>
+          </a:xfrm>
+          <a:prstGeom prst="rect">
+            <a:avLst/>
+          </a:prstGeom>
+          <a:noFill/>
+        </p:spPr>
+        <p:txBody>
+          <a:bodyPr wrap="square" anchor="t" lIns="0" rIns="0" tIns="0" bIns="0">
+            <a:spAutoFit/>
+          </a:bodyPr>
+          <a:lstStyle/>
+          <a:p>
+            <a:pPr algn="l">
+              <a:lnSpc>
+                <a:spcPct val="108000"/>
+              </a:lnSpc>
+              <a:spcBef>
+                <a:spcPts val="0"/>
+              </a:spcBef>
+              <a:spcAft>
+                <a:spcPts val="600"/>
+              </a:spcAft>
+            </a:pPr>
+            <a:r>
+              <a:rPr sz="1200" b="1" i="0">
+                <a:solidFill>
+                  <a:srgbClr val="2F7D3A"/>
+                </a:solidFill>
+                <a:latin typeface="Consolas"/>
+              </a:rPr>
+              <a:t>START</a:t>
+            </a:r>
+          </a:p>
+        </p:txBody>
+      </p:sp>
+      <p:sp>
+        <p:nvSpPr>
+          <p:cNvPr id="33" name="TextBox 32"/>
+          <p:cNvSpPr txBox="1"/>
+          <p:nvPr/>
+        </p:nvSpPr>
+        <p:spPr>
+          <a:xfrm>
+            <a:off x="4507992" y="4928616"/>
+            <a:ext cx="3200400" cy="274320"/>
+          </a:xfrm>
+          <a:prstGeom prst="rect">
+            <a:avLst/>
+          </a:prstGeom>
+          <a:noFill/>
+        </p:spPr>
+        <p:txBody>
+          <a:bodyPr wrap="square" anchor="t" lIns="0" rIns="0" tIns="0" bIns="0">
+            <a:spAutoFit/>
+          </a:bodyPr>
+          <a:lstStyle/>
+          <a:p>
+            <a:pPr algn="l">
+              <a:lnSpc>
+                <a:spcPct val="108000"/>
+              </a:lnSpc>
+              <a:spcBef>
+                <a:spcPts val="0"/>
+              </a:spcBef>
+              <a:spcAft>
+                <a:spcPts val="600"/>
+              </a:spcAft>
+            </a:pPr>
+            <a:r>
+              <a:rPr sz="1050" b="0" i="1">
+                <a:solidFill>
+                  <a:srgbClr val="66717F"/>
+                </a:solidFill>
+                <a:latin typeface="Calibri"/>
+              </a:rPr>
+              <a:t>one new thing we should do</a:t>
+            </a:r>
+          </a:p>
+        </p:txBody>
+      </p:sp>
+      <p:sp>
+        <p:nvSpPr>
+          <p:cNvPr id="34" name="Rectangle 33"/>
+          <p:cNvSpPr/>
+          <p:nvPr/>
+        </p:nvSpPr>
+        <p:spPr>
+          <a:xfrm>
+            <a:off x="4507992" y="5330952"/>
+            <a:ext cx="3163824" cy="10972"/>
+          </a:xfrm>
+          <a:prstGeom prst="rect">
+            <a:avLst/>
+          </a:prstGeom>
+          <a:solidFill>
+            <a:srgbClr val="D8DEE6"/>
+          </a:solidFill>
+          <a:ln>
+            <a:noFill/>
+          </a:ln>
+          <a:effectLst/>
+        </p:spPr>
+        <p:style>
+          <a:lnRef idx="1">
+            <a:schemeClr val="accent1"/>
+          </a:lnRef>
+          <a:fillRef idx="3">
+            <a:schemeClr val="accent1"/>
+          </a:fillRef>
+          <a:effectRef idx="2">
+            <a:schemeClr val="accent1"/>
+          </a:effectRef>
+          <a:fontRef idx="minor">
+            <a:schemeClr val="lt1"/>
+          </a:fontRef>
+        </p:style>
+        <p:txBody>
+          <a:bodyPr rtlCol="0" anchor="ctr"/>
+          <a:lstStyle/>
+          <a:p>
+            <a:pPr algn="ctr"/>
+          </a:p>
+        </p:txBody>
+      </p:sp>
+      <p:sp>
+        <p:nvSpPr>
+          <p:cNvPr id="35" name="Rectangle 34"/>
+          <p:cNvSpPr/>
+          <p:nvPr/>
+        </p:nvSpPr>
+        <p:spPr>
+          <a:xfrm>
+            <a:off x="4507992" y="5586984"/>
+            <a:ext cx="3163824" cy="10972"/>
+          </a:xfrm>
+          <a:prstGeom prst="rect">
+            <a:avLst/>
+          </a:prstGeom>
+          <a:solidFill>
+            <a:srgbClr val="D8DEE6"/>
+          </a:solidFill>
+          <a:ln>
+            <a:noFill/>
+          </a:ln>
+          <a:effectLst/>
+        </p:spPr>
+        <p:style>
+          <a:lnRef idx="1">
+            <a:schemeClr val="accent1"/>
+          </a:lnRef>
+          <a:fillRef idx="3">
+            <a:schemeClr val="accent1"/>
+          </a:fillRef>
+          <a:effectRef idx="2">
+            <a:schemeClr val="accent1"/>
+          </a:effectRef>
+          <a:fontRef idx="minor">
+            <a:schemeClr val="lt1"/>
+          </a:fontRef>
+        </p:style>
+        <p:txBody>
+          <a:bodyPr rtlCol="0" anchor="ctr"/>
+          <a:lstStyle/>
+          <a:p>
+            <a:pPr algn="ctr"/>
+          </a:p>
+        </p:txBody>
+      </p:sp>
+      <p:sp>
+        <p:nvSpPr>
+          <p:cNvPr id="36" name="Rectangle 35"/>
+          <p:cNvSpPr/>
+          <p:nvPr/>
+        </p:nvSpPr>
+        <p:spPr>
+          <a:xfrm>
+            <a:off x="8065008" y="4526280"/>
+            <a:ext cx="3566160" cy="1371600"/>
+          </a:xfrm>
+          <a:prstGeom prst="rect">
+            <a:avLst/>
+          </a:prstGeom>
+          <a:solidFill>
+            <a:srgbClr val="F4F6F9"/>
+          </a:solidFill>
+          <a:ln w="9525">
+            <a:solidFill>
+              <a:srgbClr val="D8DEE6"/>
+            </a:solidFill>
+          </a:ln>
+          <a:effectLst/>
+        </p:spPr>
+        <p:style>
+          <a:lnRef idx="1">
+            <a:schemeClr val="accent1"/>
+          </a:lnRef>
+          <a:fillRef idx="3">
+            <a:schemeClr val="accent1"/>
+          </a:fillRef>
+          <a:effectRef idx="2">
+            <a:schemeClr val="accent1"/>
+          </a:effectRef>
+          <a:fontRef idx="minor">
+            <a:schemeClr val="lt1"/>
+          </a:fontRef>
+        </p:style>
+        <p:txBody>
+          <a:bodyPr rtlCol="0" anchor="ctr"/>
+          <a:lstStyle/>
+          <a:p>
+            <a:pPr algn="ctr"/>
+          </a:p>
+        </p:txBody>
+      </p:sp>
+      <p:sp>
+        <p:nvSpPr>
+          <p:cNvPr id="37" name="Rectangle 36"/>
+          <p:cNvSpPr/>
+          <p:nvPr/>
+        </p:nvSpPr>
+        <p:spPr>
+          <a:xfrm>
+            <a:off x="8065008" y="4526280"/>
+            <a:ext cx="3566160" cy="64008"/>
+          </a:xfrm>
+          <a:prstGeom prst="rect">
+            <a:avLst/>
+          </a:prstGeom>
+          <a:solidFill>
+            <a:srgbClr val="0D7D74"/>
+          </a:solidFill>
+          <a:ln>
+            <a:noFill/>
+          </a:ln>
+          <a:effectLst/>
+        </p:spPr>
+        <p:style>
+          <a:lnRef idx="1">
+            <a:schemeClr val="accent1"/>
+          </a:lnRef>
+          <a:fillRef idx="3">
+            <a:schemeClr val="accent1"/>
+          </a:fillRef>
+          <a:effectRef idx="2">
+            <a:schemeClr val="accent1"/>
+          </a:effectRef>
+          <a:fontRef idx="minor">
+            <a:schemeClr val="lt1"/>
+          </a:fontRef>
+        </p:style>
+        <p:txBody>
+          <a:bodyPr rtlCol="0" anchor="ctr"/>
+          <a:lstStyle/>
+          <a:p>
+            <a:pPr algn="ctr"/>
+          </a:p>
+        </p:txBody>
+      </p:sp>
+      <p:sp>
+        <p:nvSpPr>
+          <p:cNvPr id="38" name="TextBox 37"/>
+          <p:cNvSpPr txBox="1"/>
+          <p:nvPr/>
+        </p:nvSpPr>
+        <p:spPr>
+          <a:xfrm>
+            <a:off x="8266176" y="4654296"/>
+            <a:ext cx="3200400" cy="274320"/>
+          </a:xfrm>
+          <a:prstGeom prst="rect">
+            <a:avLst/>
+          </a:prstGeom>
+          <a:noFill/>
+        </p:spPr>
+        <p:txBody>
+          <a:bodyPr wrap="square" anchor="t" lIns="0" rIns="0" tIns="0" bIns="0">
+            <a:spAutoFit/>
+          </a:bodyPr>
+          <a:lstStyle/>
+          <a:p>
+            <a:pPr algn="l">
+              <a:lnSpc>
+                <a:spcPct val="108000"/>
+              </a:lnSpc>
+              <a:spcBef>
+                <a:spcPts val="0"/>
+              </a:spcBef>
+              <a:spcAft>
+                <a:spcPts val="600"/>
+              </a:spcAft>
+            </a:pPr>
+            <a:r>
+              <a:rPr sz="1200" b="1" i="0">
+                <a:solidFill>
+                  <a:srgbClr val="0D7D74"/>
+                </a:solidFill>
+                <a:latin typeface="Consolas"/>
+              </a:rPr>
+              <a:t>CONTINUE</a:t>
+            </a:r>
+          </a:p>
+        </p:txBody>
+      </p:sp>
+      <p:sp>
+        <p:nvSpPr>
+          <p:cNvPr id="39" name="TextBox 38"/>
+          <p:cNvSpPr txBox="1"/>
+          <p:nvPr/>
+        </p:nvSpPr>
+        <p:spPr>
+          <a:xfrm>
+            <a:off x="8266176" y="4928616"/>
+            <a:ext cx="3200400" cy="274320"/>
+          </a:xfrm>
+          <a:prstGeom prst="rect">
+            <a:avLst/>
+          </a:prstGeom>
+          <a:noFill/>
+        </p:spPr>
+        <p:txBody>
+          <a:bodyPr wrap="square" anchor="t" lIns="0" rIns="0" tIns="0" bIns="0">
+            <a:spAutoFit/>
+          </a:bodyPr>
+          <a:lstStyle/>
+          <a:p>
+            <a:pPr algn="l">
+              <a:lnSpc>
+                <a:spcPct val="108000"/>
+              </a:lnSpc>
+              <a:spcBef>
+                <a:spcPts val="0"/>
+              </a:spcBef>
+              <a:spcAft>
+                <a:spcPts val="600"/>
+              </a:spcAft>
+            </a:pPr>
+            <a:r>
+              <a:rPr sz="1050" b="0" i="1">
+                <a:solidFill>
+                  <a:srgbClr val="66717F"/>
+                </a:solidFill>
+                <a:latin typeface="Calibri"/>
+              </a:rPr>
+              <a:t>one working thing we protect</a:t>
+            </a:r>
+          </a:p>
+        </p:txBody>
+      </p:sp>
+      <p:sp>
+        <p:nvSpPr>
+          <p:cNvPr id="40" name="Rectangle 39"/>
+          <p:cNvSpPr/>
+          <p:nvPr/>
+        </p:nvSpPr>
+        <p:spPr>
+          <a:xfrm>
+            <a:off x="8266176" y="5330952"/>
+            <a:ext cx="3163824" cy="10972"/>
+          </a:xfrm>
+          <a:prstGeom prst="rect">
+            <a:avLst/>
+          </a:prstGeom>
+          <a:solidFill>
+            <a:srgbClr val="D8DEE6"/>
+          </a:solidFill>
+          <a:ln>
+            <a:noFill/>
+          </a:ln>
+          <a:effectLst/>
+        </p:spPr>
+        <p:style>
+          <a:lnRef idx="1">
+            <a:schemeClr val="accent1"/>
+          </a:lnRef>
+          <a:fillRef idx="3">
+            <a:schemeClr val="accent1"/>
+          </a:fillRef>
+          <a:effectRef idx="2">
+            <a:schemeClr val="accent1"/>
+          </a:effectRef>
+          <a:fontRef idx="minor">
+            <a:schemeClr val="lt1"/>
+          </a:fontRef>
+        </p:style>
+        <p:txBody>
+          <a:bodyPr rtlCol="0" anchor="ctr"/>
+          <a:lstStyle/>
+          <a:p>
+            <a:pPr algn="ctr"/>
+          </a:p>
+        </p:txBody>
+      </p:sp>
+      <p:sp>
+        <p:nvSpPr>
+          <p:cNvPr id="41" name="Rectangle 40"/>
+          <p:cNvSpPr/>
+          <p:nvPr/>
+        </p:nvSpPr>
+        <p:spPr>
+          <a:xfrm>
+            <a:off x="8266176" y="5586984"/>
+            <a:ext cx="3163824" cy="10972"/>
+          </a:xfrm>
+          <a:prstGeom prst="rect">
+            <a:avLst/>
+          </a:prstGeom>
+          <a:solidFill>
+            <a:srgbClr val="D8DEE6"/>
+          </a:solidFill>
+          <a:ln>
+            <a:noFill/>
+          </a:ln>
+          <a:effectLst/>
+        </p:spPr>
+        <p:style>
+          <a:lnRef idx="1">
+            <a:schemeClr val="accent1"/>
+          </a:lnRef>
+          <a:fillRef idx="3">
+            <a:schemeClr val="accent1"/>
+          </a:fillRef>
+          <a:effectRef idx="2">
+            <a:schemeClr val="accent1"/>
+          </a:effectRef>
+          <a:fontRef idx="minor">
+            <a:schemeClr val="lt1"/>
+          </a:fontRef>
+        </p:style>
+        <p:txBody>
+          <a:bodyPr rtlCol="0" anchor="ctr"/>
+          <a:lstStyle/>
+          <a:p>
+            <a:pPr algn="ctr"/>
+          </a:p>
+        </p:txBody>
+      </p:sp>
+      <p:sp>
+        <p:nvSpPr>
+          <p:cNvPr id="42" name="TextBox 41"/>
           <p:cNvSpPr txBox="1"/>
           <p:nvPr/>
         </p:nvSpPr>
@@ -9782,7 +11337,7 @@
             <a:avLst/>
           </a:prstGeom>
           <a:solidFill>
-            <a:srgbClr val="111820"/>
+            <a:srgbClr val="FFFFFF"/>
           </a:solidFill>
           <a:ln>
             <a:noFill/>
@@ -9820,7 +11375,7 @@
         <p:spPr>
           <a:xfrm>
             <a:off x="0" y="0"/>
-            <a:ext cx="12191695" cy="201168"/>
+            <a:ext cx="146304" cy="6858000"/>
           </a:xfrm>
           <a:prstGeom prst="rect">
             <a:avLst/>
@@ -9863,8 +11418,8 @@
         </p:nvSpPr>
         <p:spPr>
           <a:xfrm>
-            <a:off x="822960" y="2377440"/>
-            <a:ext cx="10515600" cy="1097280"/>
+            <a:off x="548640" y="457200"/>
+            <a:ext cx="10058400" cy="274320"/>
           </a:xfrm>
           <a:prstGeom prst="rect">
             <a:avLst/>
@@ -9889,13 +11444,13 @@
               </a:spcAft>
             </a:pPr>
             <a:r>
-              <a:rPr sz="3400" b="1" i="0">
-                <a:solidFill>
-                  <a:srgbClr val="FFFFFF"/>
-                </a:solidFill>
-                <a:latin typeface="Calibri"/>
-              </a:rPr>
-              <a:t>Leave with a decision, not a discussion</a:t>
+              <a:rPr sz="1200" b="1" i="0">
+                <a:solidFill>
+                  <a:srgbClr val="4A4BD6"/>
+                </a:solidFill>
+                <a:latin typeface="Consolas"/>
+              </a:rPr>
+              <a:t>MAKE ONE REAL</a:t>
             </a:r>
           </a:p>
         </p:txBody>
@@ -9908,8 +11463,8 @@
         </p:nvSpPr>
         <p:spPr>
           <a:xfrm>
-            <a:off x="822960" y="3383280"/>
-            <a:ext cx="10424160" cy="1463040"/>
+            <a:off x="502920" y="777240"/>
+            <a:ext cx="11155680" cy="822960"/>
           </a:xfrm>
           <a:prstGeom prst="rect">
             <a:avLst/>
@@ -9934,13 +11489,1423 @@
               </a:spcAft>
             </a:pPr>
             <a:r>
+              <a:rPr sz="3200" b="1" i="0">
+                <a:solidFill>
+                  <a:srgbClr val="111820"/>
+                </a:solidFill>
+                <a:latin typeface="Calibri"/>
+              </a:rPr>
+              <a:t>Take your best Start and turn it into a plan</a:t>
+            </a:r>
+          </a:p>
+        </p:txBody>
+      </p:sp>
+      <p:sp>
+        <p:nvSpPr>
+          <p:cNvPr id="6" name="TextBox 5"/>
+          <p:cNvSpPr txBox="1"/>
+          <p:nvPr/>
+        </p:nvSpPr>
+        <p:spPr>
+          <a:xfrm>
+            <a:off x="548640" y="1463040"/>
+            <a:ext cx="11064240" cy="365760"/>
+          </a:xfrm>
+          <a:prstGeom prst="rect">
+            <a:avLst/>
+          </a:prstGeom>
+          <a:noFill/>
+        </p:spPr>
+        <p:txBody>
+          <a:bodyPr wrap="square" anchor="t" lIns="0" rIns="0" tIns="0" bIns="0">
+            <a:spAutoFit/>
+          </a:bodyPr>
+          <a:lstStyle/>
+          <a:p>
+            <a:pPr algn="l">
+              <a:lnSpc>
+                <a:spcPct val="108000"/>
+              </a:lnSpc>
+              <a:spcBef>
+                <a:spcPts val="0"/>
+              </a:spcBef>
+              <a:spcAft>
+                <a:spcPts val="600"/>
+              </a:spcAft>
+            </a:pPr>
+            <a:r>
+              <a:rPr sz="1350" b="0" i="1">
+                <a:solidFill>
+                  <a:srgbClr val="66717F"/>
+                </a:solidFill>
+                <a:latin typeface="Calibri"/>
+              </a:rPr>
+              <a:t>One canvas per group — pick the single Start with the most value and fill it in before you leave the room.</a:t>
+            </a:r>
+          </a:p>
+        </p:txBody>
+      </p:sp>
+      <p:sp>
+        <p:nvSpPr>
+          <p:cNvPr id="7" name="Rectangle 6"/>
+          <p:cNvSpPr/>
+          <p:nvPr/>
+        </p:nvSpPr>
+        <p:spPr>
+          <a:xfrm>
+            <a:off x="548640" y="1965960"/>
+            <a:ext cx="11091672" cy="868680"/>
+          </a:xfrm>
+          <a:prstGeom prst="rect">
+            <a:avLst/>
+          </a:prstGeom>
+          <a:solidFill>
+            <a:srgbClr val="F4F6F9"/>
+          </a:solidFill>
+          <a:ln w="9525">
+            <a:solidFill>
+              <a:srgbClr val="4A4BD6"/>
+            </a:solidFill>
+          </a:ln>
+          <a:effectLst/>
+        </p:spPr>
+        <p:style>
+          <a:lnRef idx="1">
+            <a:schemeClr val="accent1"/>
+          </a:lnRef>
+          <a:fillRef idx="3">
+            <a:schemeClr val="accent1"/>
+          </a:fillRef>
+          <a:effectRef idx="2">
+            <a:schemeClr val="accent1"/>
+          </a:effectRef>
+          <a:fontRef idx="minor">
+            <a:schemeClr val="lt1"/>
+          </a:fontRef>
+        </p:style>
+        <p:txBody>
+          <a:bodyPr rtlCol="0" anchor="ctr"/>
+          <a:lstStyle/>
+          <a:p>
+            <a:pPr algn="ctr"/>
+          </a:p>
+        </p:txBody>
+      </p:sp>
+      <p:sp>
+        <p:nvSpPr>
+          <p:cNvPr id="8" name="Rectangle 7"/>
+          <p:cNvSpPr/>
+          <p:nvPr/>
+        </p:nvSpPr>
+        <p:spPr>
+          <a:xfrm>
+            <a:off x="548640" y="1965960"/>
+            <a:ext cx="11091672" cy="82296"/>
+          </a:xfrm>
+          <a:prstGeom prst="rect">
+            <a:avLst/>
+          </a:prstGeom>
+          <a:solidFill>
+            <a:srgbClr val="4A4BD6"/>
+          </a:solidFill>
+          <a:ln>
+            <a:noFill/>
+          </a:ln>
+          <a:effectLst/>
+        </p:spPr>
+        <p:style>
+          <a:lnRef idx="1">
+            <a:schemeClr val="accent1"/>
+          </a:lnRef>
+          <a:fillRef idx="3">
+            <a:schemeClr val="accent1"/>
+          </a:fillRef>
+          <a:effectRef idx="2">
+            <a:schemeClr val="accent1"/>
+          </a:effectRef>
+          <a:fontRef idx="minor">
+            <a:schemeClr val="lt1"/>
+          </a:fontRef>
+        </p:style>
+        <p:txBody>
+          <a:bodyPr rtlCol="0" anchor="ctr"/>
+          <a:lstStyle/>
+          <a:p>
+            <a:pPr algn="ctr"/>
+          </a:p>
+        </p:txBody>
+      </p:sp>
+      <p:sp>
+        <p:nvSpPr>
+          <p:cNvPr id="9" name="TextBox 8"/>
+          <p:cNvSpPr txBox="1"/>
+          <p:nvPr/>
+        </p:nvSpPr>
+        <p:spPr>
+          <a:xfrm>
+            <a:off x="777240" y="2121408"/>
+            <a:ext cx="10607040" cy="320040"/>
+          </a:xfrm>
+          <a:prstGeom prst="rect">
+            <a:avLst/>
+          </a:prstGeom>
+          <a:noFill/>
+        </p:spPr>
+        <p:txBody>
+          <a:bodyPr wrap="square" anchor="t" lIns="0" rIns="0" tIns="0" bIns="0">
+            <a:spAutoFit/>
+          </a:bodyPr>
+          <a:lstStyle/>
+          <a:p>
+            <a:pPr algn="l">
+              <a:lnSpc>
+                <a:spcPct val="108000"/>
+              </a:lnSpc>
+              <a:spcBef>
+                <a:spcPts val="0"/>
+              </a:spcBef>
+              <a:spcAft>
+                <a:spcPts val="600"/>
+              </a:spcAft>
+            </a:pPr>
+            <a:r>
+              <a:rPr sz="1200" b="1" i="0">
+                <a:solidFill>
+                  <a:srgbClr val="4A4BD6"/>
+                </a:solidFill>
+                <a:latin typeface="Consolas"/>
+              </a:rPr>
+              <a:t>THE ONE START</a:t>
+            </a:r>
+          </a:p>
+        </p:txBody>
+      </p:sp>
+      <p:sp>
+        <p:nvSpPr>
+          <p:cNvPr id="10" name="TextBox 9"/>
+          <p:cNvSpPr txBox="1"/>
+          <p:nvPr/>
+        </p:nvSpPr>
+        <p:spPr>
+          <a:xfrm>
+            <a:off x="777240" y="2414016"/>
+            <a:ext cx="10607040" cy="320040"/>
+          </a:xfrm>
+          <a:prstGeom prst="rect">
+            <a:avLst/>
+          </a:prstGeom>
+          <a:noFill/>
+        </p:spPr>
+        <p:txBody>
+          <a:bodyPr wrap="square" anchor="t" lIns="0" rIns="0" tIns="0" bIns="0">
+            <a:spAutoFit/>
+          </a:bodyPr>
+          <a:lstStyle/>
+          <a:p>
+            <a:pPr algn="l">
+              <a:lnSpc>
+                <a:spcPct val="108000"/>
+              </a:lnSpc>
+              <a:spcBef>
+                <a:spcPts val="0"/>
+              </a:spcBef>
+              <a:spcAft>
+                <a:spcPts val="600"/>
+              </a:spcAft>
+            </a:pPr>
+            <a:r>
+              <a:rPr sz="1200" b="0" i="1">
+                <a:solidFill>
+                  <a:srgbClr val="66717F"/>
+                </a:solidFill>
+                <a:latin typeface="Calibri"/>
+              </a:rPr>
+              <a:t>the change this group commits to</a:t>
+            </a:r>
+          </a:p>
+        </p:txBody>
+      </p:sp>
+      <p:sp>
+        <p:nvSpPr>
+          <p:cNvPr id="11" name="Rectangle 10"/>
+          <p:cNvSpPr/>
+          <p:nvPr/>
+        </p:nvSpPr>
+        <p:spPr>
+          <a:xfrm>
+            <a:off x="548640" y="3063240"/>
+            <a:ext cx="3291840" cy="1417320"/>
+          </a:xfrm>
+          <a:prstGeom prst="rect">
+            <a:avLst/>
+          </a:prstGeom>
+          <a:solidFill>
+            <a:srgbClr val="F4F6F9"/>
+          </a:solidFill>
+          <a:ln w="9525">
+            <a:solidFill>
+              <a:srgbClr val="D8DEE6"/>
+            </a:solidFill>
+          </a:ln>
+          <a:effectLst/>
+        </p:spPr>
+        <p:style>
+          <a:lnRef idx="1">
+            <a:schemeClr val="accent1"/>
+          </a:lnRef>
+          <a:fillRef idx="3">
+            <a:schemeClr val="accent1"/>
+          </a:fillRef>
+          <a:effectRef idx="2">
+            <a:schemeClr val="accent1"/>
+          </a:effectRef>
+          <a:fontRef idx="minor">
+            <a:schemeClr val="lt1"/>
+          </a:fontRef>
+        </p:style>
+        <p:txBody>
+          <a:bodyPr rtlCol="0" anchor="ctr"/>
+          <a:lstStyle/>
+          <a:p>
+            <a:pPr algn="ctr"/>
+          </a:p>
+        </p:txBody>
+      </p:sp>
+      <p:sp>
+        <p:nvSpPr>
+          <p:cNvPr id="12" name="Rectangle 11"/>
+          <p:cNvSpPr/>
+          <p:nvPr/>
+        </p:nvSpPr>
+        <p:spPr>
+          <a:xfrm>
+            <a:off x="548640" y="3063240"/>
+            <a:ext cx="3291840" cy="73152"/>
+          </a:xfrm>
+          <a:prstGeom prst="rect">
+            <a:avLst/>
+          </a:prstGeom>
+          <a:solidFill>
+            <a:srgbClr val="4A4BD6"/>
+          </a:solidFill>
+          <a:ln>
+            <a:noFill/>
+          </a:ln>
+          <a:effectLst/>
+        </p:spPr>
+        <p:style>
+          <a:lnRef idx="1">
+            <a:schemeClr val="accent1"/>
+          </a:lnRef>
+          <a:fillRef idx="3">
+            <a:schemeClr val="accent1"/>
+          </a:fillRef>
+          <a:effectRef idx="2">
+            <a:schemeClr val="accent1"/>
+          </a:effectRef>
+          <a:fontRef idx="minor">
+            <a:schemeClr val="lt1"/>
+          </a:fontRef>
+        </p:style>
+        <p:txBody>
+          <a:bodyPr rtlCol="0" anchor="ctr"/>
+          <a:lstStyle/>
+          <a:p>
+            <a:pPr algn="ctr"/>
+          </a:p>
+        </p:txBody>
+      </p:sp>
+      <p:sp>
+        <p:nvSpPr>
+          <p:cNvPr id="13" name="TextBox 12"/>
+          <p:cNvSpPr txBox="1"/>
+          <p:nvPr/>
+        </p:nvSpPr>
+        <p:spPr>
+          <a:xfrm>
+            <a:off x="749808" y="3246120"/>
+            <a:ext cx="2926080" cy="457200"/>
+          </a:xfrm>
+          <a:prstGeom prst="rect">
+            <a:avLst/>
+          </a:prstGeom>
+          <a:noFill/>
+        </p:spPr>
+        <p:txBody>
+          <a:bodyPr wrap="square" anchor="t" lIns="0" rIns="0" tIns="0" bIns="0">
+            <a:spAutoFit/>
+          </a:bodyPr>
+          <a:lstStyle/>
+          <a:p>
+            <a:pPr algn="l">
+              <a:lnSpc>
+                <a:spcPct val="108000"/>
+              </a:lnSpc>
+              <a:spcBef>
+                <a:spcPts val="0"/>
+              </a:spcBef>
+              <a:spcAft>
+                <a:spcPts val="600"/>
+              </a:spcAft>
+            </a:pPr>
+            <a:r>
+              <a:rPr sz="1300" b="1" i="0">
+                <a:solidFill>
+                  <a:srgbClr val="111820"/>
+                </a:solidFill>
+                <a:latin typeface="Calibri"/>
+              </a:rPr>
+              <a:t>Owner</a:t>
+            </a:r>
+          </a:p>
+        </p:txBody>
+      </p:sp>
+      <p:sp>
+        <p:nvSpPr>
+          <p:cNvPr id="14" name="TextBox 13"/>
+          <p:cNvSpPr txBox="1"/>
+          <p:nvPr/>
+        </p:nvSpPr>
+        <p:spPr>
+          <a:xfrm>
+            <a:off x="749808" y="3666744"/>
+            <a:ext cx="2926080" cy="731520"/>
+          </a:xfrm>
+          <a:prstGeom prst="rect">
+            <a:avLst/>
+          </a:prstGeom>
+          <a:noFill/>
+        </p:spPr>
+        <p:txBody>
+          <a:bodyPr wrap="square" anchor="t" lIns="0" rIns="0" tIns="0" bIns="0">
+            <a:spAutoFit/>
+          </a:bodyPr>
+          <a:lstStyle/>
+          <a:p>
+            <a:pPr algn="l">
+              <a:lnSpc>
+                <a:spcPct val="108000"/>
+              </a:lnSpc>
+              <a:spcBef>
+                <a:spcPts val="0"/>
+              </a:spcBef>
+              <a:spcAft>
+                <a:spcPts val="600"/>
+              </a:spcAft>
+            </a:pPr>
+            <a:r>
+              <a:rPr sz="1150" b="0" i="1">
+                <a:solidFill>
+                  <a:srgbClr val="66717F"/>
+                </a:solidFill>
+                <a:latin typeface="Calibri"/>
+              </a:rPr>
+              <a:t>the single name accountable</a:t>
+            </a:r>
+          </a:p>
+        </p:txBody>
+      </p:sp>
+      <p:sp>
+        <p:nvSpPr>
+          <p:cNvPr id="15" name="Rectangle 14"/>
+          <p:cNvSpPr/>
+          <p:nvPr/>
+        </p:nvSpPr>
+        <p:spPr>
+          <a:xfrm>
+            <a:off x="4480560" y="3063240"/>
+            <a:ext cx="3291840" cy="1417320"/>
+          </a:xfrm>
+          <a:prstGeom prst="rect">
+            <a:avLst/>
+          </a:prstGeom>
+          <a:solidFill>
+            <a:srgbClr val="F4F6F9"/>
+          </a:solidFill>
+          <a:ln w="9525">
+            <a:solidFill>
+              <a:srgbClr val="D8DEE6"/>
+            </a:solidFill>
+          </a:ln>
+          <a:effectLst/>
+        </p:spPr>
+        <p:style>
+          <a:lnRef idx="1">
+            <a:schemeClr val="accent1"/>
+          </a:lnRef>
+          <a:fillRef idx="3">
+            <a:schemeClr val="accent1"/>
+          </a:fillRef>
+          <a:effectRef idx="2">
+            <a:schemeClr val="accent1"/>
+          </a:effectRef>
+          <a:fontRef idx="minor">
+            <a:schemeClr val="lt1"/>
+          </a:fontRef>
+        </p:style>
+        <p:txBody>
+          <a:bodyPr rtlCol="0" anchor="ctr"/>
+          <a:lstStyle/>
+          <a:p>
+            <a:pPr algn="ctr"/>
+          </a:p>
+        </p:txBody>
+      </p:sp>
+      <p:sp>
+        <p:nvSpPr>
+          <p:cNvPr id="16" name="Rectangle 15"/>
+          <p:cNvSpPr/>
+          <p:nvPr/>
+        </p:nvSpPr>
+        <p:spPr>
+          <a:xfrm>
+            <a:off x="4480560" y="3063240"/>
+            <a:ext cx="3291840" cy="73152"/>
+          </a:xfrm>
+          <a:prstGeom prst="rect">
+            <a:avLst/>
+          </a:prstGeom>
+          <a:solidFill>
+            <a:srgbClr val="4A4BD6"/>
+          </a:solidFill>
+          <a:ln>
+            <a:noFill/>
+          </a:ln>
+          <a:effectLst/>
+        </p:spPr>
+        <p:style>
+          <a:lnRef idx="1">
+            <a:schemeClr val="accent1"/>
+          </a:lnRef>
+          <a:fillRef idx="3">
+            <a:schemeClr val="accent1"/>
+          </a:fillRef>
+          <a:effectRef idx="2">
+            <a:schemeClr val="accent1"/>
+          </a:effectRef>
+          <a:fontRef idx="minor">
+            <a:schemeClr val="lt1"/>
+          </a:fontRef>
+        </p:style>
+        <p:txBody>
+          <a:bodyPr rtlCol="0" anchor="ctr"/>
+          <a:lstStyle/>
+          <a:p>
+            <a:pPr algn="ctr"/>
+          </a:p>
+        </p:txBody>
+      </p:sp>
+      <p:sp>
+        <p:nvSpPr>
+          <p:cNvPr id="17" name="TextBox 16"/>
+          <p:cNvSpPr txBox="1"/>
+          <p:nvPr/>
+        </p:nvSpPr>
+        <p:spPr>
+          <a:xfrm>
+            <a:off x="4681728" y="3246120"/>
+            <a:ext cx="2926080" cy="457200"/>
+          </a:xfrm>
+          <a:prstGeom prst="rect">
+            <a:avLst/>
+          </a:prstGeom>
+          <a:noFill/>
+        </p:spPr>
+        <p:txBody>
+          <a:bodyPr wrap="square" anchor="t" lIns="0" rIns="0" tIns="0" bIns="0">
+            <a:spAutoFit/>
+          </a:bodyPr>
+          <a:lstStyle/>
+          <a:p>
+            <a:pPr algn="l">
+              <a:lnSpc>
+                <a:spcPct val="108000"/>
+              </a:lnSpc>
+              <a:spcBef>
+                <a:spcPts val="0"/>
+              </a:spcBef>
+              <a:spcAft>
+                <a:spcPts val="600"/>
+              </a:spcAft>
+            </a:pPr>
+            <a:r>
+              <a:rPr sz="1300" b="1" i="0">
+                <a:solidFill>
+                  <a:srgbClr val="111820"/>
+                </a:solidFill>
+                <a:latin typeface="Calibri"/>
+              </a:rPr>
+              <a:t>First step — 30 days</a:t>
+            </a:r>
+          </a:p>
+        </p:txBody>
+      </p:sp>
+      <p:sp>
+        <p:nvSpPr>
+          <p:cNvPr id="18" name="TextBox 17"/>
+          <p:cNvSpPr txBox="1"/>
+          <p:nvPr/>
+        </p:nvSpPr>
+        <p:spPr>
+          <a:xfrm>
+            <a:off x="4681728" y="3666744"/>
+            <a:ext cx="2926080" cy="731520"/>
+          </a:xfrm>
+          <a:prstGeom prst="rect">
+            <a:avLst/>
+          </a:prstGeom>
+          <a:noFill/>
+        </p:spPr>
+        <p:txBody>
+          <a:bodyPr wrap="square" anchor="t" lIns="0" rIns="0" tIns="0" bIns="0">
+            <a:spAutoFit/>
+          </a:bodyPr>
+          <a:lstStyle/>
+          <a:p>
+            <a:pPr algn="l">
+              <a:lnSpc>
+                <a:spcPct val="108000"/>
+              </a:lnSpc>
+              <a:spcBef>
+                <a:spcPts val="0"/>
+              </a:spcBef>
+              <a:spcAft>
+                <a:spcPts val="600"/>
+              </a:spcAft>
+            </a:pPr>
+            <a:r>
+              <a:rPr sz="1150" b="0" i="1">
+                <a:solidFill>
+                  <a:srgbClr val="66717F"/>
+                </a:solidFill>
+                <a:latin typeface="Calibri"/>
+              </a:rPr>
+              <a:t>the concrete first move</a:t>
+            </a:r>
+          </a:p>
+        </p:txBody>
+      </p:sp>
+      <p:sp>
+        <p:nvSpPr>
+          <p:cNvPr id="19" name="Rectangle 18"/>
+          <p:cNvSpPr/>
+          <p:nvPr/>
+        </p:nvSpPr>
+        <p:spPr>
+          <a:xfrm>
+            <a:off x="8412480" y="3063240"/>
+            <a:ext cx="3291840" cy="1417320"/>
+          </a:xfrm>
+          <a:prstGeom prst="rect">
+            <a:avLst/>
+          </a:prstGeom>
+          <a:solidFill>
+            <a:srgbClr val="F4F6F9"/>
+          </a:solidFill>
+          <a:ln w="9525">
+            <a:solidFill>
+              <a:srgbClr val="D8DEE6"/>
+            </a:solidFill>
+          </a:ln>
+          <a:effectLst/>
+        </p:spPr>
+        <p:style>
+          <a:lnRef idx="1">
+            <a:schemeClr val="accent1"/>
+          </a:lnRef>
+          <a:fillRef idx="3">
+            <a:schemeClr val="accent1"/>
+          </a:fillRef>
+          <a:effectRef idx="2">
+            <a:schemeClr val="accent1"/>
+          </a:effectRef>
+          <a:fontRef idx="minor">
+            <a:schemeClr val="lt1"/>
+          </a:fontRef>
+        </p:style>
+        <p:txBody>
+          <a:bodyPr rtlCol="0" anchor="ctr"/>
+          <a:lstStyle/>
+          <a:p>
+            <a:pPr algn="ctr"/>
+          </a:p>
+        </p:txBody>
+      </p:sp>
+      <p:sp>
+        <p:nvSpPr>
+          <p:cNvPr id="20" name="Rectangle 19"/>
+          <p:cNvSpPr/>
+          <p:nvPr/>
+        </p:nvSpPr>
+        <p:spPr>
+          <a:xfrm>
+            <a:off x="8412480" y="3063240"/>
+            <a:ext cx="3291840" cy="73152"/>
+          </a:xfrm>
+          <a:prstGeom prst="rect">
+            <a:avLst/>
+          </a:prstGeom>
+          <a:solidFill>
+            <a:srgbClr val="4A4BD6"/>
+          </a:solidFill>
+          <a:ln>
+            <a:noFill/>
+          </a:ln>
+          <a:effectLst/>
+        </p:spPr>
+        <p:style>
+          <a:lnRef idx="1">
+            <a:schemeClr val="accent1"/>
+          </a:lnRef>
+          <a:fillRef idx="3">
+            <a:schemeClr val="accent1"/>
+          </a:fillRef>
+          <a:effectRef idx="2">
+            <a:schemeClr val="accent1"/>
+          </a:effectRef>
+          <a:fontRef idx="minor">
+            <a:schemeClr val="lt1"/>
+          </a:fontRef>
+        </p:style>
+        <p:txBody>
+          <a:bodyPr rtlCol="0" anchor="ctr"/>
+          <a:lstStyle/>
+          <a:p>
+            <a:pPr algn="ctr"/>
+          </a:p>
+        </p:txBody>
+      </p:sp>
+      <p:sp>
+        <p:nvSpPr>
+          <p:cNvPr id="21" name="TextBox 20"/>
+          <p:cNvSpPr txBox="1"/>
+          <p:nvPr/>
+        </p:nvSpPr>
+        <p:spPr>
+          <a:xfrm>
+            <a:off x="8613648" y="3246120"/>
+            <a:ext cx="2926080" cy="457200"/>
+          </a:xfrm>
+          <a:prstGeom prst="rect">
+            <a:avLst/>
+          </a:prstGeom>
+          <a:noFill/>
+        </p:spPr>
+        <p:txBody>
+          <a:bodyPr wrap="square" anchor="t" lIns="0" rIns="0" tIns="0" bIns="0">
+            <a:spAutoFit/>
+          </a:bodyPr>
+          <a:lstStyle/>
+          <a:p>
+            <a:pPr algn="l">
+              <a:lnSpc>
+                <a:spcPct val="108000"/>
+              </a:lnSpc>
+              <a:spcBef>
+                <a:spcPts val="0"/>
+              </a:spcBef>
+              <a:spcAft>
+                <a:spcPts val="600"/>
+              </a:spcAft>
+            </a:pPr>
+            <a:r>
+              <a:rPr sz="1300" b="1" i="0">
+                <a:solidFill>
+                  <a:srgbClr val="111820"/>
+                </a:solidFill>
+                <a:latin typeface="Calibri"/>
+              </a:rPr>
+              <a:t>How we'll know it worked</a:t>
+            </a:r>
+          </a:p>
+        </p:txBody>
+      </p:sp>
+      <p:sp>
+        <p:nvSpPr>
+          <p:cNvPr id="22" name="TextBox 21"/>
+          <p:cNvSpPr txBox="1"/>
+          <p:nvPr/>
+        </p:nvSpPr>
+        <p:spPr>
+          <a:xfrm>
+            <a:off x="8613648" y="3666744"/>
+            <a:ext cx="2926080" cy="731520"/>
+          </a:xfrm>
+          <a:prstGeom prst="rect">
+            <a:avLst/>
+          </a:prstGeom>
+          <a:noFill/>
+        </p:spPr>
+        <p:txBody>
+          <a:bodyPr wrap="square" anchor="t" lIns="0" rIns="0" tIns="0" bIns="0">
+            <a:spAutoFit/>
+          </a:bodyPr>
+          <a:lstStyle/>
+          <a:p>
+            <a:pPr algn="l">
+              <a:lnSpc>
+                <a:spcPct val="108000"/>
+              </a:lnSpc>
+              <a:spcBef>
+                <a:spcPts val="0"/>
+              </a:spcBef>
+              <a:spcAft>
+                <a:spcPts val="600"/>
+              </a:spcAft>
+            </a:pPr>
+            <a:r>
+              <a:rPr sz="1150" b="0" i="1">
+                <a:solidFill>
+                  <a:srgbClr val="66717F"/>
+                </a:solidFill>
+                <a:latin typeface="Calibri"/>
+              </a:rPr>
+              <a:t>the signal / measure</a:t>
+            </a:r>
+          </a:p>
+        </p:txBody>
+      </p:sp>
+      <p:sp>
+        <p:nvSpPr>
+          <p:cNvPr id="23" name="Rectangle 22"/>
+          <p:cNvSpPr/>
+          <p:nvPr/>
+        </p:nvSpPr>
+        <p:spPr>
+          <a:xfrm>
+            <a:off x="548640" y="4663440"/>
+            <a:ext cx="3291840" cy="1417320"/>
+          </a:xfrm>
+          <a:prstGeom prst="rect">
+            <a:avLst/>
+          </a:prstGeom>
+          <a:solidFill>
+            <a:srgbClr val="F4F6F9"/>
+          </a:solidFill>
+          <a:ln w="9525">
+            <a:solidFill>
+              <a:srgbClr val="D8DEE6"/>
+            </a:solidFill>
+          </a:ln>
+          <a:effectLst/>
+        </p:spPr>
+        <p:style>
+          <a:lnRef idx="1">
+            <a:schemeClr val="accent1"/>
+          </a:lnRef>
+          <a:fillRef idx="3">
+            <a:schemeClr val="accent1"/>
+          </a:fillRef>
+          <a:effectRef idx="2">
+            <a:schemeClr val="accent1"/>
+          </a:effectRef>
+          <a:fontRef idx="minor">
+            <a:schemeClr val="lt1"/>
+          </a:fontRef>
+        </p:style>
+        <p:txBody>
+          <a:bodyPr rtlCol="0" anchor="ctr"/>
+          <a:lstStyle/>
+          <a:p>
+            <a:pPr algn="ctr"/>
+          </a:p>
+        </p:txBody>
+      </p:sp>
+      <p:sp>
+        <p:nvSpPr>
+          <p:cNvPr id="24" name="Rectangle 23"/>
+          <p:cNvSpPr/>
+          <p:nvPr/>
+        </p:nvSpPr>
+        <p:spPr>
+          <a:xfrm>
+            <a:off x="548640" y="4663440"/>
+            <a:ext cx="3291840" cy="73152"/>
+          </a:xfrm>
+          <a:prstGeom prst="rect">
+            <a:avLst/>
+          </a:prstGeom>
+          <a:solidFill>
+            <a:srgbClr val="4A4BD6"/>
+          </a:solidFill>
+          <a:ln>
+            <a:noFill/>
+          </a:ln>
+          <a:effectLst/>
+        </p:spPr>
+        <p:style>
+          <a:lnRef idx="1">
+            <a:schemeClr val="accent1"/>
+          </a:lnRef>
+          <a:fillRef idx="3">
+            <a:schemeClr val="accent1"/>
+          </a:fillRef>
+          <a:effectRef idx="2">
+            <a:schemeClr val="accent1"/>
+          </a:effectRef>
+          <a:fontRef idx="minor">
+            <a:schemeClr val="lt1"/>
+          </a:fontRef>
+        </p:style>
+        <p:txBody>
+          <a:bodyPr rtlCol="0" anchor="ctr"/>
+          <a:lstStyle/>
+          <a:p>
+            <a:pPr algn="ctr"/>
+          </a:p>
+        </p:txBody>
+      </p:sp>
+      <p:sp>
+        <p:nvSpPr>
+          <p:cNvPr id="25" name="TextBox 24"/>
+          <p:cNvSpPr txBox="1"/>
+          <p:nvPr/>
+        </p:nvSpPr>
+        <p:spPr>
+          <a:xfrm>
+            <a:off x="749808" y="4846320"/>
+            <a:ext cx="2926080" cy="457200"/>
+          </a:xfrm>
+          <a:prstGeom prst="rect">
+            <a:avLst/>
+          </a:prstGeom>
+          <a:noFill/>
+        </p:spPr>
+        <p:txBody>
+          <a:bodyPr wrap="square" anchor="t" lIns="0" rIns="0" tIns="0" bIns="0">
+            <a:spAutoFit/>
+          </a:bodyPr>
+          <a:lstStyle/>
+          <a:p>
+            <a:pPr algn="l">
+              <a:lnSpc>
+                <a:spcPct val="108000"/>
+              </a:lnSpc>
+              <a:spcBef>
+                <a:spcPts val="0"/>
+              </a:spcBef>
+              <a:spcAft>
+                <a:spcPts val="600"/>
+              </a:spcAft>
+            </a:pPr>
+            <a:r>
+              <a:rPr sz="1300" b="1" i="0">
+                <a:solidFill>
+                  <a:srgbClr val="111820"/>
+                </a:solidFill>
+                <a:latin typeface="Calibri"/>
+              </a:rPr>
+              <a:t>What it displaces (if any)</a:t>
+            </a:r>
+          </a:p>
+        </p:txBody>
+      </p:sp>
+      <p:sp>
+        <p:nvSpPr>
+          <p:cNvPr id="26" name="TextBox 25"/>
+          <p:cNvSpPr txBox="1"/>
+          <p:nvPr/>
+        </p:nvSpPr>
+        <p:spPr>
+          <a:xfrm>
+            <a:off x="749808" y="5266944"/>
+            <a:ext cx="2926080" cy="731520"/>
+          </a:xfrm>
+          <a:prstGeom prst="rect">
+            <a:avLst/>
+          </a:prstGeom>
+          <a:noFill/>
+        </p:spPr>
+        <p:txBody>
+          <a:bodyPr wrap="square" anchor="t" lIns="0" rIns="0" tIns="0" bIns="0">
+            <a:spAutoFit/>
+          </a:bodyPr>
+          <a:lstStyle/>
+          <a:p>
+            <a:pPr algn="l">
+              <a:lnSpc>
+                <a:spcPct val="108000"/>
+              </a:lnSpc>
+              <a:spcBef>
+                <a:spcPts val="0"/>
+              </a:spcBef>
+              <a:spcAft>
+                <a:spcPts val="600"/>
+              </a:spcAft>
+            </a:pPr>
+            <a:r>
+              <a:rPr sz="1150" b="0" i="1">
+                <a:solidFill>
+                  <a:srgbClr val="66717F"/>
+                </a:solidFill>
+                <a:latin typeface="Calibri"/>
+              </a:rPr>
+              <a:t>only if needed — attention is scarce</a:t>
+            </a:r>
+          </a:p>
+        </p:txBody>
+      </p:sp>
+      <p:sp>
+        <p:nvSpPr>
+          <p:cNvPr id="27" name="Rectangle 26"/>
+          <p:cNvSpPr/>
+          <p:nvPr/>
+        </p:nvSpPr>
+        <p:spPr>
+          <a:xfrm>
+            <a:off x="4480560" y="4663440"/>
+            <a:ext cx="3291840" cy="1417320"/>
+          </a:xfrm>
+          <a:prstGeom prst="rect">
+            <a:avLst/>
+          </a:prstGeom>
+          <a:solidFill>
+            <a:srgbClr val="F4F6F9"/>
+          </a:solidFill>
+          <a:ln w="9525">
+            <a:solidFill>
+              <a:srgbClr val="D8DEE6"/>
+            </a:solidFill>
+          </a:ln>
+          <a:effectLst/>
+        </p:spPr>
+        <p:style>
+          <a:lnRef idx="1">
+            <a:schemeClr val="accent1"/>
+          </a:lnRef>
+          <a:fillRef idx="3">
+            <a:schemeClr val="accent1"/>
+          </a:fillRef>
+          <a:effectRef idx="2">
+            <a:schemeClr val="accent1"/>
+          </a:effectRef>
+          <a:fontRef idx="minor">
+            <a:schemeClr val="lt1"/>
+          </a:fontRef>
+        </p:style>
+        <p:txBody>
+          <a:bodyPr rtlCol="0" anchor="ctr"/>
+          <a:lstStyle/>
+          <a:p>
+            <a:pPr algn="ctr"/>
+          </a:p>
+        </p:txBody>
+      </p:sp>
+      <p:sp>
+        <p:nvSpPr>
+          <p:cNvPr id="28" name="Rectangle 27"/>
+          <p:cNvSpPr/>
+          <p:nvPr/>
+        </p:nvSpPr>
+        <p:spPr>
+          <a:xfrm>
+            <a:off x="4480560" y="4663440"/>
+            <a:ext cx="3291840" cy="73152"/>
+          </a:xfrm>
+          <a:prstGeom prst="rect">
+            <a:avLst/>
+          </a:prstGeom>
+          <a:solidFill>
+            <a:srgbClr val="4A4BD6"/>
+          </a:solidFill>
+          <a:ln>
+            <a:noFill/>
+          </a:ln>
+          <a:effectLst/>
+        </p:spPr>
+        <p:style>
+          <a:lnRef idx="1">
+            <a:schemeClr val="accent1"/>
+          </a:lnRef>
+          <a:fillRef idx="3">
+            <a:schemeClr val="accent1"/>
+          </a:fillRef>
+          <a:effectRef idx="2">
+            <a:schemeClr val="accent1"/>
+          </a:effectRef>
+          <a:fontRef idx="minor">
+            <a:schemeClr val="lt1"/>
+          </a:fontRef>
+        </p:style>
+        <p:txBody>
+          <a:bodyPr rtlCol="0" anchor="ctr"/>
+          <a:lstStyle/>
+          <a:p>
+            <a:pPr algn="ctr"/>
+          </a:p>
+        </p:txBody>
+      </p:sp>
+      <p:sp>
+        <p:nvSpPr>
+          <p:cNvPr id="29" name="TextBox 28"/>
+          <p:cNvSpPr txBox="1"/>
+          <p:nvPr/>
+        </p:nvSpPr>
+        <p:spPr>
+          <a:xfrm>
+            <a:off x="4681728" y="4846320"/>
+            <a:ext cx="2926080" cy="457200"/>
+          </a:xfrm>
+          <a:prstGeom prst="rect">
+            <a:avLst/>
+          </a:prstGeom>
+          <a:noFill/>
+        </p:spPr>
+        <p:txBody>
+          <a:bodyPr wrap="square" anchor="t" lIns="0" rIns="0" tIns="0" bIns="0">
+            <a:spAutoFit/>
+          </a:bodyPr>
+          <a:lstStyle/>
+          <a:p>
+            <a:pPr algn="l">
+              <a:lnSpc>
+                <a:spcPct val="108000"/>
+              </a:lnSpc>
+              <a:spcBef>
+                <a:spcPts val="0"/>
+              </a:spcBef>
+              <a:spcAft>
+                <a:spcPts val="600"/>
+              </a:spcAft>
+            </a:pPr>
+            <a:r>
+              <a:rPr sz="1300" b="1" i="0">
+                <a:solidFill>
+                  <a:srgbClr val="111820"/>
+                </a:solidFill>
+                <a:latin typeface="Calibri"/>
+              </a:rPr>
+              <a:t>A model that helped</a:t>
+            </a:r>
+          </a:p>
+        </p:txBody>
+      </p:sp>
+      <p:sp>
+        <p:nvSpPr>
+          <p:cNvPr id="30" name="TextBox 29"/>
+          <p:cNvSpPr txBox="1"/>
+          <p:nvPr/>
+        </p:nvSpPr>
+        <p:spPr>
+          <a:xfrm>
+            <a:off x="4681728" y="5266944"/>
+            <a:ext cx="2926080" cy="731520"/>
+          </a:xfrm>
+          <a:prstGeom prst="rect">
+            <a:avLst/>
+          </a:prstGeom>
+          <a:noFill/>
+        </p:spPr>
+        <p:txBody>
+          <a:bodyPr wrap="square" anchor="t" lIns="0" rIns="0" tIns="0" bIns="0">
+            <a:spAutoFit/>
+          </a:bodyPr>
+          <a:lstStyle/>
+          <a:p>
+            <a:pPr algn="l">
+              <a:lnSpc>
+                <a:spcPct val="108000"/>
+              </a:lnSpc>
+              <a:spcBef>
+                <a:spcPts val="0"/>
+              </a:spcBef>
+              <a:spcAft>
+                <a:spcPts val="600"/>
+              </a:spcAft>
+            </a:pPr>
+            <a:r>
+              <a:rPr sz="1150" b="0" i="1">
+                <a:solidFill>
+                  <a:srgbClr val="66717F"/>
+                </a:solidFill>
+                <a:latin typeface="Calibri"/>
+              </a:rPr>
+              <a:t>Type 1/2, inversion, second-order…</a:t>
+            </a:r>
+          </a:p>
+        </p:txBody>
+      </p:sp>
+      <p:sp>
+        <p:nvSpPr>
+          <p:cNvPr id="31" name="Rectangle 30"/>
+          <p:cNvSpPr/>
+          <p:nvPr/>
+        </p:nvSpPr>
+        <p:spPr>
+          <a:xfrm>
+            <a:off x="548640" y="6355080"/>
+            <a:ext cx="11091672" cy="9144"/>
+          </a:xfrm>
+          <a:prstGeom prst="rect">
+            <a:avLst/>
+          </a:prstGeom>
+          <a:solidFill>
+            <a:srgbClr val="FFFFFF"/>
+          </a:solidFill>
+          <a:ln>
+            <a:noFill/>
+          </a:ln>
+          <a:effectLst/>
+        </p:spPr>
+        <p:style>
+          <a:lnRef idx="1">
+            <a:schemeClr val="accent1"/>
+          </a:lnRef>
+          <a:fillRef idx="3">
+            <a:schemeClr val="accent1"/>
+          </a:fillRef>
+          <a:effectRef idx="2">
+            <a:schemeClr val="accent1"/>
+          </a:effectRef>
+          <a:fontRef idx="minor">
+            <a:schemeClr val="lt1"/>
+          </a:fontRef>
+        </p:style>
+        <p:txBody>
+          <a:bodyPr rtlCol="0" anchor="ctr"/>
+          <a:lstStyle/>
+          <a:p>
+            <a:pPr algn="ctr"/>
+          </a:p>
+        </p:txBody>
+      </p:sp>
+      <p:sp>
+        <p:nvSpPr>
+          <p:cNvPr id="32" name="TextBox 31"/>
+          <p:cNvSpPr txBox="1"/>
+          <p:nvPr/>
+        </p:nvSpPr>
+        <p:spPr>
+          <a:xfrm>
+            <a:off x="502920" y="6419088"/>
+            <a:ext cx="10058400" cy="274320"/>
+          </a:xfrm>
+          <a:prstGeom prst="rect">
+            <a:avLst/>
+          </a:prstGeom>
+          <a:noFill/>
+        </p:spPr>
+        <p:txBody>
+          <a:bodyPr wrap="square" anchor="t" lIns="0" rIns="0" tIns="0" bIns="0">
+            <a:spAutoFit/>
+          </a:bodyPr>
+          <a:lstStyle/>
+          <a:p>
+            <a:pPr algn="l">
+              <a:lnSpc>
+                <a:spcPct val="108000"/>
+              </a:lnSpc>
+              <a:spcBef>
+                <a:spcPts val="0"/>
+              </a:spcBef>
+              <a:spcAft>
+                <a:spcPts val="600"/>
+              </a:spcAft>
+            </a:pPr>
+            <a:r>
+              <a:rPr sz="900" b="0" i="0">
+                <a:solidFill>
+                  <a:srgbClr val="66717F"/>
+                </a:solidFill>
+                <a:latin typeface="Consolas"/>
+              </a:rPr>
+              <a:t>So What? · Power Development Team Day 2 · the companion to “Reading the NEM”</a:t>
+            </a:r>
+          </a:p>
+        </p:txBody>
+      </p:sp>
+    </p:spTree>
+  </p:cSld>
+  <p:clrMapOvr>
+    <a:masterClrMapping/>
+  </p:clrMapOvr>
+</p:sld>
+</file>
+
+<file path=ppt/slides/slide19.xml><?xml version="1.0" encoding="utf-8"?>
+<p:sld xmlns:a="http://schemas.openxmlformats.org/drawingml/2006/main" xmlns:p="http://schemas.openxmlformats.org/presentationml/2006/main" xmlns:r="http://schemas.openxmlformats.org/officeDocument/2006/relationships">
+  <p:cSld>
+    <p:spTree>
+      <p:nvGrpSpPr>
+        <p:cNvPr id="1" name=""/>
+        <p:cNvGrpSpPr/>
+        <p:nvPr/>
+      </p:nvGrpSpPr>
+      <p:grpSpPr/>
+      <p:sp>
+        <p:nvSpPr>
+          <p:cNvPr id="2" name="Rectangle 1"/>
+          <p:cNvSpPr/>
+          <p:nvPr/>
+        </p:nvSpPr>
+        <p:spPr>
+          <a:xfrm>
+            <a:off x="0" y="0"/>
+            <a:ext cx="12191695" cy="6858000"/>
+          </a:xfrm>
+          <a:prstGeom prst="rect">
+            <a:avLst/>
+          </a:prstGeom>
+          <a:solidFill>
+            <a:srgbClr val="111820"/>
+          </a:solidFill>
+          <a:ln>
+            <a:noFill/>
+          </a:ln>
+          <a:effectLst/>
+        </p:spPr>
+        <p:style>
+          <a:lnRef idx="1">
+            <a:schemeClr val="accent1"/>
+          </a:lnRef>
+          <a:fillRef idx="3">
+            <a:schemeClr val="accent1"/>
+          </a:fillRef>
+          <a:effectRef idx="2">
+            <a:schemeClr val="accent1"/>
+          </a:effectRef>
+          <a:fontRef idx="minor">
+            <a:schemeClr val="lt1"/>
+          </a:fontRef>
+        </p:style>
+        <p:txBody>
+          <a:bodyPr rtlCol="0" anchor="ctr"/>
+          <a:lstStyle/>
+          <a:p>
+            <a:pPr algn="ctr"/>
+          </a:p>
+        </p:txBody>
+      </p:sp>
+      <p:sp>
+        <p:nvSpPr>
+          <p:cNvPr id="3" name="Rectangle 2"/>
+          <p:cNvSpPr/>
+          <p:nvPr/>
+        </p:nvSpPr>
+        <p:spPr>
+          <a:xfrm>
+            <a:off x="0" y="0"/>
+            <a:ext cx="12191695" cy="201168"/>
+          </a:xfrm>
+          <a:prstGeom prst="rect">
+            <a:avLst/>
+          </a:prstGeom>
+          <a:solidFill>
+            <a:srgbClr val="4A4BD6"/>
+          </a:solidFill>
+          <a:ln>
+            <a:noFill/>
+          </a:ln>
+          <a:effectLst/>
+        </p:spPr>
+        <p:style>
+          <a:lnRef idx="1">
+            <a:schemeClr val="accent1"/>
+          </a:lnRef>
+          <a:fillRef idx="3">
+            <a:schemeClr val="accent1"/>
+          </a:fillRef>
+          <a:effectRef idx="2">
+            <a:schemeClr val="accent1"/>
+          </a:effectRef>
+          <a:fontRef idx="minor">
+            <a:schemeClr val="lt1"/>
+          </a:fontRef>
+        </p:style>
+        <p:txBody>
+          <a:bodyPr rtlCol="0" anchor="ctr"/>
+          <a:lstStyle/>
+          <a:p>
+            <a:pPr algn="ctr"/>
+          </a:p>
+        </p:txBody>
+      </p:sp>
+      <p:sp>
+        <p:nvSpPr>
+          <p:cNvPr id="4" name="TextBox 3"/>
+          <p:cNvSpPr txBox="1"/>
+          <p:nvPr/>
+        </p:nvSpPr>
+        <p:spPr>
+          <a:xfrm>
+            <a:off x="822960" y="2194560"/>
+            <a:ext cx="10515600" cy="1097280"/>
+          </a:xfrm>
+          <a:prstGeom prst="rect">
+            <a:avLst/>
+          </a:prstGeom>
+          <a:noFill/>
+        </p:spPr>
+        <p:txBody>
+          <a:bodyPr wrap="square" anchor="t" lIns="0" rIns="0" tIns="0" bIns="0">
+            <a:spAutoFit/>
+          </a:bodyPr>
+          <a:lstStyle/>
+          <a:p>
+            <a:pPr algn="l">
+              <a:lnSpc>
+                <a:spcPct val="108000"/>
+              </a:lnSpc>
+              <a:spcBef>
+                <a:spcPts val="0"/>
+              </a:spcBef>
+              <a:spcAft>
+                <a:spcPts val="600"/>
+              </a:spcAft>
+            </a:pPr>
+            <a:r>
+              <a:rPr sz="3400" b="1" i="0">
+                <a:solidFill>
+                  <a:srgbClr val="FFFFFF"/>
+                </a:solidFill>
+                <a:latin typeface="Calibri"/>
+              </a:rPr>
+              <a:t>Leave with a decision, not a discussion</a:t>
+            </a:r>
+          </a:p>
+        </p:txBody>
+      </p:sp>
+      <p:sp>
+        <p:nvSpPr>
+          <p:cNvPr id="5" name="TextBox 4"/>
+          <p:cNvSpPr txBox="1"/>
+          <p:nvPr/>
+        </p:nvSpPr>
+        <p:spPr>
+          <a:xfrm>
+            <a:off x="822960" y="3200400"/>
+            <a:ext cx="10424160" cy="1463040"/>
+          </a:xfrm>
+          <a:prstGeom prst="rect">
+            <a:avLst/>
+          </a:prstGeom>
+          <a:noFill/>
+        </p:spPr>
+        <p:txBody>
+          <a:bodyPr wrap="square" anchor="t" lIns="0" rIns="0" tIns="0" bIns="0">
+            <a:spAutoFit/>
+          </a:bodyPr>
+          <a:lstStyle/>
+          <a:p>
+            <a:pPr algn="l">
+              <a:lnSpc>
+                <a:spcPct val="108000"/>
+              </a:lnSpc>
+              <a:spcBef>
+                <a:spcPts val="0"/>
+              </a:spcBef>
+              <a:spcAft>
+                <a:spcPts val="600"/>
+              </a:spcAft>
+            </a:pPr>
+            <a:r>
               <a:rPr sz="1800" b="0" i="0">
                 <a:solidFill>
                   <a:srgbClr val="C2CAD4"/>
                 </a:solidFill>
                 <a:latin typeface="Calibri"/>
               </a:rPr>
-              <a:t>Each function: one change — a Start or a Stop — with an owner and a 30-day first step. Written down, on screen, before we leave the room.</a:t>
+              <a:t>Each group: your voted Stop / Start / Continue reported to the room — and one Start made real, with an owner and a 30-day first step. Written down, on screen, before we leave.</a:t>
             </a:r>
           </a:p>
         </p:txBody>
@@ -9953,7 +12918,52 @@
         </p:nvSpPr>
         <p:spPr>
           <a:xfrm>
-            <a:off x="822960" y="4937760"/>
+            <a:off x="822960" y="4800600"/>
+            <a:ext cx="10607040" cy="548640"/>
+          </a:xfrm>
+          <a:prstGeom prst="rect">
+            <a:avLst/>
+          </a:prstGeom>
+          <a:noFill/>
+        </p:spPr>
+        <p:txBody>
+          <a:bodyPr wrap="square" anchor="t" lIns="0" rIns="0" tIns="0" bIns="0">
+            <a:spAutoFit/>
+          </a:bodyPr>
+          <a:lstStyle/>
+          <a:p>
+            <a:pPr algn="l">
+              <a:lnSpc>
+                <a:spcPct val="108000"/>
+              </a:lnSpc>
+              <a:spcBef>
+                <a:spcPts val="0"/>
+              </a:spcBef>
+              <a:spcAft>
+                <a:spcPts val="600"/>
+              </a:spcAft>
+            </a:pPr>
+            <a:r>
+              <a:rPr sz="1500" b="0" i="1">
+                <a:solidFill>
+                  <a:srgbClr val="8A8BF0"/>
+                </a:solidFill>
+                <a:latin typeface="Calibri"/>
+              </a:rPr>
+              <a:t>Then the 90-day scoreboard: what actually happened — and are we closer to the best development team in the country?</a:t>
+            </a:r>
+          </a:p>
+        </p:txBody>
+      </p:sp>
+      <p:sp>
+        <p:nvSpPr>
+          <p:cNvPr id="7" name="TextBox 6"/>
+          <p:cNvSpPr txBox="1"/>
+          <p:nvPr/>
+        </p:nvSpPr>
+        <p:spPr>
+          <a:xfrm>
+            <a:off x="822960" y="5623560"/>
             <a:ext cx="10058400" cy="457200"/>
           </a:xfrm>
           <a:prstGeom prst="rect">
@@ -10181,7 +13191,7 @@
                 </a:solidFill>
                 <a:latin typeface="Calibri"/>
               </a:rPr>
-              <a:t>A fast 90 minutes (60 if we must)</a:t>
+              <a:t>One hour — one idea from each of us</a:t>
             </a:r>
           </a:p>
         </p:txBody>
@@ -10194,8 +13204,8 @@
         </p:nvSpPr>
         <p:spPr>
           <a:xfrm>
-            <a:off x="502920" y="1691640"/>
-            <a:ext cx="11155680" cy="530352"/>
+            <a:off x="502920" y="1645920"/>
+            <a:ext cx="11155680" cy="457200"/>
           </a:xfrm>
           <a:prstGeom prst="rect">
             <a:avLst/>
@@ -10238,8 +13248,8 @@
         </p:nvSpPr>
         <p:spPr>
           <a:xfrm>
-            <a:off x="658368" y="1801368"/>
-            <a:ext cx="1371600" cy="365760"/>
+            <a:off x="658368" y="1737360"/>
+            <a:ext cx="1463040" cy="365760"/>
           </a:xfrm>
           <a:prstGeom prst="rect">
             <a:avLst/>
@@ -10264,13 +13274,13 @@
               </a:spcAft>
             </a:pPr>
             <a:r>
-              <a:rPr sz="1250" b="1" i="0">
+              <a:rPr sz="1200" b="1" i="0">
                 <a:solidFill>
                   <a:srgbClr val="4A4BD6"/>
                 </a:solidFill>
                 <a:latin typeface="Consolas"/>
               </a:rPr>
-              <a:t>0:00–0:10</a:t>
+              <a:t>0:00–0:08</a:t>
             </a:r>
           </a:p>
         </p:txBody>
@@ -10283,8 +13293,8 @@
         </p:nvSpPr>
         <p:spPr>
           <a:xfrm>
-            <a:off x="2148840" y="1783080"/>
-            <a:ext cx="7955279" cy="457200"/>
+            <a:off x="2240280" y="1719072"/>
+            <a:ext cx="7772400" cy="457200"/>
           </a:xfrm>
           <a:prstGeom prst="rect">
             <a:avLst/>
@@ -10309,13 +13319,13 @@
               </a:spcAft>
             </a:pPr>
             <a:r>
-              <a:rPr sz="1350" b="0" i="0">
+              <a:rPr sz="1300" b="0" i="0">
                 <a:solidFill>
                   <a:srgbClr val="37424F"/>
                 </a:solidFill>
                 <a:latin typeface="Calibri"/>
               </a:rPr>
-              <a:t>Frame — Day-1 recap → the Balance → the rule → the challenge.</a:t>
+              <a:t>Frame — Day-1 recap → the Balance → the mechanic → the challenge.</a:t>
             </a:r>
           </a:p>
         </p:txBody>
@@ -10328,8 +13338,8 @@
         </p:nvSpPr>
         <p:spPr>
           <a:xfrm>
-            <a:off x="10332720" y="1801368"/>
-            <a:ext cx="1188720" cy="365760"/>
+            <a:off x="10195560" y="1737360"/>
+            <a:ext cx="1325880" cy="365760"/>
           </a:xfrm>
           <a:prstGeom prst="rect">
             <a:avLst/>
@@ -10354,7 +13364,7 @@
               </a:spcAft>
             </a:pPr>
             <a:r>
-              <a:rPr sz="950" b="1" i="0">
+              <a:rPr sz="900" b="1" i="0">
                 <a:solidFill>
                   <a:srgbClr val="66717F"/>
                 </a:solidFill>
@@ -10373,8 +13383,8 @@
         </p:nvSpPr>
         <p:spPr>
           <a:xfrm>
-            <a:off x="502920" y="2295144"/>
-            <a:ext cx="11155680" cy="530352"/>
+            <a:off x="502920" y="2171700"/>
+            <a:ext cx="11155680" cy="457200"/>
           </a:xfrm>
           <a:prstGeom prst="rect">
             <a:avLst/>
@@ -10417,8 +13427,8 @@
         </p:nvSpPr>
         <p:spPr>
           <a:xfrm>
-            <a:off x="658368" y="2404872"/>
-            <a:ext cx="1371600" cy="365760"/>
+            <a:off x="658368" y="2263140"/>
+            <a:ext cx="1463040" cy="365760"/>
           </a:xfrm>
           <a:prstGeom prst="rect">
             <a:avLst/>
@@ -10443,13 +13453,13 @@
               </a:spcAft>
             </a:pPr>
             <a:r>
-              <a:rPr sz="1250" b="1" i="0">
+              <a:rPr sz="1200" b="1" i="0">
                 <a:solidFill>
                   <a:srgbClr val="4A4BD6"/>
                 </a:solidFill>
                 <a:latin typeface="Consolas"/>
               </a:rPr>
-              <a:t>0:10–0:30</a:t>
+              <a:t>0:08–0:20</a:t>
             </a:r>
           </a:p>
         </p:txBody>
@@ -10462,8 +13472,8 @@
         </p:nvSpPr>
         <p:spPr>
           <a:xfrm>
-            <a:off x="2148840" y="2386584"/>
-            <a:ext cx="7955279" cy="457200"/>
+            <a:off x="2240280" y="2244852"/>
+            <a:ext cx="7772400" cy="457200"/>
           </a:xfrm>
           <a:prstGeom prst="rect">
             <a:avLst/>
@@ -10488,13 +13498,13 @@
               </a:spcAft>
             </a:pPr>
             <a:r>
-              <a:rPr sz="1350" b="0" i="0">
+              <a:rPr sz="1300" b="0" i="0">
                 <a:solidFill>
                   <a:srgbClr val="37424F"/>
                 </a:solidFill>
                 <a:latin typeface="Calibri"/>
               </a:rPr>
-              <a:t>Diverge, in your function — what should we Stop or change, and Start?</a:t>
+              <a:t>Introspect, solo — each person writes their own three: one Stop, one Start, one Continue.</a:t>
             </a:r>
           </a:p>
         </p:txBody>
@@ -10507,8 +13517,8 @@
         </p:nvSpPr>
         <p:spPr>
           <a:xfrm>
-            <a:off x="10332720" y="2404872"/>
-            <a:ext cx="1188720" cy="365760"/>
+            <a:off x="10195560" y="2263140"/>
+            <a:ext cx="1325880" cy="365760"/>
           </a:xfrm>
           <a:prstGeom prst="rect">
             <a:avLst/>
@@ -10533,13 +13543,13 @@
               </a:spcAft>
             </a:pPr>
             <a:r>
-              <a:rPr sz="950" b="1" i="0">
+              <a:rPr sz="900" b="1" i="0">
                 <a:solidFill>
                   <a:srgbClr val="66717F"/>
                 </a:solidFill>
                 <a:latin typeface="Consolas"/>
               </a:rPr>
-              <a:t>FUNCTIONS</a:t>
+              <a:t>INDIVIDUALS</a:t>
             </a:r>
           </a:p>
         </p:txBody>
@@ -10552,8 +13562,8 @@
         </p:nvSpPr>
         <p:spPr>
           <a:xfrm>
-            <a:off x="502920" y="2898648"/>
-            <a:ext cx="11155680" cy="530352"/>
+            <a:off x="502920" y="2697480"/>
+            <a:ext cx="11155680" cy="457200"/>
           </a:xfrm>
           <a:prstGeom prst="rect">
             <a:avLst/>
@@ -10596,8 +13606,8 @@
         </p:nvSpPr>
         <p:spPr>
           <a:xfrm>
-            <a:off x="658368" y="3008376"/>
-            <a:ext cx="1371600" cy="365760"/>
+            <a:off x="658368" y="2788920"/>
+            <a:ext cx="1463040" cy="365760"/>
           </a:xfrm>
           <a:prstGeom prst="rect">
             <a:avLst/>
@@ -10622,13 +13632,13 @@
               </a:spcAft>
             </a:pPr>
             <a:r>
-              <a:rPr sz="1250" b="1" i="0">
+              <a:rPr sz="1200" b="1" i="0">
                 <a:solidFill>
                   <a:srgbClr val="4A4BD6"/>
                 </a:solidFill>
                 <a:latin typeface="Consolas"/>
               </a:rPr>
-              <a:t>0:30–0:45</a:t>
+              <a:t>0:20–0:35</a:t>
             </a:r>
           </a:p>
         </p:txBody>
@@ -10641,8 +13651,8 @@
         </p:nvSpPr>
         <p:spPr>
           <a:xfrm>
-            <a:off x="2148840" y="2990088"/>
-            <a:ext cx="7955279" cy="457200"/>
+            <a:off x="2240280" y="2770632"/>
+            <a:ext cx="7772400" cy="457200"/>
           </a:xfrm>
           <a:prstGeom prst="rect">
             <a:avLst/>
@@ -10667,13 +13677,13 @@
               </a:spcAft>
             </a:pPr>
             <a:r>
-              <a:rPr sz="1350" b="0" i="0">
+              <a:rPr sz="1300" b="0" i="0">
                 <a:solidFill>
                   <a:srgbClr val="37424F"/>
                 </a:solidFill>
                 <a:latin typeface="Calibri"/>
               </a:rPr>
-              <a:t>Converge — post, cluster, dot-vote the high-impact / in-our-control.</a:t>
+              <a:t>Share &amp; vote — round the table, then dot-vote your group's best two in each.</a:t>
             </a:r>
           </a:p>
         </p:txBody>
@@ -10686,8 +13696,8 @@
         </p:nvSpPr>
         <p:spPr>
           <a:xfrm>
-            <a:off x="10332720" y="3008376"/>
-            <a:ext cx="1188720" cy="365760"/>
+            <a:off x="10195560" y="2788920"/>
+            <a:ext cx="1325880" cy="365760"/>
           </a:xfrm>
           <a:prstGeom prst="rect">
             <a:avLst/>
@@ -10712,13 +13722,13 @@
               </a:spcAft>
             </a:pPr>
             <a:r>
-              <a:rPr sz="950" b="1" i="0">
+              <a:rPr sz="900" b="1" i="0">
                 <a:solidFill>
                   <a:srgbClr val="66717F"/>
                 </a:solidFill>
                 <a:latin typeface="Consolas"/>
               </a:rPr>
-              <a:t>ROOM</a:t>
+              <a:t>GROUP</a:t>
             </a:r>
           </a:p>
         </p:txBody>
@@ -10731,8 +13741,8 @@
         </p:nvSpPr>
         <p:spPr>
           <a:xfrm>
-            <a:off x="502920" y="3502152"/>
-            <a:ext cx="11155680" cy="530352"/>
+            <a:off x="502920" y="3223260"/>
+            <a:ext cx="11155680" cy="457200"/>
           </a:xfrm>
           <a:prstGeom prst="rect">
             <a:avLst/>
@@ -10775,8 +13785,8 @@
         </p:nvSpPr>
         <p:spPr>
           <a:xfrm>
-            <a:off x="658368" y="3611880"/>
-            <a:ext cx="1371600" cy="365760"/>
+            <a:off x="658368" y="3314700"/>
+            <a:ext cx="1463040" cy="365760"/>
           </a:xfrm>
           <a:prstGeom prst="rect">
             <a:avLst/>
@@ -10801,13 +13811,13 @@
               </a:spcAft>
             </a:pPr>
             <a:r>
-              <a:rPr sz="1250" b="1" i="0">
+              <a:rPr sz="1200" b="1" i="0">
                 <a:solidFill>
                   <a:srgbClr val="4A4BD6"/>
                 </a:solidFill>
                 <a:latin typeface="Consolas"/>
               </a:rPr>
-              <a:t>0:45–1:10</a:t>
+              <a:t>0:35–0:45</a:t>
             </a:r>
           </a:p>
         </p:txBody>
@@ -10820,8 +13830,8 @@
         </p:nvSpPr>
         <p:spPr>
           <a:xfrm>
-            <a:off x="2148840" y="3593592"/>
-            <a:ext cx="7955279" cy="457200"/>
+            <a:off x="2240280" y="3296412"/>
+            <a:ext cx="7772400" cy="457200"/>
           </a:xfrm>
           <a:prstGeom prst="rect">
             <a:avLst/>
@@ -10846,13 +13856,13 @@
               </a:spcAft>
             </a:pPr>
             <a:r>
-              <a:rPr sz="1350" b="0" i="0">
+              <a:rPr sz="1300" b="0" i="0">
                 <a:solidFill>
                   <a:srgbClr val="37424F"/>
                 </a:solidFill>
                 <a:latin typeface="Calibri"/>
               </a:rPr>
-              <a:t>Deep-dive ×1–2 — pre-mortem + a “how we'd actually do it” canvas.</a:t>
+              <a:t>Report back — each group's top two Stop / Start / Continue to the room.</a:t>
             </a:r>
           </a:p>
         </p:txBody>
@@ -10865,8 +13875,8 @@
         </p:nvSpPr>
         <p:spPr>
           <a:xfrm>
-            <a:off x="10332720" y="3611880"/>
-            <a:ext cx="1188720" cy="365760"/>
+            <a:off x="10195560" y="3314700"/>
+            <a:ext cx="1325880" cy="365760"/>
           </a:xfrm>
           <a:prstGeom prst="rect">
             <a:avLst/>
@@ -10891,7 +13901,7 @@
               </a:spcAft>
             </a:pPr>
             <a:r>
-              <a:rPr sz="950" b="1" i="0">
+              <a:rPr sz="900" b="1" i="0">
                 <a:solidFill>
                   <a:srgbClr val="66717F"/>
                 </a:solidFill>
@@ -10910,8 +13920,8 @@
         </p:nvSpPr>
         <p:spPr>
           <a:xfrm>
-            <a:off x="502920" y="4105656"/>
-            <a:ext cx="11155680" cy="530352"/>
+            <a:off x="502920" y="3749040"/>
+            <a:ext cx="11155680" cy="457200"/>
           </a:xfrm>
           <a:prstGeom prst="rect">
             <a:avLst/>
@@ -10954,8 +13964,8 @@
         </p:nvSpPr>
         <p:spPr>
           <a:xfrm>
-            <a:off x="658368" y="4215384"/>
-            <a:ext cx="1371600" cy="365760"/>
+            <a:off x="658368" y="3840480"/>
+            <a:ext cx="1463040" cy="365760"/>
           </a:xfrm>
           <a:prstGeom prst="rect">
             <a:avLst/>
@@ -10980,13 +13990,13 @@
               </a:spcAft>
             </a:pPr>
             <a:r>
-              <a:rPr sz="1250" b="1" i="0">
+              <a:rPr sz="1200" b="1" i="0">
                 <a:solidFill>
                   <a:srgbClr val="4A4BD6"/>
                 </a:solidFill>
                 <a:latin typeface="Consolas"/>
               </a:rPr>
-              <a:t>1:10–1:25</a:t>
+              <a:t>0:45–0:55</a:t>
             </a:r>
           </a:p>
         </p:txBody>
@@ -10999,8 +14009,8 @@
         </p:nvSpPr>
         <p:spPr>
           <a:xfrm>
-            <a:off x="2148840" y="4197096"/>
-            <a:ext cx="7955279" cy="457200"/>
+            <a:off x="2240280" y="3822192"/>
+            <a:ext cx="7772400" cy="457200"/>
           </a:xfrm>
           <a:prstGeom prst="rect">
             <a:avLst/>
@@ -11025,13 +14035,13 @@
               </a:spcAft>
             </a:pPr>
             <a:r>
-              <a:rPr sz="1350" b="0" i="0">
+              <a:rPr sz="1300" b="0" i="0">
                 <a:solidFill>
                   <a:srgbClr val="37424F"/>
                 </a:solidFill>
                 <a:latin typeface="Calibri"/>
               </a:rPr>
-              <a:t>Commit — each function owns one change + a 30-day first step.</a:t>
+              <a:t>Make one real — take your best Start and fill the canvas: owner, first step, signal.</a:t>
             </a:r>
           </a:p>
         </p:txBody>
@@ -11044,8 +14054,8 @@
         </p:nvSpPr>
         <p:spPr>
           <a:xfrm>
-            <a:off x="10332720" y="4215384"/>
-            <a:ext cx="1188720" cy="365760"/>
+            <a:off x="10195560" y="3840480"/>
+            <a:ext cx="1325880" cy="365760"/>
           </a:xfrm>
           <a:prstGeom prst="rect">
             <a:avLst/>
@@ -11070,13 +14080,13 @@
               </a:spcAft>
             </a:pPr>
             <a:r>
-              <a:rPr sz="950" b="1" i="0">
+              <a:rPr sz="900" b="1" i="0">
                 <a:solidFill>
                   <a:srgbClr val="66717F"/>
                 </a:solidFill>
                 <a:latin typeface="Consolas"/>
               </a:rPr>
-              <a:t>ALL</a:t>
+              <a:t>GROUP</a:t>
             </a:r>
           </a:p>
         </p:txBody>
@@ -11089,8 +14099,187 @@
         </p:nvSpPr>
         <p:spPr>
           <a:xfrm>
-            <a:off x="502920" y="4892040"/>
-            <a:ext cx="11155680" cy="1188720"/>
+            <a:off x="502920" y="4274820"/>
+            <a:ext cx="11155680" cy="457200"/>
+          </a:xfrm>
+          <a:prstGeom prst="rect">
+            <a:avLst/>
+          </a:prstGeom>
+          <a:solidFill>
+            <a:srgbClr val="F4F6F9"/>
+          </a:solidFill>
+          <a:ln>
+            <a:noFill/>
+          </a:ln>
+          <a:effectLst/>
+        </p:spPr>
+        <p:style>
+          <a:lnRef idx="1">
+            <a:schemeClr val="accent1"/>
+          </a:lnRef>
+          <a:fillRef idx="3">
+            <a:schemeClr val="accent1"/>
+          </a:fillRef>
+          <a:effectRef idx="2">
+            <a:schemeClr val="accent1"/>
+          </a:effectRef>
+          <a:fontRef idx="minor">
+            <a:schemeClr val="lt1"/>
+          </a:fontRef>
+        </p:style>
+        <p:txBody>
+          <a:bodyPr rtlCol="0" anchor="ctr"/>
+          <a:lstStyle/>
+          <a:p>
+            <a:pPr algn="ctr"/>
+          </a:p>
+        </p:txBody>
+      </p:sp>
+      <p:sp>
+        <p:nvSpPr>
+          <p:cNvPr id="27" name="TextBox 26"/>
+          <p:cNvSpPr txBox="1"/>
+          <p:nvPr/>
+        </p:nvSpPr>
+        <p:spPr>
+          <a:xfrm>
+            <a:off x="658368" y="4366260"/>
+            <a:ext cx="1463040" cy="365760"/>
+          </a:xfrm>
+          <a:prstGeom prst="rect">
+            <a:avLst/>
+          </a:prstGeom>
+          <a:noFill/>
+        </p:spPr>
+        <p:txBody>
+          <a:bodyPr wrap="square" anchor="t" lIns="0" rIns="0" tIns="0" bIns="0">
+            <a:spAutoFit/>
+          </a:bodyPr>
+          <a:lstStyle/>
+          <a:p>
+            <a:pPr algn="l">
+              <a:lnSpc>
+                <a:spcPct val="108000"/>
+              </a:lnSpc>
+              <a:spcBef>
+                <a:spcPts val="0"/>
+              </a:spcBef>
+              <a:spcAft>
+                <a:spcPts val="600"/>
+              </a:spcAft>
+            </a:pPr>
+            <a:r>
+              <a:rPr sz="1200" b="1" i="0">
+                <a:solidFill>
+                  <a:srgbClr val="4A4BD6"/>
+                </a:solidFill>
+                <a:latin typeface="Consolas"/>
+              </a:rPr>
+              <a:t>0:55–1:00</a:t>
+            </a:r>
+          </a:p>
+        </p:txBody>
+      </p:sp>
+      <p:sp>
+        <p:nvSpPr>
+          <p:cNvPr id="28" name="TextBox 27"/>
+          <p:cNvSpPr txBox="1"/>
+          <p:nvPr/>
+        </p:nvSpPr>
+        <p:spPr>
+          <a:xfrm>
+            <a:off x="2240280" y="4347972"/>
+            <a:ext cx="7772400" cy="457200"/>
+          </a:xfrm>
+          <a:prstGeom prst="rect">
+            <a:avLst/>
+          </a:prstGeom>
+          <a:noFill/>
+        </p:spPr>
+        <p:txBody>
+          <a:bodyPr wrap="square" anchor="t" lIns="0" rIns="0" tIns="0" bIns="0">
+            <a:spAutoFit/>
+          </a:bodyPr>
+          <a:lstStyle/>
+          <a:p>
+            <a:pPr algn="l">
+              <a:lnSpc>
+                <a:spcPct val="108000"/>
+              </a:lnSpc>
+              <a:spcBef>
+                <a:spcPts val="0"/>
+              </a:spcBef>
+              <a:spcAft>
+                <a:spcPts val="600"/>
+              </a:spcAft>
+            </a:pPr>
+            <a:r>
+              <a:rPr sz="1300" b="0" i="0">
+                <a:solidFill>
+                  <a:srgbClr val="37424F"/>
+                </a:solidFill>
+                <a:latin typeface="Calibri"/>
+              </a:rPr>
+              <a:t>Commit — lock owners + 30-day first steps; set the 90-day review.</a:t>
+            </a:r>
+          </a:p>
+        </p:txBody>
+      </p:sp>
+      <p:sp>
+        <p:nvSpPr>
+          <p:cNvPr id="29" name="TextBox 28"/>
+          <p:cNvSpPr txBox="1"/>
+          <p:nvPr/>
+        </p:nvSpPr>
+        <p:spPr>
+          <a:xfrm>
+            <a:off x="10195560" y="4366260"/>
+            <a:ext cx="1325880" cy="365760"/>
+          </a:xfrm>
+          <a:prstGeom prst="rect">
+            <a:avLst/>
+          </a:prstGeom>
+          <a:noFill/>
+        </p:spPr>
+        <p:txBody>
+          <a:bodyPr wrap="square" anchor="t" lIns="0" rIns="0" tIns="0" bIns="0">
+            <a:spAutoFit/>
+          </a:bodyPr>
+          <a:lstStyle/>
+          <a:p>
+            <a:pPr algn="r">
+              <a:lnSpc>
+                <a:spcPct val="108000"/>
+              </a:lnSpc>
+              <a:spcBef>
+                <a:spcPts val="0"/>
+              </a:spcBef>
+              <a:spcAft>
+                <a:spcPts val="600"/>
+              </a:spcAft>
+            </a:pPr>
+            <a:r>
+              <a:rPr sz="900" b="1" i="0">
+                <a:solidFill>
+                  <a:srgbClr val="66717F"/>
+                </a:solidFill>
+                <a:latin typeface="Consolas"/>
+              </a:rPr>
+              <a:t>ALL</a:t>
+            </a:r>
+          </a:p>
+        </p:txBody>
+      </p:sp>
+      <p:sp>
+        <p:nvSpPr>
+          <p:cNvPr id="30" name="Rectangle 29"/>
+          <p:cNvSpPr/>
+          <p:nvPr/>
+        </p:nvSpPr>
+        <p:spPr>
+          <a:xfrm>
+            <a:off x="502920" y="4937760"/>
+            <a:ext cx="11155680" cy="960120"/>
           </a:xfrm>
           <a:prstGeom prst="rect">
             <a:avLst/>
@@ -11129,13 +14318,13 @@
       </p:sp>
       <p:sp>
         <p:nvSpPr>
-          <p:cNvPr id="27" name="TextBox 26"/>
-          <p:cNvSpPr txBox="1"/>
-          <p:nvPr/>
-        </p:nvSpPr>
-        <p:spPr>
-          <a:xfrm>
-            <a:off x="713232" y="5010912"/>
+          <p:cNvPr id="31" name="TextBox 30"/>
+          <p:cNvSpPr txBox="1"/>
+          <p:nvPr/>
+        </p:nvSpPr>
+        <p:spPr>
+          <a:xfrm>
+            <a:off x="713232" y="5047488"/>
             <a:ext cx="10698480" cy="320040"/>
           </a:xfrm>
           <a:prstGeom prst="rect">
@@ -11167,21 +14356,21 @@
                 </a:solidFill>
                 <a:latin typeface="Consolas"/>
               </a:rPr>
-              <a:t>THE RULE FOR EVERY IDEA</a:t>
-            </a:r>
-          </a:p>
-        </p:txBody>
-      </p:sp>
-      <p:sp>
-        <p:nvSpPr>
-          <p:cNvPr id="28" name="TextBox 27"/>
-          <p:cNvSpPr txBox="1"/>
-          <p:nvPr/>
-        </p:nvSpPr>
-        <p:spPr>
-          <a:xfrm>
-            <a:off x="713232" y="5285232"/>
-            <a:ext cx="10789920" cy="731520"/>
+              <a:t>THE MECHANIC — STOP · START · CONTINUE</a:t>
+            </a:r>
+          </a:p>
+        </p:txBody>
+      </p:sp>
+      <p:sp>
+        <p:nvSpPr>
+          <p:cNvPr id="32" name="TextBox 31"/>
+          <p:cNvSpPr txBox="1"/>
+          <p:nvPr/>
+        </p:nvSpPr>
+        <p:spPr>
+          <a:xfrm>
+            <a:off x="713232" y="5321808"/>
+            <a:ext cx="10789920" cy="548640"/>
           </a:xfrm>
           <a:prstGeom prst="rect">
             <a:avLst/>
@@ -11206,36 +14395,36 @@
               </a:spcAft>
             </a:pPr>
             <a:r>
-              <a:rPr sz="1600" b="1" i="0">
+              <a:rPr sz="1550" b="1" i="0">
                 <a:solidFill>
                   <a:srgbClr val="111820"/>
                 </a:solidFill>
                 <a:latin typeface="Calibri"/>
               </a:rPr>
-              <a:t>A concrete Start or a Stop — and lead with stops. </a:t>
-            </a:r>
-            <a:r>
-              <a:rPr sz="1400" b="0" i="0">
+              <a:t>Each person brings three — one of each. </a:t>
+            </a:r>
+            <a:r>
+              <a:rPr sz="1350" b="0" i="0">
                 <a:solidFill>
                   <a:srgbClr val="37424F"/>
                 </a:solidFill>
                 <a:latin typeface="Calibri"/>
               </a:rPr>
-              <a:t>It can come from the day's learning or your own read of what matters; you don't have to tie it to a particular insight. Where you can, name what a new start displaces — attention is the scarce resource.</a:t>
-            </a:r>
-          </a:p>
-        </p:txBody>
-      </p:sp>
-      <p:sp>
-        <p:nvSpPr>
-          <p:cNvPr id="29" name="TextBox 28"/>
-          <p:cNvSpPr txBox="1"/>
-          <p:nvPr/>
-        </p:nvSpPr>
-        <p:spPr>
-          <a:xfrm>
-            <a:off x="502920" y="6199632"/>
-            <a:ext cx="10972800" cy="274320"/>
+              <a:t>We have the resources, so this isn't a cutting exercise: lead with what to start, be honest about what to stop, protect what's working. Ideas can come from the day or your own read.</a:t>
+            </a:r>
+          </a:p>
+        </p:txBody>
+      </p:sp>
+      <p:sp>
+        <p:nvSpPr>
+          <p:cNvPr id="33" name="TextBox 32"/>
+          <p:cNvSpPr txBox="1"/>
+          <p:nvPr/>
+        </p:nvSpPr>
+        <p:spPr>
+          <a:xfrm>
+            <a:off x="502920" y="6035040"/>
+            <a:ext cx="11155680" cy="320040"/>
           </a:xfrm>
           <a:prstGeom prst="rect">
             <a:avLst/>
@@ -11260,20 +14449,20 @@
               </a:spcAft>
             </a:pPr>
             <a:r>
-              <a:rPr sz="1150" b="0" i="0">
+              <a:rPr sz="1100" b="0" i="0">
                 <a:solidFill>
                   <a:srgbClr val="66717F"/>
                 </a:solidFill>
                 <a:latin typeface="Calibri"/>
               </a:rPr>
-              <a:t>Seating: functional teams — Development · Analysis · Land &amp; Planning · Structured Bids · Commercial · Technical (Engineering).</a:t>
-            </a:r>
-          </a:p>
-        </p:txBody>
-      </p:sp>
-      <p:sp>
-        <p:nvSpPr>
-          <p:cNvPr id="30" name="TextBox 29"/>
+              <a:t>Seating: functional teams — Development · Analysis · Land &amp; Planning · Structured Bids · Commercial · Technical.  Groups of 5 max — if a function is larger, split and report separately.</a:t>
+            </a:r>
+          </a:p>
+        </p:txBody>
+      </p:sp>
+      <p:sp>
+        <p:nvSpPr>
+          <p:cNvPr id="34" name="TextBox 33"/>
           <p:cNvSpPr txBox="1"/>
           <p:nvPr/>
         </p:nvSpPr>
@@ -11507,7 +14696,7 @@
                 </a:solidFill>
                 <a:latin typeface="Calibri"/>
               </a:rPr>
-              <a:t>If we're to be the best development team in the country — what should we start and stop?</a:t>
+              <a:t>If we're to be the best development team in the country — what should we start, stop and continue?</a:t>
             </a:r>
           </a:p>
         </p:txBody>
@@ -11520,7 +14709,7 @@
         </p:nvSpPr>
         <p:spPr>
           <a:xfrm>
-            <a:off x="822960" y="4297680"/>
+            <a:off x="822960" y="4389120"/>
             <a:ext cx="10058400" cy="914400"/>
           </a:xfrm>
           <a:prstGeom prst="rect">
@@ -12127,366 +15316,6 @@
             <a:avLst/>
           </a:prstGeom>
           <a:solidFill>
-            <a:srgbClr val="4A4BD6"/>
-          </a:solidFill>
-          <a:ln>
-            <a:noFill/>
-          </a:ln>
-          <a:effectLst/>
-        </p:spPr>
-        <p:style>
-          <a:lnRef idx="1">
-            <a:schemeClr val="accent1"/>
-          </a:lnRef>
-          <a:fillRef idx="3">
-            <a:schemeClr val="accent1"/>
-          </a:fillRef>
-          <a:effectRef idx="2">
-            <a:schemeClr val="accent1"/>
-          </a:effectRef>
-          <a:fontRef idx="minor">
-            <a:schemeClr val="lt1"/>
-          </a:fontRef>
-        </p:style>
-        <p:txBody>
-          <a:bodyPr rtlCol="0" anchor="ctr"/>
-          <a:lstStyle/>
-          <a:p>
-            <a:pPr algn="ctr"/>
-          </a:p>
-        </p:txBody>
-      </p:sp>
-      <p:sp>
-        <p:nvSpPr>
-          <p:cNvPr id="4" name="TextBox 3"/>
-          <p:cNvSpPr txBox="1"/>
-          <p:nvPr/>
-        </p:nvSpPr>
-        <p:spPr>
-          <a:xfrm>
-            <a:off x="548640" y="457200"/>
-            <a:ext cx="10058400" cy="274320"/>
-          </a:xfrm>
-          <a:prstGeom prst="rect">
-            <a:avLst/>
-          </a:prstGeom>
-          <a:noFill/>
-        </p:spPr>
-        <p:txBody>
-          <a:bodyPr wrap="square" anchor="t" lIns="0" rIns="0" tIns="0" bIns="0">
-            <a:spAutoFit/>
-          </a:bodyPr>
-          <a:lstStyle/>
-          <a:p>
-            <a:pPr algn="l">
-              <a:lnSpc>
-                <a:spcPct val="108000"/>
-              </a:lnSpc>
-              <a:spcBef>
-                <a:spcPts val="0"/>
-              </a:spcBef>
-              <a:spcAft>
-                <a:spcPts val="600"/>
-              </a:spcAft>
-            </a:pPr>
-            <a:r>
-              <a:rPr sz="1200" b="1" i="0">
-                <a:solidFill>
-                  <a:srgbClr val="4A4BD6"/>
-                </a:solidFill>
-                <a:latin typeface="Consolas"/>
-              </a:rPr>
-              <a:t>THE BALANCE</a:t>
-            </a:r>
-          </a:p>
-        </p:txBody>
-      </p:sp>
-      <p:sp>
-        <p:nvSpPr>
-          <p:cNvPr id="5" name="TextBox 4"/>
-          <p:cNvSpPr txBox="1"/>
-          <p:nvPr/>
-        </p:nvSpPr>
-        <p:spPr>
-          <a:xfrm>
-            <a:off x="502920" y="777240"/>
-            <a:ext cx="11155680" cy="822960"/>
-          </a:xfrm>
-          <a:prstGeom prst="rect">
-            <a:avLst/>
-          </a:prstGeom>
-          <a:noFill/>
-        </p:spPr>
-        <p:txBody>
-          <a:bodyPr wrap="square" anchor="t" lIns="0" rIns="0" tIns="0" bIns="0">
-            <a:spAutoFit/>
-          </a:bodyPr>
-          <a:lstStyle/>
-          <a:p>
-            <a:pPr algn="l">
-              <a:lnSpc>
-                <a:spcPct val="108000"/>
-              </a:lnSpc>
-              <a:spcBef>
-                <a:spcPts val="0"/>
-              </a:spcBef>
-              <a:spcAft>
-                <a:spcPts val="600"/>
-              </a:spcAft>
-            </a:pPr>
-            <a:r>
-              <a:rPr sz="3200" b="1" i="0">
-                <a:solidFill>
-                  <a:srgbClr val="111820"/>
-                </a:solidFill>
-                <a:latin typeface="Calibri"/>
-              </a:rPr>
-              <a:t>One asset · a few forces</a:t>
-            </a:r>
-          </a:p>
-        </p:txBody>
-      </p:sp>
-      <p:sp>
-        <p:nvSpPr>
-          <p:cNvPr id="6" name="Rectangle 5"/>
-          <p:cNvSpPr/>
-          <p:nvPr/>
-        </p:nvSpPr>
-        <p:spPr>
-          <a:xfrm>
-            <a:off x="548640" y="1691640"/>
-            <a:ext cx="5468112" cy="2057400"/>
-          </a:xfrm>
-          <a:prstGeom prst="rect">
-            <a:avLst/>
-          </a:prstGeom>
-          <a:solidFill>
-            <a:srgbClr val="F4F6F9"/>
-          </a:solidFill>
-          <a:ln w="9525">
-            <a:solidFill>
-              <a:srgbClr val="D8DEE6"/>
-            </a:solidFill>
-          </a:ln>
-          <a:effectLst/>
-        </p:spPr>
-        <p:style>
-          <a:lnRef idx="1">
-            <a:schemeClr val="accent1"/>
-          </a:lnRef>
-          <a:fillRef idx="3">
-            <a:schemeClr val="accent1"/>
-          </a:fillRef>
-          <a:effectRef idx="2">
-            <a:schemeClr val="accent1"/>
-          </a:effectRef>
-          <a:fontRef idx="minor">
-            <a:schemeClr val="lt1"/>
-          </a:fontRef>
-        </p:style>
-        <p:txBody>
-          <a:bodyPr rtlCol="0" anchor="ctr"/>
-          <a:lstStyle/>
-          <a:p>
-            <a:pPr algn="ctr"/>
-          </a:p>
-        </p:txBody>
-      </p:sp>
-      <p:sp>
-        <p:nvSpPr>
-          <p:cNvPr id="7" name="Rectangle 6"/>
-          <p:cNvSpPr/>
-          <p:nvPr/>
-        </p:nvSpPr>
-        <p:spPr>
-          <a:xfrm>
-            <a:off x="548640" y="1691640"/>
-            <a:ext cx="91440" cy="2057400"/>
-          </a:xfrm>
-          <a:prstGeom prst="rect">
-            <a:avLst/>
-          </a:prstGeom>
-          <a:solidFill>
-            <a:srgbClr val="4A4BD6"/>
-          </a:solidFill>
-          <a:ln>
-            <a:noFill/>
-          </a:ln>
-          <a:effectLst/>
-        </p:spPr>
-        <p:style>
-          <a:lnRef idx="1">
-            <a:schemeClr val="accent1"/>
-          </a:lnRef>
-          <a:fillRef idx="3">
-            <a:schemeClr val="accent1"/>
-          </a:fillRef>
-          <a:effectRef idx="2">
-            <a:schemeClr val="accent1"/>
-          </a:effectRef>
-          <a:fontRef idx="minor">
-            <a:schemeClr val="lt1"/>
-          </a:fontRef>
-        </p:style>
-        <p:txBody>
-          <a:bodyPr rtlCol="0" anchor="ctr"/>
-          <a:lstStyle/>
-          <a:p>
-            <a:pPr algn="ctr"/>
-          </a:p>
-        </p:txBody>
-      </p:sp>
-      <p:sp>
-        <p:nvSpPr>
-          <p:cNvPr id="8" name="TextBox 7"/>
-          <p:cNvSpPr txBox="1"/>
-          <p:nvPr/>
-        </p:nvSpPr>
-        <p:spPr>
-          <a:xfrm>
-            <a:off x="822960" y="1874520"/>
-            <a:ext cx="5029200" cy="320040"/>
-          </a:xfrm>
-          <a:prstGeom prst="rect">
-            <a:avLst/>
-          </a:prstGeom>
-          <a:noFill/>
-        </p:spPr>
-        <p:txBody>
-          <a:bodyPr wrap="square" anchor="t" lIns="0" rIns="0" tIns="0" bIns="0">
-            <a:spAutoFit/>
-          </a:bodyPr>
-          <a:lstStyle/>
-          <a:p>
-            <a:pPr algn="l">
-              <a:lnSpc>
-                <a:spcPct val="108000"/>
-              </a:lnSpc>
-              <a:spcBef>
-                <a:spcPts val="0"/>
-              </a:spcBef>
-              <a:spcAft>
-                <a:spcPts val="600"/>
-              </a:spcAft>
-            </a:pPr>
-            <a:r>
-              <a:rPr sz="1150" b="1" i="0">
-                <a:solidFill>
-                  <a:srgbClr val="4A4BD6"/>
-                </a:solidFill>
-                <a:latin typeface="Consolas"/>
-              </a:rPr>
-              <a:t>The asset</a:t>
-            </a:r>
-          </a:p>
-        </p:txBody>
-      </p:sp>
-      <p:sp>
-        <p:nvSpPr>
-          <p:cNvPr id="9" name="TextBox 8"/>
-          <p:cNvSpPr txBox="1"/>
-          <p:nvPr/>
-        </p:nvSpPr>
-        <p:spPr>
-          <a:xfrm>
-            <a:off x="822960" y="2258568"/>
-            <a:ext cx="5029200" cy="1371600"/>
-          </a:xfrm>
-          <a:prstGeom prst="rect">
-            <a:avLst/>
-          </a:prstGeom>
-          <a:noFill/>
-        </p:spPr>
-        <p:txBody>
-          <a:bodyPr wrap="square" anchor="t" lIns="0" rIns="0" tIns="0" bIns="0">
-            <a:spAutoFit/>
-          </a:bodyPr>
-          <a:lstStyle/>
-          <a:p>
-            <a:pPr algn="l">
-              <a:lnSpc>
-                <a:spcPct val="108000"/>
-              </a:lnSpc>
-              <a:spcBef>
-                <a:spcPts val="0"/>
-              </a:spcBef>
-              <a:spcAft>
-                <a:spcPts val="600"/>
-              </a:spcAft>
-            </a:pPr>
-            <a:r>
-              <a:rPr sz="1500" b="0" i="0">
-                <a:solidFill>
-                  <a:srgbClr val="37424F"/>
-                </a:solidFill>
-                <a:latin typeface="Calibri"/>
-              </a:rPr>
-              <a:t>Fundamentals, maturity, critical path, risk, pace — and how it ranks vs our other projects.</a:t>
-            </a:r>
-          </a:p>
-        </p:txBody>
-      </p:sp>
-      <p:sp>
-        <p:nvSpPr>
-          <p:cNvPr id="10" name="Rectangle 9"/>
-          <p:cNvSpPr/>
-          <p:nvPr/>
-        </p:nvSpPr>
-        <p:spPr>
-          <a:xfrm>
-            <a:off x="6172200" y="1691640"/>
-            <a:ext cx="5468112" cy="2057400"/>
-          </a:xfrm>
-          <a:prstGeom prst="rect">
-            <a:avLst/>
-          </a:prstGeom>
-          <a:solidFill>
-            <a:srgbClr val="F4F6F9"/>
-          </a:solidFill>
-          <a:ln w="9525">
-            <a:solidFill>
-              <a:srgbClr val="D8DEE6"/>
-            </a:solidFill>
-          </a:ln>
-          <a:effectLst/>
-        </p:spPr>
-        <p:style>
-          <a:lnRef idx="1">
-            <a:schemeClr val="accent1"/>
-          </a:lnRef>
-          <a:fillRef idx="3">
-            <a:schemeClr val="accent1"/>
-          </a:fillRef>
-          <a:effectRef idx="2">
-            <a:schemeClr val="accent1"/>
-          </a:effectRef>
-          <a:fontRef idx="minor">
-            <a:schemeClr val="lt1"/>
-          </a:fontRef>
-        </p:style>
-        <p:txBody>
-          <a:bodyPr rtlCol="0" anchor="ctr"/>
-          <a:lstStyle/>
-          <a:p>
-            <a:pPr algn="ctr"/>
-          </a:p>
-        </p:txBody>
-      </p:sp>
-      <p:sp>
-        <p:nvSpPr>
-          <p:cNvPr id="11" name="Rectangle 10"/>
-          <p:cNvSpPr/>
-          <p:nvPr/>
-        </p:nvSpPr>
-        <p:spPr>
-          <a:xfrm>
-            <a:off x="6172200" y="1691640"/>
-            <a:ext cx="91440" cy="2057400"/>
-          </a:xfrm>
-          <a:prstGeom prst="rect">
-            <a:avLst/>
-          </a:prstGeom>
-          <a:solidFill>
             <a:srgbClr val="0D7D74"/>
           </a:solidFill>
           <a:ln>
@@ -12518,14 +15347,14 @@
       </p:sp>
       <p:sp>
         <p:nvSpPr>
-          <p:cNvPr id="12" name="TextBox 11"/>
-          <p:cNvSpPr txBox="1"/>
-          <p:nvPr/>
-        </p:nvSpPr>
-        <p:spPr>
-          <a:xfrm>
-            <a:off x="6446520" y="1874520"/>
-            <a:ext cx="5029200" cy="320040"/>
+          <p:cNvPr id="4" name="TextBox 3"/>
+          <p:cNvSpPr txBox="1"/>
+          <p:nvPr/>
+        </p:nvSpPr>
+        <p:spPr>
+          <a:xfrm>
+            <a:off x="548640" y="457200"/>
+            <a:ext cx="10058400" cy="274320"/>
           </a:xfrm>
           <a:prstGeom prst="rect">
             <a:avLst/>
@@ -12550,27 +15379,27 @@
               </a:spcAft>
             </a:pPr>
             <a:r>
-              <a:rPr sz="1150" b="1" i="0">
+              <a:rPr sz="1200" b="1" i="0">
                 <a:solidFill>
                   <a:srgbClr val="0D7D74"/>
                 </a:solidFill>
                 <a:latin typeface="Consolas"/>
               </a:rPr>
-              <a:t>Force · Market  ★ yesterday's focus</a:t>
-            </a:r>
-          </a:p>
-        </p:txBody>
-      </p:sp>
-      <p:sp>
-        <p:nvSpPr>
-          <p:cNvPr id="13" name="TextBox 12"/>
-          <p:cNvSpPr txBox="1"/>
-          <p:nvPr/>
-        </p:nvSpPr>
-        <p:spPr>
-          <a:xfrm>
-            <a:off x="6446520" y="2258568"/>
-            <a:ext cx="5029200" cy="1371600"/>
+              <a:t>THE HORIZON CAVEAT — READ THIS BEFORE YOU “REACT” TO THE MARKET</a:t>
+            </a:r>
+          </a:p>
+        </p:txBody>
+      </p:sp>
+      <p:sp>
+        <p:nvSpPr>
+          <p:cNvPr id="5" name="TextBox 4"/>
+          <p:cNvSpPr txBox="1"/>
+          <p:nvPr/>
+        </p:nvSpPr>
+        <p:spPr>
+          <a:xfrm>
+            <a:off x="502920" y="1554480"/>
+            <a:ext cx="11155680" cy="1097280"/>
           </a:xfrm>
           <a:prstGeom prst="rect">
             <a:avLst/>
@@ -12595,117 +15424,27 @@
               </a:spcAft>
             </a:pPr>
             <a:r>
-              <a:rPr sz="1500" b="0" i="0">
-                <a:solidFill>
-                  <a:srgbClr val="37424F"/>
+              <a:rPr sz="3400" b="1" i="0">
+                <a:solidFill>
+                  <a:srgbClr val="111820"/>
                 </a:solidFill>
                 <a:latin typeface="Calibri"/>
               </a:rPr>
-              <a:t>The cycle, cannibalisation, firming, demand, the forward curve — the force we spent Day 1 learning to read.</a:t>
-            </a:r>
-          </a:p>
-        </p:txBody>
-      </p:sp>
-      <p:sp>
-        <p:nvSpPr>
-          <p:cNvPr id="14" name="Rectangle 13"/>
-          <p:cNvSpPr/>
-          <p:nvPr/>
-        </p:nvSpPr>
-        <p:spPr>
-          <a:xfrm>
-            <a:off x="548640" y="3977639"/>
-            <a:ext cx="5468112" cy="2057400"/>
-          </a:xfrm>
-          <a:prstGeom prst="rect">
-            <a:avLst/>
-          </a:prstGeom>
-          <a:solidFill>
-            <a:srgbClr val="F4F6F9"/>
-          </a:solidFill>
-          <a:ln w="9525">
-            <a:solidFill>
-              <a:srgbClr val="D8DEE6"/>
-            </a:solidFill>
-          </a:ln>
-          <a:effectLst/>
-        </p:spPr>
-        <p:style>
-          <a:lnRef idx="1">
-            <a:schemeClr val="accent1"/>
-          </a:lnRef>
-          <a:fillRef idx="3">
-            <a:schemeClr val="accent1"/>
-          </a:fillRef>
-          <a:effectRef idx="2">
-            <a:schemeClr val="accent1"/>
-          </a:effectRef>
-          <a:fontRef idx="minor">
-            <a:schemeClr val="lt1"/>
-          </a:fontRef>
-        </p:style>
-        <p:txBody>
-          <a:bodyPr rtlCol="0" anchor="ctr"/>
-          <a:lstStyle/>
-          <a:p>
-            <a:pPr algn="ctr"/>
-          </a:p>
-        </p:txBody>
-      </p:sp>
-      <p:sp>
-        <p:nvSpPr>
-          <p:cNvPr id="15" name="Rectangle 14"/>
-          <p:cNvSpPr/>
-          <p:nvPr/>
-        </p:nvSpPr>
-        <p:spPr>
-          <a:xfrm>
-            <a:off x="548640" y="3977639"/>
-            <a:ext cx="91440" cy="2057400"/>
-          </a:xfrm>
-          <a:prstGeom prst="rect">
-            <a:avLst/>
-          </a:prstGeom>
-          <a:solidFill>
-            <a:srgbClr val="2F7D3A"/>
-          </a:solidFill>
-          <a:ln>
-            <a:noFill/>
-          </a:ln>
-          <a:effectLst/>
-        </p:spPr>
-        <p:style>
-          <a:lnRef idx="1">
-            <a:schemeClr val="accent1"/>
-          </a:lnRef>
-          <a:fillRef idx="3">
-            <a:schemeClr val="accent1"/>
-          </a:fillRef>
-          <a:effectRef idx="2">
-            <a:schemeClr val="accent1"/>
-          </a:effectRef>
-          <a:fontRef idx="minor">
-            <a:schemeClr val="lt1"/>
-          </a:fontRef>
-        </p:style>
-        <p:txBody>
-          <a:bodyPr rtlCol="0" anchor="ctr"/>
-          <a:lstStyle/>
-          <a:p>
-            <a:pPr algn="ctr"/>
-          </a:p>
-        </p:txBody>
-      </p:sp>
-      <p:sp>
-        <p:nvSpPr>
-          <p:cNvPr id="16" name="TextBox 15"/>
-          <p:cNvSpPr txBox="1"/>
-          <p:nvPr/>
-        </p:nvSpPr>
-        <p:spPr>
-          <a:xfrm>
-            <a:off x="822960" y="4160519"/>
-            <a:ext cx="5029200" cy="320040"/>
+              <a:t>Development cycles are longer than market and policy cycles</a:t>
+            </a:r>
+          </a:p>
+        </p:txBody>
+      </p:sp>
+      <p:sp>
+        <p:nvSpPr>
+          <p:cNvPr id="6" name="TextBox 5"/>
+          <p:cNvSpPr txBox="1"/>
+          <p:nvPr/>
+        </p:nvSpPr>
+        <p:spPr>
+          <a:xfrm>
+            <a:off x="548640" y="2880360"/>
+            <a:ext cx="10607040" cy="2194560"/>
           </a:xfrm>
           <a:prstGeom prst="rect">
             <a:avLst/>
@@ -12720,7 +15459,7 @@
           <a:p>
             <a:pPr algn="l">
               <a:lnSpc>
-                <a:spcPct val="108000"/>
+                <a:spcPct val="130000"/>
               </a:lnSpc>
               <a:spcBef>
                 <a:spcPts val="0"/>
@@ -12730,27 +15469,72 @@
               </a:spcAft>
             </a:pPr>
             <a:r>
-              <a:rPr sz="1150" b="1" i="0">
-                <a:solidFill>
-                  <a:srgbClr val="2F7D3A"/>
-                </a:solidFill>
-                <a:latin typeface="Consolas"/>
-              </a:rPr>
-              <a:t>Force · Policy</a:t>
-            </a:r>
-          </a:p>
-        </p:txBody>
-      </p:sp>
-      <p:sp>
-        <p:nvSpPr>
-          <p:cNvPr id="17" name="TextBox 16"/>
-          <p:cNvSpPr txBox="1"/>
-          <p:nvPr/>
-        </p:nvSpPr>
-        <p:spPr>
-          <a:xfrm>
-            <a:off x="822960" y="4544567"/>
-            <a:ext cx="5029200" cy="1371600"/>
+              <a:rPr sz="1900" b="0" i="0">
+                <a:solidFill>
+                  <a:srgbClr val="37424F"/>
+                </a:solidFill>
+                <a:latin typeface="Calibri"/>
+              </a:rPr>
+              <a:t>A project takes years; the market and the support settings will turn </a:t>
+            </a:r>
+            <a:r>
+              <a:rPr sz="1900" b="1" i="0">
+                <a:solidFill>
+                  <a:srgbClr val="111820"/>
+                </a:solidFill>
+                <a:latin typeface="Calibri"/>
+              </a:rPr>
+              <a:t>several times</a:t>
+            </a:r>
+            <a:r>
+              <a:rPr sz="1900" b="0" i="0">
+                <a:solidFill>
+                  <a:srgbClr val="37424F"/>
+                </a:solidFill>
+                <a:latin typeface="Calibri"/>
+              </a:rPr>
+              <a:t> before it reaches COD. So read today's market — but </a:t>
+            </a:r>
+            <a:r>
+              <a:rPr sz="1900" b="1" i="0">
+                <a:solidFill>
+                  <a:srgbClr val="0D7D74"/>
+                </a:solidFill>
+                <a:latin typeface="Calibri"/>
+              </a:rPr>
+              <a:t>develop to a longer-term view</a:t>
+            </a:r>
+            <a:r>
+              <a:rPr sz="1900" b="0" i="0">
+                <a:solidFill>
+                  <a:srgbClr val="37424F"/>
+                </a:solidFill>
+                <a:latin typeface="Calibri"/>
+              </a:rPr>
+              <a:t> of where market and company need are heading. Informed by the current setting, influenced by it, but </a:t>
+            </a:r>
+            <a:r>
+              <a:rPr sz="1900" b="1" i="0">
+                <a:solidFill>
+                  <a:srgbClr val="111820"/>
+                </a:solidFill>
+                <a:latin typeface="Calibri"/>
+              </a:rPr>
+              <a:t>not captive to it.</a:t>
+            </a:r>
+          </a:p>
+        </p:txBody>
+      </p:sp>
+      <p:sp>
+        <p:nvSpPr>
+          <p:cNvPr id="7" name="TextBox 6"/>
+          <p:cNvSpPr txBox="1"/>
+          <p:nvPr/>
+        </p:nvSpPr>
+        <p:spPr>
+          <a:xfrm>
+            <a:off x="548640" y="5120640"/>
+            <a:ext cx="10058400" cy="548640"/>
           </a:xfrm>
           <a:prstGeom prst="rect">
             <a:avLst/>
@@ -12775,200 +15559,20 @@
               </a:spcAft>
             </a:pPr>
             <a:r>
-              <a:rPr sz="1500" b="0" i="0">
-                <a:solidFill>
-                  <a:srgbClr val="37424F"/>
+              <a:rPr sz="1700" b="0" i="1">
+                <a:solidFill>
+                  <a:srgbClr val="66717F"/>
                 </a:solidFill>
                 <a:latin typeface="Calibri"/>
               </a:rPr>
-              <a:t>CIS/LTESA and support — a floor and a gate. A contract isn't a built asset; windows open and shut.</a:t>
-            </a:r>
-          </a:p>
-        </p:txBody>
-      </p:sp>
-      <p:sp>
-        <p:nvSpPr>
-          <p:cNvPr id="18" name="Rectangle 17"/>
-          <p:cNvSpPr/>
-          <p:nvPr/>
-        </p:nvSpPr>
-        <p:spPr>
-          <a:xfrm>
-            <a:off x="6172200" y="3977639"/>
-            <a:ext cx="5468112" cy="2057400"/>
-          </a:xfrm>
-          <a:prstGeom prst="rect">
-            <a:avLst/>
-          </a:prstGeom>
-          <a:solidFill>
-            <a:srgbClr val="F4F6F9"/>
-          </a:solidFill>
-          <a:ln w="9525">
-            <a:solidFill>
-              <a:srgbClr val="D8DEE6"/>
-            </a:solidFill>
-          </a:ln>
-          <a:effectLst/>
-        </p:spPr>
-        <p:style>
-          <a:lnRef idx="1">
-            <a:schemeClr val="accent1"/>
-          </a:lnRef>
-          <a:fillRef idx="3">
-            <a:schemeClr val="accent1"/>
-          </a:fillRef>
-          <a:effectRef idx="2">
-            <a:schemeClr val="accent1"/>
-          </a:effectRef>
-          <a:fontRef idx="minor">
-            <a:schemeClr val="lt1"/>
-          </a:fontRef>
-        </p:style>
-        <p:txBody>
-          <a:bodyPr rtlCol="0" anchor="ctr"/>
-          <a:lstStyle/>
-          <a:p>
-            <a:pPr algn="ctr"/>
-          </a:p>
-        </p:txBody>
-      </p:sp>
-      <p:sp>
-        <p:nvSpPr>
-          <p:cNvPr id="19" name="Rectangle 18"/>
-          <p:cNvSpPr/>
-          <p:nvPr/>
-        </p:nvSpPr>
-        <p:spPr>
-          <a:xfrm>
-            <a:off x="6172200" y="3977639"/>
-            <a:ext cx="91440" cy="2057400"/>
-          </a:xfrm>
-          <a:prstGeom prst="rect">
-            <a:avLst/>
-          </a:prstGeom>
-          <a:solidFill>
-            <a:srgbClr val="B4571F"/>
-          </a:solidFill>
-          <a:ln>
-            <a:noFill/>
-          </a:ln>
-          <a:effectLst/>
-        </p:spPr>
-        <p:style>
-          <a:lnRef idx="1">
-            <a:schemeClr val="accent1"/>
-          </a:lnRef>
-          <a:fillRef idx="3">
-            <a:schemeClr val="accent1"/>
-          </a:fillRef>
-          <a:effectRef idx="2">
-            <a:schemeClr val="accent1"/>
-          </a:effectRef>
-          <a:fontRef idx="minor">
-            <a:schemeClr val="lt1"/>
-          </a:fontRef>
-        </p:style>
-        <p:txBody>
-          <a:bodyPr rtlCol="0" anchor="ctr"/>
-          <a:lstStyle/>
-          <a:p>
-            <a:pPr algn="ctr"/>
-          </a:p>
-        </p:txBody>
-      </p:sp>
-      <p:sp>
-        <p:nvSpPr>
-          <p:cNvPr id="20" name="TextBox 19"/>
-          <p:cNvSpPr txBox="1"/>
-          <p:nvPr/>
-        </p:nvSpPr>
-        <p:spPr>
-          <a:xfrm>
-            <a:off x="6446520" y="4160519"/>
-            <a:ext cx="5029200" cy="320040"/>
-          </a:xfrm>
-          <a:prstGeom prst="rect">
-            <a:avLst/>
-          </a:prstGeom>
-          <a:noFill/>
-        </p:spPr>
-        <p:txBody>
-          <a:bodyPr wrap="square" anchor="t" lIns="0" rIns="0" tIns="0" bIns="0">
-            <a:spAutoFit/>
-          </a:bodyPr>
-          <a:lstStyle/>
-          <a:p>
-            <a:pPr algn="l">
-              <a:lnSpc>
-                <a:spcPct val="108000"/>
-              </a:lnSpc>
-              <a:spcBef>
-                <a:spcPts val="0"/>
-              </a:spcBef>
-              <a:spcAft>
-                <a:spcPts val="600"/>
-              </a:spcAft>
-            </a:pPr>
-            <a:r>
-              <a:rPr sz="1150" b="1" i="0">
-                <a:solidFill>
-                  <a:srgbClr val="B4571F"/>
-                </a:solidFill>
-                <a:latin typeface="Consolas"/>
-              </a:rPr>
-              <a:t>Factor · Capital &amp; the firm</a:t>
-            </a:r>
-          </a:p>
-        </p:txBody>
-      </p:sp>
-      <p:sp>
-        <p:nvSpPr>
-          <p:cNvPr id="21" name="TextBox 20"/>
-          <p:cNvSpPr txBox="1"/>
-          <p:nvPr/>
-        </p:nvSpPr>
-        <p:spPr>
-          <a:xfrm>
-            <a:off x="6446520" y="4544567"/>
-            <a:ext cx="5029200" cy="1371600"/>
-          </a:xfrm>
-          <a:prstGeom prst="rect">
-            <a:avLst/>
-          </a:prstGeom>
-          <a:noFill/>
-        </p:spPr>
-        <p:txBody>
-          <a:bodyPr wrap="square" anchor="t" lIns="0" rIns="0" tIns="0" bIns="0">
-            <a:spAutoFit/>
-          </a:bodyPr>
-          <a:lstStyle/>
-          <a:p>
-            <a:pPr algn="l">
-              <a:lnSpc>
-                <a:spcPct val="108000"/>
-              </a:lnSpc>
-              <a:spcBef>
-                <a:spcPts val="0"/>
-              </a:spcBef>
-              <a:spcAft>
-                <a:spcPts val="600"/>
-              </a:spcAft>
-            </a:pPr>
-            <a:r>
-              <a:rPr sz="1500" b="0" i="0">
-                <a:solidFill>
-                  <a:srgbClr val="37424F"/>
-                </a:solidFill>
-                <a:latin typeface="Calibri"/>
-              </a:rPr>
-              <a:t>A real constraint — you can't do everything at once. Worth naming, but held lightly today.</a:t>
-            </a:r>
-          </a:p>
-        </p:txBody>
-      </p:sp>
-      <p:sp>
-        <p:nvSpPr>
-          <p:cNvPr id="22" name="TextBox 21"/>
+              <a:t>The “so what” is a sharper read — not a lurch to chase this year's price.</a:t>
+            </a:r>
+          </a:p>
+        </p:txBody>
+      </p:sp>
+      <p:sp>
+        <p:nvSpPr>
+          <p:cNvPr id="8" name="TextBox 7"/>
           <p:cNvSpPr txBox="1"/>
           <p:nvPr/>
         </p:nvSpPr>
@@ -13088,6 +15692,366 @@
             <a:avLst/>
           </a:prstGeom>
           <a:solidFill>
+            <a:srgbClr val="4A4BD6"/>
+          </a:solidFill>
+          <a:ln>
+            <a:noFill/>
+          </a:ln>
+          <a:effectLst/>
+        </p:spPr>
+        <p:style>
+          <a:lnRef idx="1">
+            <a:schemeClr val="accent1"/>
+          </a:lnRef>
+          <a:fillRef idx="3">
+            <a:schemeClr val="accent1"/>
+          </a:fillRef>
+          <a:effectRef idx="2">
+            <a:schemeClr val="accent1"/>
+          </a:effectRef>
+          <a:fontRef idx="minor">
+            <a:schemeClr val="lt1"/>
+          </a:fontRef>
+        </p:style>
+        <p:txBody>
+          <a:bodyPr rtlCol="0" anchor="ctr"/>
+          <a:lstStyle/>
+          <a:p>
+            <a:pPr algn="ctr"/>
+          </a:p>
+        </p:txBody>
+      </p:sp>
+      <p:sp>
+        <p:nvSpPr>
+          <p:cNvPr id="4" name="TextBox 3"/>
+          <p:cNvSpPr txBox="1"/>
+          <p:nvPr/>
+        </p:nvSpPr>
+        <p:spPr>
+          <a:xfrm>
+            <a:off x="548640" y="457200"/>
+            <a:ext cx="10058400" cy="274320"/>
+          </a:xfrm>
+          <a:prstGeom prst="rect">
+            <a:avLst/>
+          </a:prstGeom>
+          <a:noFill/>
+        </p:spPr>
+        <p:txBody>
+          <a:bodyPr wrap="square" anchor="t" lIns="0" rIns="0" tIns="0" bIns="0">
+            <a:spAutoFit/>
+          </a:bodyPr>
+          <a:lstStyle/>
+          <a:p>
+            <a:pPr algn="l">
+              <a:lnSpc>
+                <a:spcPct val="108000"/>
+              </a:lnSpc>
+              <a:spcBef>
+                <a:spcPts val="0"/>
+              </a:spcBef>
+              <a:spcAft>
+                <a:spcPts val="600"/>
+              </a:spcAft>
+            </a:pPr>
+            <a:r>
+              <a:rPr sz="1200" b="1" i="0">
+                <a:solidFill>
+                  <a:srgbClr val="4A4BD6"/>
+                </a:solidFill>
+                <a:latin typeface="Consolas"/>
+              </a:rPr>
+              <a:t>THE BALANCE</a:t>
+            </a:r>
+          </a:p>
+        </p:txBody>
+      </p:sp>
+      <p:sp>
+        <p:nvSpPr>
+          <p:cNvPr id="5" name="TextBox 4"/>
+          <p:cNvSpPr txBox="1"/>
+          <p:nvPr/>
+        </p:nvSpPr>
+        <p:spPr>
+          <a:xfrm>
+            <a:off x="502920" y="777240"/>
+            <a:ext cx="11155680" cy="822960"/>
+          </a:xfrm>
+          <a:prstGeom prst="rect">
+            <a:avLst/>
+          </a:prstGeom>
+          <a:noFill/>
+        </p:spPr>
+        <p:txBody>
+          <a:bodyPr wrap="square" anchor="t" lIns="0" rIns="0" tIns="0" bIns="0">
+            <a:spAutoFit/>
+          </a:bodyPr>
+          <a:lstStyle/>
+          <a:p>
+            <a:pPr algn="l">
+              <a:lnSpc>
+                <a:spcPct val="108000"/>
+              </a:lnSpc>
+              <a:spcBef>
+                <a:spcPts val="0"/>
+              </a:spcBef>
+              <a:spcAft>
+                <a:spcPts val="600"/>
+              </a:spcAft>
+            </a:pPr>
+            <a:r>
+              <a:rPr sz="3200" b="1" i="0">
+                <a:solidFill>
+                  <a:srgbClr val="111820"/>
+                </a:solidFill>
+                <a:latin typeface="Calibri"/>
+              </a:rPr>
+              <a:t>One asset · a few forces</a:t>
+            </a:r>
+          </a:p>
+        </p:txBody>
+      </p:sp>
+      <p:sp>
+        <p:nvSpPr>
+          <p:cNvPr id="6" name="Rectangle 5"/>
+          <p:cNvSpPr/>
+          <p:nvPr/>
+        </p:nvSpPr>
+        <p:spPr>
+          <a:xfrm>
+            <a:off x="548640" y="1691640"/>
+            <a:ext cx="5468112" cy="2057400"/>
+          </a:xfrm>
+          <a:prstGeom prst="rect">
+            <a:avLst/>
+          </a:prstGeom>
+          <a:solidFill>
+            <a:srgbClr val="F4F6F9"/>
+          </a:solidFill>
+          <a:ln w="9525">
+            <a:solidFill>
+              <a:srgbClr val="D8DEE6"/>
+            </a:solidFill>
+          </a:ln>
+          <a:effectLst/>
+        </p:spPr>
+        <p:style>
+          <a:lnRef idx="1">
+            <a:schemeClr val="accent1"/>
+          </a:lnRef>
+          <a:fillRef idx="3">
+            <a:schemeClr val="accent1"/>
+          </a:fillRef>
+          <a:effectRef idx="2">
+            <a:schemeClr val="accent1"/>
+          </a:effectRef>
+          <a:fontRef idx="minor">
+            <a:schemeClr val="lt1"/>
+          </a:fontRef>
+        </p:style>
+        <p:txBody>
+          <a:bodyPr rtlCol="0" anchor="ctr"/>
+          <a:lstStyle/>
+          <a:p>
+            <a:pPr algn="ctr"/>
+          </a:p>
+        </p:txBody>
+      </p:sp>
+      <p:sp>
+        <p:nvSpPr>
+          <p:cNvPr id="7" name="Rectangle 6"/>
+          <p:cNvSpPr/>
+          <p:nvPr/>
+        </p:nvSpPr>
+        <p:spPr>
+          <a:xfrm>
+            <a:off x="548640" y="1691640"/>
+            <a:ext cx="91440" cy="2057400"/>
+          </a:xfrm>
+          <a:prstGeom prst="rect">
+            <a:avLst/>
+          </a:prstGeom>
+          <a:solidFill>
+            <a:srgbClr val="4A4BD6"/>
+          </a:solidFill>
+          <a:ln>
+            <a:noFill/>
+          </a:ln>
+          <a:effectLst/>
+        </p:spPr>
+        <p:style>
+          <a:lnRef idx="1">
+            <a:schemeClr val="accent1"/>
+          </a:lnRef>
+          <a:fillRef idx="3">
+            <a:schemeClr val="accent1"/>
+          </a:fillRef>
+          <a:effectRef idx="2">
+            <a:schemeClr val="accent1"/>
+          </a:effectRef>
+          <a:fontRef idx="minor">
+            <a:schemeClr val="lt1"/>
+          </a:fontRef>
+        </p:style>
+        <p:txBody>
+          <a:bodyPr rtlCol="0" anchor="ctr"/>
+          <a:lstStyle/>
+          <a:p>
+            <a:pPr algn="ctr"/>
+          </a:p>
+        </p:txBody>
+      </p:sp>
+      <p:sp>
+        <p:nvSpPr>
+          <p:cNvPr id="8" name="TextBox 7"/>
+          <p:cNvSpPr txBox="1"/>
+          <p:nvPr/>
+        </p:nvSpPr>
+        <p:spPr>
+          <a:xfrm>
+            <a:off x="822960" y="1874520"/>
+            <a:ext cx="5029200" cy="320040"/>
+          </a:xfrm>
+          <a:prstGeom prst="rect">
+            <a:avLst/>
+          </a:prstGeom>
+          <a:noFill/>
+        </p:spPr>
+        <p:txBody>
+          <a:bodyPr wrap="square" anchor="t" lIns="0" rIns="0" tIns="0" bIns="0">
+            <a:spAutoFit/>
+          </a:bodyPr>
+          <a:lstStyle/>
+          <a:p>
+            <a:pPr algn="l">
+              <a:lnSpc>
+                <a:spcPct val="108000"/>
+              </a:lnSpc>
+              <a:spcBef>
+                <a:spcPts val="0"/>
+              </a:spcBef>
+              <a:spcAft>
+                <a:spcPts val="600"/>
+              </a:spcAft>
+            </a:pPr>
+            <a:r>
+              <a:rPr sz="1150" b="1" i="0">
+                <a:solidFill>
+                  <a:srgbClr val="4A4BD6"/>
+                </a:solidFill>
+                <a:latin typeface="Consolas"/>
+              </a:rPr>
+              <a:t>The asset</a:t>
+            </a:r>
+          </a:p>
+        </p:txBody>
+      </p:sp>
+      <p:sp>
+        <p:nvSpPr>
+          <p:cNvPr id="9" name="TextBox 8"/>
+          <p:cNvSpPr txBox="1"/>
+          <p:nvPr/>
+        </p:nvSpPr>
+        <p:spPr>
+          <a:xfrm>
+            <a:off x="822960" y="2258568"/>
+            <a:ext cx="5029200" cy="1371600"/>
+          </a:xfrm>
+          <a:prstGeom prst="rect">
+            <a:avLst/>
+          </a:prstGeom>
+          <a:noFill/>
+        </p:spPr>
+        <p:txBody>
+          <a:bodyPr wrap="square" anchor="t" lIns="0" rIns="0" tIns="0" bIns="0">
+            <a:spAutoFit/>
+          </a:bodyPr>
+          <a:lstStyle/>
+          <a:p>
+            <a:pPr algn="l">
+              <a:lnSpc>
+                <a:spcPct val="108000"/>
+              </a:lnSpc>
+              <a:spcBef>
+                <a:spcPts val="0"/>
+              </a:spcBef>
+              <a:spcAft>
+                <a:spcPts val="600"/>
+              </a:spcAft>
+            </a:pPr>
+            <a:r>
+              <a:rPr sz="1500" b="0" i="0">
+                <a:solidFill>
+                  <a:srgbClr val="37424F"/>
+                </a:solidFill>
+                <a:latin typeface="Calibri"/>
+              </a:rPr>
+              <a:t>Fundamentals, maturity, critical path, risk, pace — and how it ranks vs our other projects.</a:t>
+            </a:r>
+          </a:p>
+        </p:txBody>
+      </p:sp>
+      <p:sp>
+        <p:nvSpPr>
+          <p:cNvPr id="10" name="Rectangle 9"/>
+          <p:cNvSpPr/>
+          <p:nvPr/>
+        </p:nvSpPr>
+        <p:spPr>
+          <a:xfrm>
+            <a:off x="6172200" y="1691640"/>
+            <a:ext cx="5468112" cy="2057400"/>
+          </a:xfrm>
+          <a:prstGeom prst="rect">
+            <a:avLst/>
+          </a:prstGeom>
+          <a:solidFill>
+            <a:srgbClr val="F4F6F9"/>
+          </a:solidFill>
+          <a:ln w="9525">
+            <a:solidFill>
+              <a:srgbClr val="D8DEE6"/>
+            </a:solidFill>
+          </a:ln>
+          <a:effectLst/>
+        </p:spPr>
+        <p:style>
+          <a:lnRef idx="1">
+            <a:schemeClr val="accent1"/>
+          </a:lnRef>
+          <a:fillRef idx="3">
+            <a:schemeClr val="accent1"/>
+          </a:fillRef>
+          <a:effectRef idx="2">
+            <a:schemeClr val="accent1"/>
+          </a:effectRef>
+          <a:fontRef idx="minor">
+            <a:schemeClr val="lt1"/>
+          </a:fontRef>
+        </p:style>
+        <p:txBody>
+          <a:bodyPr rtlCol="0" anchor="ctr"/>
+          <a:lstStyle/>
+          <a:p>
+            <a:pPr algn="ctr"/>
+          </a:p>
+        </p:txBody>
+      </p:sp>
+      <p:sp>
+        <p:nvSpPr>
+          <p:cNvPr id="11" name="Rectangle 10"/>
+          <p:cNvSpPr/>
+          <p:nvPr/>
+        </p:nvSpPr>
+        <p:spPr>
+          <a:xfrm>
+            <a:off x="6172200" y="1691640"/>
+            <a:ext cx="91440" cy="2057400"/>
+          </a:xfrm>
+          <a:prstGeom prst="rect">
+            <a:avLst/>
+          </a:prstGeom>
+          <a:solidFill>
             <a:srgbClr val="0D7D74"/>
           </a:solidFill>
           <a:ln>
@@ -13119,14 +16083,14 @@
       </p:sp>
       <p:sp>
         <p:nvSpPr>
-          <p:cNvPr id="4" name="TextBox 3"/>
-          <p:cNvSpPr txBox="1"/>
-          <p:nvPr/>
-        </p:nvSpPr>
-        <p:spPr>
-          <a:xfrm>
-            <a:off x="548640" y="457200"/>
-            <a:ext cx="10058400" cy="274320"/>
+          <p:cNvPr id="12" name="TextBox 11"/>
+          <p:cNvSpPr txBox="1"/>
+          <p:nvPr/>
+        </p:nvSpPr>
+        <p:spPr>
+          <a:xfrm>
+            <a:off x="6446520" y="1874520"/>
+            <a:ext cx="5029200" cy="320040"/>
           </a:xfrm>
           <a:prstGeom prst="rect">
             <a:avLst/>
@@ -13151,27 +16115,27 @@
               </a:spcAft>
             </a:pPr>
             <a:r>
-              <a:rPr sz="1200" b="1" i="0">
+              <a:rPr sz="1150" b="1" i="0">
                 <a:solidFill>
                   <a:srgbClr val="0D7D74"/>
                 </a:solidFill>
                 <a:latin typeface="Consolas"/>
               </a:rPr>
-              <a:t>THE HORIZON CAVEAT — READ THIS BEFORE YOU “REACT” TO THE MARKET</a:t>
-            </a:r>
-          </a:p>
-        </p:txBody>
-      </p:sp>
-      <p:sp>
-        <p:nvSpPr>
-          <p:cNvPr id="5" name="TextBox 4"/>
-          <p:cNvSpPr txBox="1"/>
-          <p:nvPr/>
-        </p:nvSpPr>
-        <p:spPr>
-          <a:xfrm>
-            <a:off x="502920" y="1554480"/>
-            <a:ext cx="11155680" cy="1097280"/>
+              <a:t>Force · Market  ★ yesterday's focus</a:t>
+            </a:r>
+          </a:p>
+        </p:txBody>
+      </p:sp>
+      <p:sp>
+        <p:nvSpPr>
+          <p:cNvPr id="13" name="TextBox 12"/>
+          <p:cNvSpPr txBox="1"/>
+          <p:nvPr/>
+        </p:nvSpPr>
+        <p:spPr>
+          <a:xfrm>
+            <a:off x="6446520" y="2258568"/>
+            <a:ext cx="5029200" cy="1371600"/>
           </a:xfrm>
           <a:prstGeom prst="rect">
             <a:avLst/>
@@ -13196,27 +16160,117 @@
               </a:spcAft>
             </a:pPr>
             <a:r>
-              <a:rPr sz="3400" b="1" i="0">
-                <a:solidFill>
-                  <a:srgbClr val="111820"/>
+              <a:rPr sz="1500" b="0" i="0">
+                <a:solidFill>
+                  <a:srgbClr val="37424F"/>
                 </a:solidFill>
                 <a:latin typeface="Calibri"/>
               </a:rPr>
-              <a:t>Development cycles are longer than market and policy cycles</a:t>
-            </a:r>
-          </a:p>
-        </p:txBody>
-      </p:sp>
-      <p:sp>
-        <p:nvSpPr>
-          <p:cNvPr id="6" name="TextBox 5"/>
-          <p:cNvSpPr txBox="1"/>
-          <p:nvPr/>
-        </p:nvSpPr>
-        <p:spPr>
-          <a:xfrm>
-            <a:off x="548640" y="2880360"/>
-            <a:ext cx="10607040" cy="2194560"/>
+              <a:t>The cycle, cannibalisation, firming, demand, the forward curve — the force we spent Day 1 learning to read.</a:t>
+            </a:r>
+          </a:p>
+        </p:txBody>
+      </p:sp>
+      <p:sp>
+        <p:nvSpPr>
+          <p:cNvPr id="14" name="Rectangle 13"/>
+          <p:cNvSpPr/>
+          <p:nvPr/>
+        </p:nvSpPr>
+        <p:spPr>
+          <a:xfrm>
+            <a:off x="548640" y="3977639"/>
+            <a:ext cx="5468112" cy="2057400"/>
+          </a:xfrm>
+          <a:prstGeom prst="rect">
+            <a:avLst/>
+          </a:prstGeom>
+          <a:solidFill>
+            <a:srgbClr val="F4F6F9"/>
+          </a:solidFill>
+          <a:ln w="9525">
+            <a:solidFill>
+              <a:srgbClr val="D8DEE6"/>
+            </a:solidFill>
+          </a:ln>
+          <a:effectLst/>
+        </p:spPr>
+        <p:style>
+          <a:lnRef idx="1">
+            <a:schemeClr val="accent1"/>
+          </a:lnRef>
+          <a:fillRef idx="3">
+            <a:schemeClr val="accent1"/>
+          </a:fillRef>
+          <a:effectRef idx="2">
+            <a:schemeClr val="accent1"/>
+          </a:effectRef>
+          <a:fontRef idx="minor">
+            <a:schemeClr val="lt1"/>
+          </a:fontRef>
+        </p:style>
+        <p:txBody>
+          <a:bodyPr rtlCol="0" anchor="ctr"/>
+          <a:lstStyle/>
+          <a:p>
+            <a:pPr algn="ctr"/>
+          </a:p>
+        </p:txBody>
+      </p:sp>
+      <p:sp>
+        <p:nvSpPr>
+          <p:cNvPr id="15" name="Rectangle 14"/>
+          <p:cNvSpPr/>
+          <p:nvPr/>
+        </p:nvSpPr>
+        <p:spPr>
+          <a:xfrm>
+            <a:off x="548640" y="3977639"/>
+            <a:ext cx="91440" cy="2057400"/>
+          </a:xfrm>
+          <a:prstGeom prst="rect">
+            <a:avLst/>
+          </a:prstGeom>
+          <a:solidFill>
+            <a:srgbClr val="2F7D3A"/>
+          </a:solidFill>
+          <a:ln>
+            <a:noFill/>
+          </a:ln>
+          <a:effectLst/>
+        </p:spPr>
+        <p:style>
+          <a:lnRef idx="1">
+            <a:schemeClr val="accent1"/>
+          </a:lnRef>
+          <a:fillRef idx="3">
+            <a:schemeClr val="accent1"/>
+          </a:fillRef>
+          <a:effectRef idx="2">
+            <a:schemeClr val="accent1"/>
+          </a:effectRef>
+          <a:fontRef idx="minor">
+            <a:schemeClr val="lt1"/>
+          </a:fontRef>
+        </p:style>
+        <p:txBody>
+          <a:bodyPr rtlCol="0" anchor="ctr"/>
+          <a:lstStyle/>
+          <a:p>
+            <a:pPr algn="ctr"/>
+          </a:p>
+        </p:txBody>
+      </p:sp>
+      <p:sp>
+        <p:nvSpPr>
+          <p:cNvPr id="16" name="TextBox 15"/>
+          <p:cNvSpPr txBox="1"/>
+          <p:nvPr/>
+        </p:nvSpPr>
+        <p:spPr>
+          <a:xfrm>
+            <a:off x="822960" y="4160519"/>
+            <a:ext cx="5029200" cy="320040"/>
           </a:xfrm>
           <a:prstGeom prst="rect">
             <a:avLst/>
@@ -13231,7 +16285,7 @@
           <a:p>
             <a:pPr algn="l">
               <a:lnSpc>
-                <a:spcPct val="130000"/>
+                <a:spcPct val="108000"/>
               </a:lnSpc>
               <a:spcBef>
                 <a:spcPts val="0"/>
@@ -13241,72 +16295,27 @@
               </a:spcAft>
             </a:pPr>
             <a:r>
-              <a:rPr sz="1900" b="0" i="0">
-                <a:solidFill>
-                  <a:srgbClr val="37424F"/>
-                </a:solidFill>
-                <a:latin typeface="Calibri"/>
-              </a:rPr>
-              <a:t>A project takes years; the market and the support settings will turn </a:t>
-            </a:r>
-            <a:r>
-              <a:rPr sz="1900" b="1" i="0">
-                <a:solidFill>
-                  <a:srgbClr val="111820"/>
-                </a:solidFill>
-                <a:latin typeface="Calibri"/>
-              </a:rPr>
-              <a:t>several times</a:t>
-            </a:r>
-            <a:r>
-              <a:rPr sz="1900" b="0" i="0">
-                <a:solidFill>
-                  <a:srgbClr val="37424F"/>
-                </a:solidFill>
-                <a:latin typeface="Calibri"/>
-              </a:rPr>
-              <a:t> before it reaches COD. So read today's market — but </a:t>
-            </a:r>
-            <a:r>
-              <a:rPr sz="1900" b="1" i="0">
-                <a:solidFill>
-                  <a:srgbClr val="0D7D74"/>
-                </a:solidFill>
-                <a:latin typeface="Calibri"/>
-              </a:rPr>
-              <a:t>develop to a longer-term view</a:t>
-            </a:r>
-            <a:r>
-              <a:rPr sz="1900" b="0" i="0">
-                <a:solidFill>
-                  <a:srgbClr val="37424F"/>
-                </a:solidFill>
-                <a:latin typeface="Calibri"/>
-              </a:rPr>
-              <a:t> of where market and company need are heading. Informed by the current setting, influenced by it, but </a:t>
-            </a:r>
-            <a:r>
-              <a:rPr sz="1900" b="1" i="0">
-                <a:solidFill>
-                  <a:srgbClr val="111820"/>
-                </a:solidFill>
-                <a:latin typeface="Calibri"/>
-              </a:rPr>
-              <a:t>not captive to it.</a:t>
-            </a:r>
-          </a:p>
-        </p:txBody>
-      </p:sp>
-      <p:sp>
-        <p:nvSpPr>
-          <p:cNvPr id="7" name="TextBox 6"/>
-          <p:cNvSpPr txBox="1"/>
-          <p:nvPr/>
-        </p:nvSpPr>
-        <p:spPr>
-          <a:xfrm>
-            <a:off x="548640" y="5120640"/>
-            <a:ext cx="10058400" cy="548640"/>
+              <a:rPr sz="1150" b="1" i="0">
+                <a:solidFill>
+                  <a:srgbClr val="2F7D3A"/>
+                </a:solidFill>
+                <a:latin typeface="Consolas"/>
+              </a:rPr>
+              <a:t>Force · Policy</a:t>
+            </a:r>
+          </a:p>
+        </p:txBody>
+      </p:sp>
+      <p:sp>
+        <p:nvSpPr>
+          <p:cNvPr id="17" name="TextBox 16"/>
+          <p:cNvSpPr txBox="1"/>
+          <p:nvPr/>
+        </p:nvSpPr>
+        <p:spPr>
+          <a:xfrm>
+            <a:off x="822960" y="4544567"/>
+            <a:ext cx="5029200" cy="1371600"/>
           </a:xfrm>
           <a:prstGeom prst="rect">
             <a:avLst/>
@@ -13331,20 +16340,200 @@
               </a:spcAft>
             </a:pPr>
             <a:r>
-              <a:rPr sz="1700" b="0" i="1">
-                <a:solidFill>
-                  <a:srgbClr val="66717F"/>
+              <a:rPr sz="1500" b="0" i="0">
+                <a:solidFill>
+                  <a:srgbClr val="37424F"/>
                 </a:solidFill>
                 <a:latin typeface="Calibri"/>
               </a:rPr>
-              <a:t>The “so what” is a sharper read — not a lurch to chase this year's price.</a:t>
-            </a:r>
-          </a:p>
-        </p:txBody>
-      </p:sp>
-      <p:sp>
-        <p:nvSpPr>
-          <p:cNvPr id="8" name="TextBox 7"/>
+              <a:t>CIS/LTESA and support — a floor and a gate. A contract isn't a built asset; windows open and shut.</a:t>
+            </a:r>
+          </a:p>
+        </p:txBody>
+      </p:sp>
+      <p:sp>
+        <p:nvSpPr>
+          <p:cNvPr id="18" name="Rectangle 17"/>
+          <p:cNvSpPr/>
+          <p:nvPr/>
+        </p:nvSpPr>
+        <p:spPr>
+          <a:xfrm>
+            <a:off x="6172200" y="3977639"/>
+            <a:ext cx="5468112" cy="2057400"/>
+          </a:xfrm>
+          <a:prstGeom prst="rect">
+            <a:avLst/>
+          </a:prstGeom>
+          <a:solidFill>
+            <a:srgbClr val="F4F6F9"/>
+          </a:solidFill>
+          <a:ln w="9525">
+            <a:solidFill>
+              <a:srgbClr val="D8DEE6"/>
+            </a:solidFill>
+          </a:ln>
+          <a:effectLst/>
+        </p:spPr>
+        <p:style>
+          <a:lnRef idx="1">
+            <a:schemeClr val="accent1"/>
+          </a:lnRef>
+          <a:fillRef idx="3">
+            <a:schemeClr val="accent1"/>
+          </a:fillRef>
+          <a:effectRef idx="2">
+            <a:schemeClr val="accent1"/>
+          </a:effectRef>
+          <a:fontRef idx="minor">
+            <a:schemeClr val="lt1"/>
+          </a:fontRef>
+        </p:style>
+        <p:txBody>
+          <a:bodyPr rtlCol="0" anchor="ctr"/>
+          <a:lstStyle/>
+          <a:p>
+            <a:pPr algn="ctr"/>
+          </a:p>
+        </p:txBody>
+      </p:sp>
+      <p:sp>
+        <p:nvSpPr>
+          <p:cNvPr id="19" name="Rectangle 18"/>
+          <p:cNvSpPr/>
+          <p:nvPr/>
+        </p:nvSpPr>
+        <p:spPr>
+          <a:xfrm>
+            <a:off x="6172200" y="3977639"/>
+            <a:ext cx="91440" cy="2057400"/>
+          </a:xfrm>
+          <a:prstGeom prst="rect">
+            <a:avLst/>
+          </a:prstGeom>
+          <a:solidFill>
+            <a:srgbClr val="B4571F"/>
+          </a:solidFill>
+          <a:ln>
+            <a:noFill/>
+          </a:ln>
+          <a:effectLst/>
+        </p:spPr>
+        <p:style>
+          <a:lnRef idx="1">
+            <a:schemeClr val="accent1"/>
+          </a:lnRef>
+          <a:fillRef idx="3">
+            <a:schemeClr val="accent1"/>
+          </a:fillRef>
+          <a:effectRef idx="2">
+            <a:schemeClr val="accent1"/>
+          </a:effectRef>
+          <a:fontRef idx="minor">
+            <a:schemeClr val="lt1"/>
+          </a:fontRef>
+        </p:style>
+        <p:txBody>
+          <a:bodyPr rtlCol="0" anchor="ctr"/>
+          <a:lstStyle/>
+          <a:p>
+            <a:pPr algn="ctr"/>
+          </a:p>
+        </p:txBody>
+      </p:sp>
+      <p:sp>
+        <p:nvSpPr>
+          <p:cNvPr id="20" name="TextBox 19"/>
+          <p:cNvSpPr txBox="1"/>
+          <p:nvPr/>
+        </p:nvSpPr>
+        <p:spPr>
+          <a:xfrm>
+            <a:off x="6446520" y="4160519"/>
+            <a:ext cx="5029200" cy="320040"/>
+          </a:xfrm>
+          <a:prstGeom prst="rect">
+            <a:avLst/>
+          </a:prstGeom>
+          <a:noFill/>
+        </p:spPr>
+        <p:txBody>
+          <a:bodyPr wrap="square" anchor="t" lIns="0" rIns="0" tIns="0" bIns="0">
+            <a:spAutoFit/>
+          </a:bodyPr>
+          <a:lstStyle/>
+          <a:p>
+            <a:pPr algn="l">
+              <a:lnSpc>
+                <a:spcPct val="108000"/>
+              </a:lnSpc>
+              <a:spcBef>
+                <a:spcPts val="0"/>
+              </a:spcBef>
+              <a:spcAft>
+                <a:spcPts val="600"/>
+              </a:spcAft>
+            </a:pPr>
+            <a:r>
+              <a:rPr sz="1150" b="1" i="0">
+                <a:solidFill>
+                  <a:srgbClr val="B4571F"/>
+                </a:solidFill>
+                <a:latin typeface="Consolas"/>
+              </a:rPr>
+              <a:t>Factor · Capital &amp; the firm</a:t>
+            </a:r>
+          </a:p>
+        </p:txBody>
+      </p:sp>
+      <p:sp>
+        <p:nvSpPr>
+          <p:cNvPr id="21" name="TextBox 20"/>
+          <p:cNvSpPr txBox="1"/>
+          <p:nvPr/>
+        </p:nvSpPr>
+        <p:spPr>
+          <a:xfrm>
+            <a:off x="6446520" y="4544567"/>
+            <a:ext cx="5029200" cy="1371600"/>
+          </a:xfrm>
+          <a:prstGeom prst="rect">
+            <a:avLst/>
+          </a:prstGeom>
+          <a:noFill/>
+        </p:spPr>
+        <p:txBody>
+          <a:bodyPr wrap="square" anchor="t" lIns="0" rIns="0" tIns="0" bIns="0">
+            <a:spAutoFit/>
+          </a:bodyPr>
+          <a:lstStyle/>
+          <a:p>
+            <a:pPr algn="l">
+              <a:lnSpc>
+                <a:spcPct val="108000"/>
+              </a:lnSpc>
+              <a:spcBef>
+                <a:spcPts val="0"/>
+              </a:spcBef>
+              <a:spcAft>
+                <a:spcPts val="600"/>
+              </a:spcAft>
+            </a:pPr>
+            <a:r>
+              <a:rPr sz="1500" b="0" i="0">
+                <a:solidFill>
+                  <a:srgbClr val="37424F"/>
+                </a:solidFill>
+                <a:latin typeface="Calibri"/>
+              </a:rPr>
+              <a:t>A real constraint — you can't do everything at once. Worth naming, but held lightly today.</a:t>
+            </a:r>
+          </a:p>
+        </p:txBody>
+      </p:sp>
+      <p:sp>
+        <p:nvSpPr>
+          <p:cNvPr id="22" name="TextBox 21"/>
           <p:cNvSpPr txBox="1"/>
           <p:nvPr/>
         </p:nvSpPr>
@@ -13622,7 +16811,7 @@
                 </a:solidFill>
                 <a:latin typeface="Calibri"/>
               </a:rPr>
-              <a:t>What do we start and stop?</a:t>
+              <a:t>What do we stop, start and continue?</a:t>
             </a:r>
           </a:p>
         </p:txBody>
@@ -13636,7 +16825,7 @@
         <p:spPr>
           <a:xfrm>
             <a:off x="822960" y="3566160"/>
-            <a:ext cx="10058400" cy="914400"/>
+            <a:ext cx="10424160" cy="1097280"/>
           </a:xfrm>
           <a:prstGeom prst="rect">
             <a:avLst/>
@@ -13667,7 +16856,25 @@
                 </a:solidFill>
                 <a:latin typeface="Calibri"/>
               </a:rPr>
-              <a:t>Wrestle with your function's questions. Add your own. Land on concrete starts and stops — and lead with the stops.</a:t>
+              <a:t>The questions on each function's slide are </a:t>
+            </a:r>
+            <a:r>
+              <a:rPr sz="1800" b="1" i="0">
+                <a:solidFill>
+                  <a:srgbClr val="8A8BF0"/>
+                </a:solidFill>
+                <a:latin typeface="Calibri"/>
+              </a:rPr>
+              <a:t>thought-starters — your own ideas are better</a:t>
+            </a:r>
+            <a:r>
+              <a:rPr sz="1800" b="0" i="0">
+                <a:solidFill>
+                  <a:srgbClr val="C2CAD4"/>
+                </a:solidFill>
+                <a:latin typeface="Calibri"/>
+              </a:rPr>
+              <a:t>. Use them to prompt your own three, not to box you in.</a:t>
             </a:r>
           </a:p>
         </p:txBody>
@@ -13922,7 +17129,7 @@
         <p:spPr>
           <a:xfrm>
             <a:off x="548640" y="2697480"/>
-            <a:ext cx="10058400" cy="320040"/>
+            <a:ext cx="10789920" cy="320040"/>
           </a:xfrm>
           <a:prstGeom prst="rect">
             <a:avLst/>
@@ -13953,7 +17160,7 @@
                 </a:solidFill>
                 <a:latin typeface="Consolas"/>
               </a:rPr>
-              <a:t>QUESTIONS FOR YOUR TABLE</a:t>
+              <a:t>THOUGHT-STARTERS — YOUR OWN IDEAS ARE BETTER</a:t>
             </a:r>
           </a:p>
         </p:txBody>
@@ -14520,7 +17727,7 @@
         <p:spPr>
           <a:xfrm>
             <a:off x="548640" y="2697480"/>
-            <a:ext cx="10058400" cy="320040"/>
+            <a:ext cx="10789920" cy="320040"/>
           </a:xfrm>
           <a:prstGeom prst="rect">
             <a:avLst/>
@@ -14551,7 +17758,7 @@
                 </a:solidFill>
                 <a:latin typeface="Consolas"/>
               </a:rPr>
-              <a:t>QUESTIONS FOR YOUR TABLE</a:t>
+              <a:t>THOUGHT-STARTERS — YOUR OWN IDEAS ARE BETTER</a:t>
             </a:r>
           </a:p>
         </p:txBody>
